--- a/report/presentation/MATH5360_Final_Group1.pptx
+++ b/report/presentation/MATH5360_Final_Group1.pptx
@@ -43,6 +43,12 @@
     <p:sldId id="288" r:id="rId40"/>
     <p:sldId id="289" r:id="rId41"/>
     <p:sldId id="290" r:id="rId42"/>
+    <p:sldId id="291" r:id="rId43"/>
+    <p:sldId id="292" r:id="rId44"/>
+    <p:sldId id="293" r:id="rId45"/>
+    <p:sldId id="294" r:id="rId46"/>
+    <p:sldId id="295" r:id="rId47"/>
+    <p:sldId id="296" r:id="rId48"/>
   </p:sldIdLst>
   <p:sldSz cx="9906000" cy="6858000" type="A4"/>
   <p:notesSz cx="9906000" cy="6858000"/>
@@ -2576,7 +2582,7 @@
                 </a:solidFill>
                 <a:latin typeface="Calibri"/>
               </a:rPr>
-              <a:t>1 / 35</a:t>
+              <a:t>1 / 41</a:t>
             </a:r>
           </a:p>
         </p:txBody>
@@ -2836,7 +2842,7 @@
                 </a:solidFill>
                 <a:latin typeface="Calibri"/>
               </a:rPr>
-              <a:t>10 / 35</a:t>
+              <a:t>10 / 41</a:t>
             </a:r>
           </a:p>
         </p:txBody>
@@ -3653,7 +3659,7 @@
                 </a:solidFill>
                 <a:latin typeface="Calibri"/>
               </a:rPr>
-              <a:t>11 / 35</a:t>
+              <a:t>11 / 41</a:t>
             </a:r>
           </a:p>
         </p:txBody>
@@ -4110,7 +4116,7 @@
                 </a:solidFill>
                 <a:latin typeface="Calibri"/>
               </a:rPr>
-              <a:t>12 / 35</a:t>
+              <a:t>12 / 41</a:t>
             </a:r>
           </a:p>
         </p:txBody>
@@ -4250,7 +4256,7 @@
                 </a:solidFill>
                 <a:latin typeface="Calibri"/>
               </a:rPr>
-              <a:t>Random walk tests on TY and BTC</a:t>
+              <a:t>Random walk tests on TY and BTC — VR + Push-Response across horizons and decades</a:t>
             </a:r>
           </a:p>
         </p:txBody>
@@ -4320,7 +4326,7 @@
                 </a:solidFill>
                 <a:latin typeface="Calibri"/>
               </a:rPr>
-              <a:t>13 / 35</a:t>
+              <a:t>13 / 41</a:t>
             </a:r>
           </a:p>
         </p:txBody>
@@ -4381,7 +4387,7 @@
                 </a:solidFill>
                 <a:latin typeface="Calibri"/>
               </a:rPr>
-              <a:t>Evidence — Variance Ratio Profile (TY vs BTC)</a:t>
+              <a:t>TY price and implied 10-yr yield, 1983–2026</a:t>
             </a:r>
           </a:p>
         </p:txBody>
@@ -4458,7 +4464,7 @@
       </p:sp>
       <p:pic>
         <p:nvPicPr>
-          <p:cNvPr id="5" name="Picture 4" descr="fig_vr_curves.png"/>
+          <p:cNvPr id="5" name="Picture 4" descr="repl_ty_price_yield.png"/>
           <p:cNvPicPr>
             <a:picLocks noChangeAspect="1"/>
           </p:cNvPicPr>
@@ -4472,8 +4478,8 @@
         </p:blipFill>
         <p:spPr>
           <a:xfrm>
-            <a:off x="365760" y="1082109"/>
-            <a:ext cx="9174480" cy="4693782"/>
+            <a:off x="1168651" y="914400"/>
+            <a:ext cx="7568697" cy="5029200"/>
           </a:xfrm>
           <a:prstGeom prst="rect">
             <a:avLst/>
@@ -4510,7 +4516,7 @@
                 </a:solidFill>
                 <a:latin typeface="Calibri"/>
               </a:rPr>
-              <a:t>Lo–MacKinlay VR(q) on price differences, log-spaced horizons. TY hovers just below 1 across all q (random-walk-like, dipping ~0.89 at 10 sessions). BTC reaches a deeper 0.82 at ~8.6 days. Neither rejects the null at 5%; the push-response test below tells the actually informative story for the strategy.</a:t>
+              <a:t>Top: TY 10-yr Treasury futures daily close. Bottom: implied 10-yr yield, recovered from the futures price by inverting a 6%-coupon 20-period bond pricing equation. Reproduces the structural decline in yields from ~14% (1984) to ~0.5% (2020) before the 2022–24 hiking cycle returned yields to ~4–5%.</a:t>
             </a:r>
           </a:p>
         </p:txBody>
@@ -4580,7 +4586,7 @@
                 </a:solidFill>
                 <a:latin typeface="Calibri"/>
               </a:rPr>
-              <a:t>14 / 35</a:t>
+              <a:t>14 / 41</a:t>
             </a:r>
           </a:p>
         </p:txBody>
@@ -4641,7 +4647,7 @@
                 </a:solidFill>
                 <a:latin typeface="Calibri"/>
               </a:rPr>
-              <a:t>Evidence — Push-Response Diagrams</a:t>
+              <a:t>Variance Ratio vs q — TY 5-min price differences</a:t>
             </a:r>
           </a:p>
         </p:txBody>
@@ -4718,7 +4724,7 @@
       </p:sp>
       <p:pic>
         <p:nvPicPr>
-          <p:cNvPr id="5" name="Picture 4" descr="fig_push_response.png"/>
+          <p:cNvPr id="5" name="Picture 4" descr="repl_ty_vr_curve.png"/>
           <p:cNvPicPr>
             <a:picLocks noChangeAspect="1"/>
           </p:cNvPicPr>
@@ -4732,8 +4738,8 @@
         </p:blipFill>
         <p:spPr>
           <a:xfrm>
-            <a:off x="365760" y="1088150"/>
-            <a:ext cx="9174480" cy="4681700"/>
+            <a:off x="548446" y="914400"/>
+            <a:ext cx="8809108" cy="5029200"/>
           </a:xfrm>
           <a:prstGeom prst="rect">
             <a:avLst/>
@@ -4770,7 +4776,7 @@
                 </a:solidFill>
                 <a:latin typeface="Calibri"/>
               </a:rPr>
-              <a:t>Conditional mean of the forward response per push-decile, with bin-level standard errors. TY shows positive Spearman ρ ≈ 0.59 (p ≈ 0.06) at q = 1 440 bars (~18 sessions). BTC shows ρ ≈ +0.67 (p ≈ 0.02) at q = 3 456 bars (~12 days). These horizons drive the walk-forward picks of L*.</a:t>
+              <a:t>Single-window VR(q) on TY 5-min price differences out to q = 5 000 bars (~62.5 trading days). VR dips to ≈ 0.89 around q = 800 (~10 sessions) and recovers toward 0.96 around q = 3 500 (~44 sessions). Across the entire profile VR &lt; 1, but the gap closes at multi-week horizons — exactly where the push-response test will show positive ρ.</a:t>
             </a:r>
           </a:p>
         </p:txBody>
@@ -4840,7 +4846,7 @@
                 </a:solidFill>
                 <a:latin typeface="Calibri"/>
               </a:rPr>
-              <a:t>15 / 35</a:t>
+              <a:t>15 / 41</a:t>
             </a:r>
           </a:p>
         </p:txBody>
@@ -4901,7 +4907,7 @@
                 </a:solidFill>
                 <a:latin typeface="Calibri"/>
               </a:rPr>
-              <a:t>Strategy — Channel WithDDControl</a:t>
+              <a:t>Variance Ratio Test for TY: past 10/20/30/40 years</a:t>
             </a:r>
           </a:p>
         </p:txBody>
@@ -4971,1278 +4977,73 @@
                 </a:solidFill>
                 <a:latin typeface="Calibri"/>
               </a:rPr>
-              <a:t>STRATEGY</a:t>
-            </a:r>
-          </a:p>
-        </p:txBody>
-      </p:sp>
-      <p:sp>
-        <p:nvSpPr>
-          <p:cNvPr id="5" name="TextBox 4"/>
-          <p:cNvSpPr txBox="1"/>
-          <p:nvPr/>
-        </p:nvSpPr>
-        <p:spPr>
-          <a:xfrm>
-            <a:off x="457200" y="960120"/>
-            <a:ext cx="4358640" cy="365760"/>
-          </a:xfrm>
-          <a:prstGeom prst="rect">
-            <a:avLst/>
-          </a:prstGeom>
-          <a:noFill/>
-        </p:spPr>
-        <p:txBody>
-          <a:bodyPr wrap="square">
-            <a:spAutoFit/>
-          </a:bodyPr>
-          <a:lstStyle/>
-          <a:p>
-            <a:pPr algn="l"/>
-            <a:r>
-              <a:rPr sz="1400" b="1" i="0">
-                <a:solidFill>
-                  <a:srgbClr val="012169"/>
-                </a:solidFill>
-                <a:latin typeface="Calibri"/>
-              </a:rPr>
-              <a:t>Core parameters</a:t>
-            </a:r>
-          </a:p>
-        </p:txBody>
-      </p:sp>
-      <p:sp>
-        <p:nvSpPr>
-          <p:cNvPr id="6" name="Rectangle 5"/>
-          <p:cNvSpPr/>
-          <p:nvPr/>
-        </p:nvSpPr>
-        <p:spPr>
-          <a:xfrm>
-            <a:off x="457200" y="1371600"/>
-            <a:ext cx="594360" cy="594360"/>
-          </a:xfrm>
-          <a:prstGeom prst="rect">
-            <a:avLst/>
-          </a:prstGeom>
-          <a:solidFill>
-            <a:srgbClr val="012169"/>
-          </a:solidFill>
-          <a:ln>
-            <a:noFill/>
-          </a:ln>
-          <a:effectLst/>
-        </p:spPr>
-        <p:style>
-          <a:lnRef idx="1">
-            <a:schemeClr val="accent1"/>
-          </a:lnRef>
-          <a:fillRef idx="3">
-            <a:schemeClr val="accent1"/>
-          </a:fillRef>
-          <a:effectRef idx="2">
-            <a:schemeClr val="accent1"/>
-          </a:effectRef>
-          <a:fontRef idx="minor">
-            <a:schemeClr val="lt1"/>
-          </a:fontRef>
-        </p:style>
-        <p:txBody>
-          <a:bodyPr rtlCol="0" anchor="ctr"/>
-          <a:lstStyle/>
-          <a:p>
-            <a:pPr algn="ctr"/>
+              <a:t>DIAGNOSTICS</a:t>
+            </a:r>
+          </a:p>
+        </p:txBody>
+      </p:sp>
+      <p:pic>
+        <p:nvPicPr>
+          <p:cNvPr id="5" name="Picture 4" descr="repl_ty_vr_lookback.png"/>
+          <p:cNvPicPr>
+            <a:picLocks noChangeAspect="1"/>
+          </p:cNvPicPr>
+          <p:nvPr/>
+        </p:nvPicPr>
+        <p:blipFill>
+          <a:blip r:embed="rId2"/>
+          <a:stretch>
+            <a:fillRect/>
+          </a:stretch>
+        </p:blipFill>
+        <p:spPr>
+          <a:xfrm>
+            <a:off x="508404" y="914400"/>
+            <a:ext cx="8889192" cy="5029200"/>
+          </a:xfrm>
+          <a:prstGeom prst="rect">
+            <a:avLst/>
+          </a:prstGeom>
+        </p:spPr>
+      </p:pic>
+      <p:sp>
+        <p:nvSpPr>
+          <p:cNvPr id="6" name="TextBox 5"/>
+          <p:cNvSpPr txBox="1"/>
+          <p:nvPr/>
+        </p:nvSpPr>
+        <p:spPr>
+          <a:xfrm>
+            <a:off x="365760" y="5989320"/>
+            <a:ext cx="9174480" cy="411480"/>
+          </a:xfrm>
+          <a:prstGeom prst="rect">
+            <a:avLst/>
+          </a:prstGeom>
+          <a:noFill/>
+        </p:spPr>
+        <p:txBody>
+          <a:bodyPr wrap="square">
+            <a:spAutoFit/>
+          </a:bodyPr>
+          <a:lstStyle/>
+          <a:p>
+            <a:pPr algn="l"/>
+            <a:r>
+              <a:rPr sz="1050" b="0" i="0">
+                <a:solidFill>
+                  <a:srgbClr val="1B365D"/>
+                </a:solidFill>
+                <a:latin typeface="Calibri"/>
+              </a:rPr>
+              <a:t>How the VR profile depends on the lookback window. The Past-10-year curve crosses above 1 around q ≈ 4 000 — Treasuries have been *trending* in the 2016–2026 sample. Longer lookbacks smooth this into the long-run profile, but the trend signal at multi-week horizons is preserved.</a:t>
+            </a:r>
           </a:p>
         </p:txBody>
       </p:sp>
       <p:sp>
         <p:nvSpPr>
           <p:cNvPr id="7" name="TextBox 6"/>
-          <p:cNvSpPr txBox="1"/>
-          <p:nvPr/>
-        </p:nvSpPr>
-        <p:spPr>
-          <a:xfrm>
-            <a:off x="457200" y="1490472"/>
-            <a:ext cx="594360" cy="411480"/>
-          </a:xfrm>
-          <a:prstGeom prst="rect">
-            <a:avLst/>
-          </a:prstGeom>
-          <a:noFill/>
-        </p:spPr>
-        <p:txBody>
-          <a:bodyPr wrap="square">
-            <a:spAutoFit/>
-          </a:bodyPr>
-          <a:lstStyle/>
-          <a:p>
-            <a:pPr algn="ctr"/>
-            <a:r>
-              <a:rPr sz="1800" b="1" i="0">
-                <a:solidFill>
-                  <a:srgbClr val="A28D5B"/>
-                </a:solidFill>
-                <a:latin typeface="Calibri"/>
-              </a:rPr>
-              <a:t>L</a:t>
-            </a:r>
-          </a:p>
-        </p:txBody>
-      </p:sp>
-      <p:sp>
-        <p:nvSpPr>
-          <p:cNvPr id="8" name="TextBox 7"/>
-          <p:cNvSpPr txBox="1"/>
-          <p:nvPr/>
-        </p:nvSpPr>
-        <p:spPr>
-          <a:xfrm>
-            <a:off x="1234440" y="1371600"/>
-            <a:ext cx="3581400" cy="274320"/>
-          </a:xfrm>
-          <a:prstGeom prst="rect">
-            <a:avLst/>
-          </a:prstGeom>
-          <a:noFill/>
-        </p:spPr>
-        <p:txBody>
-          <a:bodyPr wrap="square">
-            <a:spAutoFit/>
-          </a:bodyPr>
-          <a:lstStyle/>
-          <a:p>
-            <a:pPr algn="l"/>
-            <a:r>
-              <a:rPr sz="1200" b="1" i="0">
-                <a:solidFill>
-                  <a:srgbClr val="012169"/>
-                </a:solidFill>
-                <a:latin typeface="Calibri"/>
-              </a:rPr>
-              <a:t>Channel length</a:t>
-            </a:r>
-          </a:p>
-        </p:txBody>
-      </p:sp>
-      <p:sp>
-        <p:nvSpPr>
-          <p:cNvPr id="9" name="TextBox 8"/>
-          <p:cNvSpPr txBox="1"/>
-          <p:nvPr/>
-        </p:nvSpPr>
-        <p:spPr>
-          <a:xfrm>
-            <a:off x="1234440" y="1664208"/>
-            <a:ext cx="3581400" cy="1280160"/>
-          </a:xfrm>
-          <a:prstGeom prst="rect">
-            <a:avLst/>
-          </a:prstGeom>
-          <a:noFill/>
-        </p:spPr>
-        <p:txBody>
-          <a:bodyPr wrap="square">
-            <a:spAutoFit/>
-          </a:bodyPr>
-          <a:lstStyle/>
-          <a:p>
-            <a:pPr algn="l"/>
-            <a:r>
-              <a:rPr sz="1050" b="0" i="0">
-                <a:solidFill>
-                  <a:srgbClr val="1B365D"/>
-                </a:solidFill>
-                <a:latin typeface="Calibri"/>
-              </a:rPr>
-              <a:t>Number of bars in the rolling High/Low channel. Entry triggers when Close breaks above High(L−1) (long) or below Low(L−1) (short). Captures the trending horizon.</a:t>
-            </a:r>
-          </a:p>
-        </p:txBody>
-      </p:sp>
-      <p:sp>
-        <p:nvSpPr>
-          <p:cNvPr id="10" name="Rectangle 9"/>
-          <p:cNvSpPr/>
-          <p:nvPr/>
-        </p:nvSpPr>
-        <p:spPr>
-          <a:xfrm>
-            <a:off x="457200" y="2788920"/>
-            <a:ext cx="594360" cy="594360"/>
-          </a:xfrm>
-          <a:prstGeom prst="rect">
-            <a:avLst/>
-          </a:prstGeom>
-          <a:solidFill>
-            <a:srgbClr val="012169"/>
-          </a:solidFill>
-          <a:ln>
-            <a:noFill/>
-          </a:ln>
-          <a:effectLst/>
-        </p:spPr>
-        <p:style>
-          <a:lnRef idx="1">
-            <a:schemeClr val="accent1"/>
-          </a:lnRef>
-          <a:fillRef idx="3">
-            <a:schemeClr val="accent1"/>
-          </a:fillRef>
-          <a:effectRef idx="2">
-            <a:schemeClr val="accent1"/>
-          </a:effectRef>
-          <a:fontRef idx="minor">
-            <a:schemeClr val="lt1"/>
-          </a:fontRef>
-        </p:style>
-        <p:txBody>
-          <a:bodyPr rtlCol="0" anchor="ctr"/>
-          <a:lstStyle/>
-          <a:p>
-            <a:pPr algn="ctr"/>
-          </a:p>
-        </p:txBody>
-      </p:sp>
-      <p:sp>
-        <p:nvSpPr>
-          <p:cNvPr id="11" name="TextBox 10"/>
-          <p:cNvSpPr txBox="1"/>
-          <p:nvPr/>
-        </p:nvSpPr>
-        <p:spPr>
-          <a:xfrm>
-            <a:off x="457200" y="2907792"/>
-            <a:ext cx="594360" cy="411480"/>
-          </a:xfrm>
-          <a:prstGeom prst="rect">
-            <a:avLst/>
-          </a:prstGeom>
-          <a:noFill/>
-        </p:spPr>
-        <p:txBody>
-          <a:bodyPr wrap="square">
-            <a:spAutoFit/>
-          </a:bodyPr>
-          <a:lstStyle/>
-          <a:p>
-            <a:pPr algn="ctr"/>
-            <a:r>
-              <a:rPr sz="1800" b="1" i="0">
-                <a:solidFill>
-                  <a:srgbClr val="A28D5B"/>
-                </a:solidFill>
-                <a:latin typeface="Calibri"/>
-              </a:rPr>
-              <a:t>S</a:t>
-            </a:r>
-          </a:p>
-        </p:txBody>
-      </p:sp>
-      <p:sp>
-        <p:nvSpPr>
-          <p:cNvPr id="12" name="TextBox 11"/>
-          <p:cNvSpPr txBox="1"/>
-          <p:nvPr/>
-        </p:nvSpPr>
-        <p:spPr>
-          <a:xfrm>
-            <a:off x="1234440" y="2788920"/>
-            <a:ext cx="3581400" cy="274320"/>
-          </a:xfrm>
-          <a:prstGeom prst="rect">
-            <a:avLst/>
-          </a:prstGeom>
-          <a:noFill/>
-        </p:spPr>
-        <p:txBody>
-          <a:bodyPr wrap="square">
-            <a:spAutoFit/>
-          </a:bodyPr>
-          <a:lstStyle/>
-          <a:p>
-            <a:pPr algn="l"/>
-            <a:r>
-              <a:rPr sz="1200" b="1" i="0">
-                <a:solidFill>
-                  <a:srgbClr val="012169"/>
-                </a:solidFill>
-                <a:latin typeface="Calibri"/>
-              </a:rPr>
-              <a:t>Drawdown stop</a:t>
-            </a:r>
-          </a:p>
-        </p:txBody>
-      </p:sp>
-      <p:sp>
-        <p:nvSpPr>
-          <p:cNvPr id="13" name="TextBox 12"/>
-          <p:cNvSpPr txBox="1"/>
-          <p:nvPr/>
-        </p:nvSpPr>
-        <p:spPr>
-          <a:xfrm>
-            <a:off x="1234440" y="3081528"/>
-            <a:ext cx="3581400" cy="1280160"/>
-          </a:xfrm>
-          <a:prstGeom prst="rect">
-            <a:avLst/>
-          </a:prstGeom>
-          <a:noFill/>
-        </p:spPr>
-        <p:txBody>
-          <a:bodyPr wrap="square">
-            <a:spAutoFit/>
-          </a:bodyPr>
-          <a:lstStyle/>
-          <a:p>
-            <a:pPr algn="l"/>
-            <a:r>
-              <a:rPr sz="1050" b="0" i="0">
-                <a:solidFill>
-                  <a:srgbClr val="1B365D"/>
-                </a:solidFill>
-                <a:latin typeface="Calibri"/>
-              </a:rPr>
-              <a:t>Fraction of running peak equity. Position closes when the running drawdown exceeds S × peak. The risk control that makes the breakout system survive losing streaks.</a:t>
-            </a:r>
-          </a:p>
-        </p:txBody>
-      </p:sp>
-      <p:sp>
-        <p:nvSpPr>
-          <p:cNvPr id="14" name="Rectangle 13"/>
-          <p:cNvSpPr/>
-          <p:nvPr/>
-        </p:nvSpPr>
-        <p:spPr>
-          <a:xfrm>
-            <a:off x="457200" y="4206240"/>
-            <a:ext cx="594360" cy="594360"/>
-          </a:xfrm>
-          <a:prstGeom prst="rect">
-            <a:avLst/>
-          </a:prstGeom>
-          <a:solidFill>
-            <a:srgbClr val="012169"/>
-          </a:solidFill>
-          <a:ln>
-            <a:noFill/>
-          </a:ln>
-          <a:effectLst/>
-        </p:spPr>
-        <p:style>
-          <a:lnRef idx="1">
-            <a:schemeClr val="accent1"/>
-          </a:lnRef>
-          <a:fillRef idx="3">
-            <a:schemeClr val="accent1"/>
-          </a:fillRef>
-          <a:effectRef idx="2">
-            <a:schemeClr val="accent1"/>
-          </a:effectRef>
-          <a:fontRef idx="minor">
-            <a:schemeClr val="lt1"/>
-          </a:fontRef>
-        </p:style>
-        <p:txBody>
-          <a:bodyPr rtlCol="0" anchor="ctr"/>
-          <a:lstStyle/>
-          <a:p>
-            <a:pPr algn="ctr"/>
-          </a:p>
-        </p:txBody>
-      </p:sp>
-      <p:sp>
-        <p:nvSpPr>
-          <p:cNvPr id="15" name="TextBox 14"/>
-          <p:cNvSpPr txBox="1"/>
-          <p:nvPr/>
-        </p:nvSpPr>
-        <p:spPr>
-          <a:xfrm>
-            <a:off x="457200" y="4325112"/>
-            <a:ext cx="594360" cy="411480"/>
-          </a:xfrm>
-          <a:prstGeom prst="rect">
-            <a:avLst/>
-          </a:prstGeom>
-          <a:noFill/>
-        </p:spPr>
-        <p:txBody>
-          <a:bodyPr wrap="square">
-            <a:spAutoFit/>
-          </a:bodyPr>
-          <a:lstStyle/>
-          <a:p>
-            <a:pPr algn="ctr"/>
-            <a:r>
-              <a:rPr sz="1800" b="1" i="0">
-                <a:solidFill>
-                  <a:srgbClr val="A28D5B"/>
-                </a:solidFill>
-                <a:latin typeface="Calibri"/>
-              </a:rPr>
-              <a:t>Slippage</a:t>
-            </a:r>
-          </a:p>
-        </p:txBody>
-      </p:sp>
-      <p:sp>
-        <p:nvSpPr>
-          <p:cNvPr id="16" name="TextBox 15"/>
-          <p:cNvSpPr txBox="1"/>
-          <p:nvPr/>
-        </p:nvSpPr>
-        <p:spPr>
-          <a:xfrm>
-            <a:off x="1234440" y="4206240"/>
-            <a:ext cx="3581400" cy="274320"/>
-          </a:xfrm>
-          <a:prstGeom prst="rect">
-            <a:avLst/>
-          </a:prstGeom>
-          <a:noFill/>
-        </p:spPr>
-        <p:txBody>
-          <a:bodyPr wrap="square">
-            <a:spAutoFit/>
-          </a:bodyPr>
-          <a:lstStyle/>
-          <a:p>
-            <a:pPr algn="l"/>
-            <a:r>
-              <a:rPr sz="1200" b="1" i="0">
-                <a:solidFill>
-                  <a:srgbClr val="012169"/>
-                </a:solidFill>
-                <a:latin typeface="Calibri"/>
-              </a:rPr>
-              <a:t>Round-turn cost</a:t>
-            </a:r>
-          </a:p>
-        </p:txBody>
-      </p:sp>
-      <p:sp>
-        <p:nvSpPr>
-          <p:cNvPr id="17" name="TextBox 16"/>
-          <p:cNvSpPr txBox="1"/>
-          <p:nvPr/>
-        </p:nvSpPr>
-        <p:spPr>
-          <a:xfrm>
-            <a:off x="1234440" y="4498848"/>
-            <a:ext cx="3581400" cy="1280160"/>
-          </a:xfrm>
-          <a:prstGeom prst="rect">
-            <a:avLst/>
-          </a:prstGeom>
-          <a:noFill/>
-        </p:spPr>
-        <p:txBody>
-          <a:bodyPr wrap="square">
-            <a:spAutoFit/>
-          </a:bodyPr>
-          <a:lstStyle/>
-          <a:p>
-            <a:pPr algn="l"/>
-            <a:r>
-              <a:rPr sz="1050" b="0" i="0">
-                <a:solidFill>
-                  <a:srgbClr val="1B365D"/>
-                </a:solidFill>
-                <a:latin typeface="Calibri"/>
-              </a:rPr>
-              <a:t>Debited on every position change. $18.625 for TY, $25.00 for BTC, per TF Data column V. Charged in full on every entry and exit.</a:t>
-            </a:r>
-          </a:p>
-        </p:txBody>
-      </p:sp>
-      <p:sp>
-        <p:nvSpPr>
-          <p:cNvPr id="18" name="TextBox 17"/>
-          <p:cNvSpPr txBox="1"/>
-          <p:nvPr/>
-        </p:nvSpPr>
-        <p:spPr>
-          <a:xfrm>
-            <a:off x="4998720" y="960120"/>
-            <a:ext cx="4358640" cy="365760"/>
-          </a:xfrm>
-          <a:prstGeom prst="rect">
-            <a:avLst/>
-          </a:prstGeom>
-          <a:noFill/>
-        </p:spPr>
-        <p:txBody>
-          <a:bodyPr wrap="square">
-            <a:spAutoFit/>
-          </a:bodyPr>
-          <a:lstStyle/>
-          <a:p>
-            <a:pPr algn="l"/>
-            <a:r>
-              <a:rPr sz="1400" b="1" i="0">
-                <a:solidFill>
-                  <a:srgbClr val="012169"/>
-                </a:solidFill>
-                <a:latin typeface="Calibri"/>
-              </a:rPr>
-              <a:t>Logic flow per bar</a:t>
-            </a:r>
-          </a:p>
-        </p:txBody>
-      </p:sp>
-      <p:sp>
-        <p:nvSpPr>
-          <p:cNvPr id="19" name="Rectangle 18"/>
-          <p:cNvSpPr/>
-          <p:nvPr/>
-        </p:nvSpPr>
-        <p:spPr>
-          <a:xfrm>
-            <a:off x="4998720" y="1371600"/>
-            <a:ext cx="365760" cy="365760"/>
-          </a:xfrm>
-          <a:prstGeom prst="rect">
-            <a:avLst/>
-          </a:prstGeom>
-          <a:solidFill>
-            <a:srgbClr val="A28D5B"/>
-          </a:solidFill>
-          <a:ln>
-            <a:noFill/>
-          </a:ln>
-          <a:effectLst/>
-        </p:spPr>
-        <p:style>
-          <a:lnRef idx="1">
-            <a:schemeClr val="accent1"/>
-          </a:lnRef>
-          <a:fillRef idx="3">
-            <a:schemeClr val="accent1"/>
-          </a:fillRef>
-          <a:effectRef idx="2">
-            <a:schemeClr val="accent1"/>
-          </a:effectRef>
-          <a:fontRef idx="minor">
-            <a:schemeClr val="lt1"/>
-          </a:fontRef>
-        </p:style>
-        <p:txBody>
-          <a:bodyPr rtlCol="0" anchor="ctr"/>
-          <a:lstStyle/>
-          <a:p>
-            <a:pPr algn="ctr"/>
-          </a:p>
-        </p:txBody>
-      </p:sp>
-      <p:sp>
-        <p:nvSpPr>
-          <p:cNvPr id="20" name="TextBox 19"/>
-          <p:cNvSpPr txBox="1"/>
-          <p:nvPr/>
-        </p:nvSpPr>
-        <p:spPr>
-          <a:xfrm>
-            <a:off x="4998720" y="1417320"/>
-            <a:ext cx="365760" cy="292608"/>
-          </a:xfrm>
-          <a:prstGeom prst="rect">
-            <a:avLst/>
-          </a:prstGeom>
-          <a:noFill/>
-        </p:spPr>
-        <p:txBody>
-          <a:bodyPr wrap="square">
-            <a:spAutoFit/>
-          </a:bodyPr>
-          <a:lstStyle/>
-          <a:p>
-            <a:pPr algn="ctr"/>
-            <a:r>
-              <a:rPr sz="1200" b="1" i="0">
-                <a:solidFill>
-                  <a:srgbClr val="FFFFFF"/>
-                </a:solidFill>
-                <a:latin typeface="Calibri"/>
-              </a:rPr>
-              <a:t>1</a:t>
-            </a:r>
-          </a:p>
-        </p:txBody>
-      </p:sp>
-      <p:sp>
-        <p:nvSpPr>
-          <p:cNvPr id="21" name="TextBox 20"/>
-          <p:cNvSpPr txBox="1"/>
-          <p:nvPr/>
-        </p:nvSpPr>
-        <p:spPr>
-          <a:xfrm>
-            <a:off x="5501640" y="1371600"/>
-            <a:ext cx="3855720" cy="274320"/>
-          </a:xfrm>
-          <a:prstGeom prst="rect">
-            <a:avLst/>
-          </a:prstGeom>
-          <a:noFill/>
-        </p:spPr>
-        <p:txBody>
-          <a:bodyPr wrap="square">
-            <a:spAutoFit/>
-          </a:bodyPr>
-          <a:lstStyle/>
-          <a:p>
-            <a:pPr algn="l"/>
-            <a:r>
-              <a:rPr sz="1150" b="1" i="0">
-                <a:solidFill>
-                  <a:srgbClr val="012169"/>
-                </a:solidFill>
-                <a:latin typeface="Calibri"/>
-              </a:rPr>
-              <a:t>Compute rolling channel</a:t>
-            </a:r>
-          </a:p>
-        </p:txBody>
-      </p:sp>
-      <p:sp>
-        <p:nvSpPr>
-          <p:cNvPr id="22" name="TextBox 21"/>
-          <p:cNvSpPr txBox="1"/>
-          <p:nvPr/>
-        </p:nvSpPr>
-        <p:spPr>
-          <a:xfrm>
-            <a:off x="5501640" y="1645920"/>
-            <a:ext cx="3855720" cy="640080"/>
-          </a:xfrm>
-          <a:prstGeom prst="rect">
-            <a:avLst/>
-          </a:prstGeom>
-          <a:noFill/>
-        </p:spPr>
-        <p:txBody>
-          <a:bodyPr wrap="square">
-            <a:spAutoFit/>
-          </a:bodyPr>
-          <a:lstStyle/>
-          <a:p>
-            <a:pPr algn="l"/>
-            <a:r>
-              <a:rPr sz="1000" b="0" i="0">
-                <a:solidFill>
-                  <a:srgbClr val="1B365D"/>
-                </a:solidFill>
-                <a:latin typeface="DejaVu Sans Mono"/>
-              </a:rPr>
-              <a:t>high_band = max(High[t−L .. t−1])
-low_band  = min(Low[t−L .. t−1])</a:t>
-            </a:r>
-          </a:p>
-        </p:txBody>
-      </p:sp>
-      <p:sp>
-        <p:nvSpPr>
-          <p:cNvPr id="23" name="Rectangle 22"/>
-          <p:cNvSpPr/>
-          <p:nvPr/>
-        </p:nvSpPr>
-        <p:spPr>
-          <a:xfrm>
-            <a:off x="4998720" y="2240280"/>
-            <a:ext cx="365760" cy="365760"/>
-          </a:xfrm>
-          <a:prstGeom prst="rect">
-            <a:avLst/>
-          </a:prstGeom>
-          <a:solidFill>
-            <a:srgbClr val="A28D5B"/>
-          </a:solidFill>
-          <a:ln>
-            <a:noFill/>
-          </a:ln>
-          <a:effectLst/>
-        </p:spPr>
-        <p:style>
-          <a:lnRef idx="1">
-            <a:schemeClr val="accent1"/>
-          </a:lnRef>
-          <a:fillRef idx="3">
-            <a:schemeClr val="accent1"/>
-          </a:fillRef>
-          <a:effectRef idx="2">
-            <a:schemeClr val="accent1"/>
-          </a:effectRef>
-          <a:fontRef idx="minor">
-            <a:schemeClr val="lt1"/>
-          </a:fontRef>
-        </p:style>
-        <p:txBody>
-          <a:bodyPr rtlCol="0" anchor="ctr"/>
-          <a:lstStyle/>
-          <a:p>
-            <a:pPr algn="ctr"/>
-          </a:p>
-        </p:txBody>
-      </p:sp>
-      <p:sp>
-        <p:nvSpPr>
-          <p:cNvPr id="24" name="TextBox 23"/>
-          <p:cNvSpPr txBox="1"/>
-          <p:nvPr/>
-        </p:nvSpPr>
-        <p:spPr>
-          <a:xfrm>
-            <a:off x="4998720" y="2286000"/>
-            <a:ext cx="365760" cy="292608"/>
-          </a:xfrm>
-          <a:prstGeom prst="rect">
-            <a:avLst/>
-          </a:prstGeom>
-          <a:noFill/>
-        </p:spPr>
-        <p:txBody>
-          <a:bodyPr wrap="square">
-            <a:spAutoFit/>
-          </a:bodyPr>
-          <a:lstStyle/>
-          <a:p>
-            <a:pPr algn="ctr"/>
-            <a:r>
-              <a:rPr sz="1200" b="1" i="0">
-                <a:solidFill>
-                  <a:srgbClr val="FFFFFF"/>
-                </a:solidFill>
-                <a:latin typeface="Calibri"/>
-              </a:rPr>
-              <a:t>2</a:t>
-            </a:r>
-          </a:p>
-        </p:txBody>
-      </p:sp>
-      <p:sp>
-        <p:nvSpPr>
-          <p:cNvPr id="25" name="TextBox 24"/>
-          <p:cNvSpPr txBox="1"/>
-          <p:nvPr/>
-        </p:nvSpPr>
-        <p:spPr>
-          <a:xfrm>
-            <a:off x="5501640" y="2240280"/>
-            <a:ext cx="3855720" cy="274320"/>
-          </a:xfrm>
-          <a:prstGeom prst="rect">
-            <a:avLst/>
-          </a:prstGeom>
-          <a:noFill/>
-        </p:spPr>
-        <p:txBody>
-          <a:bodyPr wrap="square">
-            <a:spAutoFit/>
-          </a:bodyPr>
-          <a:lstStyle/>
-          <a:p>
-            <a:pPr algn="l"/>
-            <a:r>
-              <a:rPr sz="1150" b="1" i="0">
-                <a:solidFill>
-                  <a:srgbClr val="012169"/>
-                </a:solidFill>
-                <a:latin typeface="Calibri"/>
-              </a:rPr>
-              <a:t>Check breakout</a:t>
-            </a:r>
-          </a:p>
-        </p:txBody>
-      </p:sp>
-      <p:sp>
-        <p:nvSpPr>
-          <p:cNvPr id="26" name="TextBox 25"/>
-          <p:cNvSpPr txBox="1"/>
-          <p:nvPr/>
-        </p:nvSpPr>
-        <p:spPr>
-          <a:xfrm>
-            <a:off x="5501640" y="2514600"/>
-            <a:ext cx="3855720" cy="640080"/>
-          </a:xfrm>
-          <a:prstGeom prst="rect">
-            <a:avLst/>
-          </a:prstGeom>
-          <a:noFill/>
-        </p:spPr>
-        <p:txBody>
-          <a:bodyPr wrap="square">
-            <a:spAutoFit/>
-          </a:bodyPr>
-          <a:lstStyle/>
-          <a:p>
-            <a:pPr algn="l"/>
-            <a:r>
-              <a:rPr sz="1000" b="0" i="0">
-                <a:solidFill>
-                  <a:srgbClr val="1B365D"/>
-                </a:solidFill>
-                <a:latin typeface="DejaVu Sans Mono"/>
-              </a:rPr>
-              <a:t>If Close[t] &gt; high_band → enter LONG
-If Close[t] &lt; low_band → enter SHORT</a:t>
-            </a:r>
-          </a:p>
-        </p:txBody>
-      </p:sp>
-      <p:sp>
-        <p:nvSpPr>
-          <p:cNvPr id="27" name="Rectangle 26"/>
-          <p:cNvSpPr/>
-          <p:nvPr/>
-        </p:nvSpPr>
-        <p:spPr>
-          <a:xfrm>
-            <a:off x="4998720" y="3108960"/>
-            <a:ext cx="365760" cy="365760"/>
-          </a:xfrm>
-          <a:prstGeom prst="rect">
-            <a:avLst/>
-          </a:prstGeom>
-          <a:solidFill>
-            <a:srgbClr val="A28D5B"/>
-          </a:solidFill>
-          <a:ln>
-            <a:noFill/>
-          </a:ln>
-          <a:effectLst/>
-        </p:spPr>
-        <p:style>
-          <a:lnRef idx="1">
-            <a:schemeClr val="accent1"/>
-          </a:lnRef>
-          <a:fillRef idx="3">
-            <a:schemeClr val="accent1"/>
-          </a:fillRef>
-          <a:effectRef idx="2">
-            <a:schemeClr val="accent1"/>
-          </a:effectRef>
-          <a:fontRef idx="minor">
-            <a:schemeClr val="lt1"/>
-          </a:fontRef>
-        </p:style>
-        <p:txBody>
-          <a:bodyPr rtlCol="0" anchor="ctr"/>
-          <a:lstStyle/>
-          <a:p>
-            <a:pPr algn="ctr"/>
-          </a:p>
-        </p:txBody>
-      </p:sp>
-      <p:sp>
-        <p:nvSpPr>
-          <p:cNvPr id="28" name="TextBox 27"/>
-          <p:cNvSpPr txBox="1"/>
-          <p:nvPr/>
-        </p:nvSpPr>
-        <p:spPr>
-          <a:xfrm>
-            <a:off x="4998720" y="3154680"/>
-            <a:ext cx="365760" cy="292608"/>
-          </a:xfrm>
-          <a:prstGeom prst="rect">
-            <a:avLst/>
-          </a:prstGeom>
-          <a:noFill/>
-        </p:spPr>
-        <p:txBody>
-          <a:bodyPr wrap="square">
-            <a:spAutoFit/>
-          </a:bodyPr>
-          <a:lstStyle/>
-          <a:p>
-            <a:pPr algn="ctr"/>
-            <a:r>
-              <a:rPr sz="1200" b="1" i="0">
-                <a:solidFill>
-                  <a:srgbClr val="FFFFFF"/>
-                </a:solidFill>
-                <a:latin typeface="Calibri"/>
-              </a:rPr>
-              <a:t>3</a:t>
-            </a:r>
-          </a:p>
-        </p:txBody>
-      </p:sp>
-      <p:sp>
-        <p:nvSpPr>
-          <p:cNvPr id="29" name="TextBox 28"/>
-          <p:cNvSpPr txBox="1"/>
-          <p:nvPr/>
-        </p:nvSpPr>
-        <p:spPr>
-          <a:xfrm>
-            <a:off x="5501640" y="3108960"/>
-            <a:ext cx="3855720" cy="274320"/>
-          </a:xfrm>
-          <a:prstGeom prst="rect">
-            <a:avLst/>
-          </a:prstGeom>
-          <a:noFill/>
-        </p:spPr>
-        <p:txBody>
-          <a:bodyPr wrap="square">
-            <a:spAutoFit/>
-          </a:bodyPr>
-          <a:lstStyle/>
-          <a:p>
-            <a:pPr algn="l"/>
-            <a:r>
-              <a:rPr sz="1150" b="1" i="0">
-                <a:solidFill>
-                  <a:srgbClr val="012169"/>
-                </a:solidFill>
-                <a:latin typeface="Calibri"/>
-              </a:rPr>
-              <a:t>Track equity &amp; drawdown</a:t>
-            </a:r>
-          </a:p>
-        </p:txBody>
-      </p:sp>
-      <p:sp>
-        <p:nvSpPr>
-          <p:cNvPr id="30" name="TextBox 29"/>
-          <p:cNvSpPr txBox="1"/>
-          <p:nvPr/>
-        </p:nvSpPr>
-        <p:spPr>
-          <a:xfrm>
-            <a:off x="5501640" y="3383280"/>
-            <a:ext cx="3855720" cy="640080"/>
-          </a:xfrm>
-          <a:prstGeom prst="rect">
-            <a:avLst/>
-          </a:prstGeom>
-          <a:noFill/>
-        </p:spPr>
-        <p:txBody>
-          <a:bodyPr wrap="square">
-            <a:spAutoFit/>
-          </a:bodyPr>
-          <a:lstStyle/>
-          <a:p>
-            <a:pPr algn="l"/>
-            <a:r>
-              <a:rPr sz="1000" b="0" i="0">
-                <a:solidFill>
-                  <a:srgbClr val="1B365D"/>
-                </a:solidFill>
-                <a:latin typeface="DejaVu Sans Mono"/>
-              </a:rPr>
-              <a:t>Mark-to-market each bar. Track running peak and drawdown.</a:t>
-            </a:r>
-          </a:p>
-        </p:txBody>
-      </p:sp>
-      <p:sp>
-        <p:nvSpPr>
-          <p:cNvPr id="31" name="Rectangle 30"/>
-          <p:cNvSpPr/>
-          <p:nvPr/>
-        </p:nvSpPr>
-        <p:spPr>
-          <a:xfrm>
-            <a:off x="4998720" y="3977640"/>
-            <a:ext cx="365760" cy="365760"/>
-          </a:xfrm>
-          <a:prstGeom prst="rect">
-            <a:avLst/>
-          </a:prstGeom>
-          <a:solidFill>
-            <a:srgbClr val="A28D5B"/>
-          </a:solidFill>
-          <a:ln>
-            <a:noFill/>
-          </a:ln>
-          <a:effectLst/>
-        </p:spPr>
-        <p:style>
-          <a:lnRef idx="1">
-            <a:schemeClr val="accent1"/>
-          </a:lnRef>
-          <a:fillRef idx="3">
-            <a:schemeClr val="accent1"/>
-          </a:fillRef>
-          <a:effectRef idx="2">
-            <a:schemeClr val="accent1"/>
-          </a:effectRef>
-          <a:fontRef idx="minor">
-            <a:schemeClr val="lt1"/>
-          </a:fontRef>
-        </p:style>
-        <p:txBody>
-          <a:bodyPr rtlCol="0" anchor="ctr"/>
-          <a:lstStyle/>
-          <a:p>
-            <a:pPr algn="ctr"/>
-          </a:p>
-        </p:txBody>
-      </p:sp>
-      <p:sp>
-        <p:nvSpPr>
-          <p:cNvPr id="32" name="TextBox 31"/>
-          <p:cNvSpPr txBox="1"/>
-          <p:nvPr/>
-        </p:nvSpPr>
-        <p:spPr>
-          <a:xfrm>
-            <a:off x="4998720" y="4023360"/>
-            <a:ext cx="365760" cy="292608"/>
-          </a:xfrm>
-          <a:prstGeom prst="rect">
-            <a:avLst/>
-          </a:prstGeom>
-          <a:noFill/>
-        </p:spPr>
-        <p:txBody>
-          <a:bodyPr wrap="square">
-            <a:spAutoFit/>
-          </a:bodyPr>
-          <a:lstStyle/>
-          <a:p>
-            <a:pPr algn="ctr"/>
-            <a:r>
-              <a:rPr sz="1200" b="1" i="0">
-                <a:solidFill>
-                  <a:srgbClr val="FFFFFF"/>
-                </a:solidFill>
-                <a:latin typeface="Calibri"/>
-              </a:rPr>
-              <a:t>4</a:t>
-            </a:r>
-          </a:p>
-        </p:txBody>
-      </p:sp>
-      <p:sp>
-        <p:nvSpPr>
-          <p:cNvPr id="33" name="TextBox 32"/>
-          <p:cNvSpPr txBox="1"/>
-          <p:nvPr/>
-        </p:nvSpPr>
-        <p:spPr>
-          <a:xfrm>
-            <a:off x="5501640" y="3977640"/>
-            <a:ext cx="3855720" cy="274320"/>
-          </a:xfrm>
-          <a:prstGeom prst="rect">
-            <a:avLst/>
-          </a:prstGeom>
-          <a:noFill/>
-        </p:spPr>
-        <p:txBody>
-          <a:bodyPr wrap="square">
-            <a:spAutoFit/>
-          </a:bodyPr>
-          <a:lstStyle/>
-          <a:p>
-            <a:pPr algn="l"/>
-            <a:r>
-              <a:rPr sz="1150" b="1" i="0">
-                <a:solidFill>
-                  <a:srgbClr val="012169"/>
-                </a:solidFill>
-                <a:latin typeface="Calibri"/>
-              </a:rPr>
-              <a:t>Apply drawdown stop</a:t>
-            </a:r>
-          </a:p>
-        </p:txBody>
-      </p:sp>
-      <p:sp>
-        <p:nvSpPr>
-          <p:cNvPr id="34" name="TextBox 33"/>
-          <p:cNvSpPr txBox="1"/>
-          <p:nvPr/>
-        </p:nvSpPr>
-        <p:spPr>
-          <a:xfrm>
-            <a:off x="5501640" y="4251960"/>
-            <a:ext cx="3855720" cy="640080"/>
-          </a:xfrm>
-          <a:prstGeom prst="rect">
-            <a:avLst/>
-          </a:prstGeom>
-          <a:noFill/>
-        </p:spPr>
-        <p:txBody>
-          <a:bodyPr wrap="square">
-            <a:spAutoFit/>
-          </a:bodyPr>
-          <a:lstStyle/>
-          <a:p>
-            <a:pPr algn="l"/>
-            <a:r>
-              <a:rPr sz="1000" b="0" i="0">
-                <a:solidFill>
-                  <a:srgbClr val="1B365D"/>
-                </a:solidFill>
-                <a:latin typeface="DejaVu Sans Mono"/>
-              </a:rPr>
-              <a:t>If (peak − equity) ≥ S × peak → close position; charge slippage.</a:t>
-            </a:r>
-          </a:p>
-        </p:txBody>
-      </p:sp>
-      <p:sp>
-        <p:nvSpPr>
-          <p:cNvPr id="35" name="Rectangle 34"/>
-          <p:cNvSpPr/>
-          <p:nvPr/>
-        </p:nvSpPr>
-        <p:spPr>
-          <a:xfrm>
-            <a:off x="4998720" y="4846320"/>
-            <a:ext cx="365760" cy="365760"/>
-          </a:xfrm>
-          <a:prstGeom prst="rect">
-            <a:avLst/>
-          </a:prstGeom>
-          <a:solidFill>
-            <a:srgbClr val="A28D5B"/>
-          </a:solidFill>
-          <a:ln>
-            <a:noFill/>
-          </a:ln>
-          <a:effectLst/>
-        </p:spPr>
-        <p:style>
-          <a:lnRef idx="1">
-            <a:schemeClr val="accent1"/>
-          </a:lnRef>
-          <a:fillRef idx="3">
-            <a:schemeClr val="accent1"/>
-          </a:fillRef>
-          <a:effectRef idx="2">
-            <a:schemeClr val="accent1"/>
-          </a:effectRef>
-          <a:fontRef idx="minor">
-            <a:schemeClr val="lt1"/>
-          </a:fontRef>
-        </p:style>
-        <p:txBody>
-          <a:bodyPr rtlCol="0" anchor="ctr"/>
-          <a:lstStyle/>
-          <a:p>
-            <a:pPr algn="ctr"/>
-          </a:p>
-        </p:txBody>
-      </p:sp>
-      <p:sp>
-        <p:nvSpPr>
-          <p:cNvPr id="36" name="TextBox 35"/>
-          <p:cNvSpPr txBox="1"/>
-          <p:nvPr/>
-        </p:nvSpPr>
-        <p:spPr>
-          <a:xfrm>
-            <a:off x="4998720" y="4892040"/>
-            <a:ext cx="365760" cy="292608"/>
-          </a:xfrm>
-          <a:prstGeom prst="rect">
-            <a:avLst/>
-          </a:prstGeom>
-          <a:noFill/>
-        </p:spPr>
-        <p:txBody>
-          <a:bodyPr wrap="square">
-            <a:spAutoFit/>
-          </a:bodyPr>
-          <a:lstStyle/>
-          <a:p>
-            <a:pPr algn="ctr"/>
-            <a:r>
-              <a:rPr sz="1200" b="1" i="0">
-                <a:solidFill>
-                  <a:srgbClr val="FFFFFF"/>
-                </a:solidFill>
-                <a:latin typeface="Calibri"/>
-              </a:rPr>
-              <a:t>5</a:t>
-            </a:r>
-          </a:p>
-        </p:txBody>
-      </p:sp>
-      <p:sp>
-        <p:nvSpPr>
-          <p:cNvPr id="37" name="TextBox 36"/>
-          <p:cNvSpPr txBox="1"/>
-          <p:nvPr/>
-        </p:nvSpPr>
-        <p:spPr>
-          <a:xfrm>
-            <a:off x="5501640" y="4846320"/>
-            <a:ext cx="3855720" cy="274320"/>
-          </a:xfrm>
-          <a:prstGeom prst="rect">
-            <a:avLst/>
-          </a:prstGeom>
-          <a:noFill/>
-        </p:spPr>
-        <p:txBody>
-          <a:bodyPr wrap="square">
-            <a:spAutoFit/>
-          </a:bodyPr>
-          <a:lstStyle/>
-          <a:p>
-            <a:pPr algn="l"/>
-            <a:r>
-              <a:rPr sz="1150" b="1" i="0">
-                <a:solidFill>
-                  <a:srgbClr val="012169"/>
-                </a:solidFill>
-                <a:latin typeface="Calibri"/>
-              </a:rPr>
-              <a:t>Emit closed-trade ledger</a:t>
-            </a:r>
-          </a:p>
-        </p:txBody>
-      </p:sp>
-      <p:sp>
-        <p:nvSpPr>
-          <p:cNvPr id="38" name="TextBox 37"/>
-          <p:cNvSpPr txBox="1"/>
-          <p:nvPr/>
-        </p:nvSpPr>
-        <p:spPr>
-          <a:xfrm>
-            <a:off x="5501640" y="5120640"/>
-            <a:ext cx="3855720" cy="640080"/>
-          </a:xfrm>
-          <a:prstGeom prst="rect">
-            <a:avLst/>
-          </a:prstGeom>
-          <a:noFill/>
-        </p:spPr>
-        <p:txBody>
-          <a:bodyPr wrap="square">
-            <a:spAutoFit/>
-          </a:bodyPr>
-          <a:lstStyle/>
-          <a:p>
-            <a:pPr algn="l"/>
-            <a:r>
-              <a:rPr sz="1000" b="0" i="0">
-                <a:solidFill>
-                  <a:srgbClr val="1B365D"/>
-                </a:solidFill>
-                <a:latin typeface="DejaVu Sans Mono"/>
-              </a:rPr>
-              <a:t>Record entry/exit time, direction, prices, duration, PnL, slippage.</a:t>
-            </a:r>
-          </a:p>
-        </p:txBody>
-      </p:sp>
-      <p:sp>
-        <p:nvSpPr>
-          <p:cNvPr id="39" name="TextBox 38"/>
           <p:cNvSpPr txBox="1"/>
           <p:nvPr/>
         </p:nvSpPr>
@@ -6277,7 +5078,7 @@
       </p:sp>
       <p:sp>
         <p:nvSpPr>
-          <p:cNvPr id="40" name="TextBox 39"/>
+          <p:cNvPr id="8" name="TextBox 7"/>
           <p:cNvSpPr txBox="1"/>
           <p:nvPr/>
         </p:nvSpPr>
@@ -6305,7 +5106,7 @@
                 </a:solidFill>
                 <a:latin typeface="Calibri"/>
               </a:rPr>
-              <a:t>16 / 35</a:t>
+              <a:t>16 / 41</a:t>
             </a:r>
           </a:p>
         </p:txBody>
@@ -6366,7 +5167,7 @@
                 </a:solidFill>
                 <a:latin typeface="Calibri"/>
               </a:rPr>
-              <a:t>Walk-forward design</a:t>
+              <a:t>Variance Ratio Test by backward 10-year windows — TY</a:t>
             </a:r>
           </a:p>
         </p:txBody>
@@ -6436,14 +5237,14 @@
                 </a:solidFill>
                 <a:latin typeface="Calibri"/>
               </a:rPr>
-              <a:t>STRATEGY</a:t>
+              <a:t>DIAGNOSTICS</a:t>
             </a:r>
           </a:p>
         </p:txBody>
       </p:sp>
       <p:pic>
         <p:nvPicPr>
-          <p:cNvPr id="5" name="Picture 4" descr="front_walkforward_schematic.png"/>
+          <p:cNvPr id="5" name="Picture 4" descr="repl_ty_vr_decade_windows.png"/>
           <p:cNvPicPr>
             <a:picLocks noChangeAspect="1"/>
           </p:cNvPicPr>
@@ -6457,8 +5258,8 @@
         </p:blipFill>
         <p:spPr>
           <a:xfrm>
-            <a:off x="375441" y="914400"/>
-            <a:ext cx="9155117" cy="3291840"/>
+            <a:off x="548446" y="914400"/>
+            <a:ext cx="8809108" cy="5029200"/>
           </a:xfrm>
           <a:prstGeom prst="rect">
             <a:avLst/>
@@ -6467,586 +5268,42 @@
       </p:pic>
       <p:sp>
         <p:nvSpPr>
-          <p:cNvPr id="6" name="Rectangle 5"/>
-          <p:cNvSpPr/>
-          <p:nvPr/>
-        </p:nvSpPr>
-        <p:spPr>
-          <a:xfrm>
-            <a:off x="457200" y="4389120"/>
-            <a:ext cx="2890520" cy="411480"/>
-          </a:xfrm>
-          <a:prstGeom prst="rect">
-            <a:avLst/>
-          </a:prstGeom>
-          <a:solidFill>
-            <a:srgbClr val="012169"/>
-          </a:solidFill>
-          <a:ln>
-            <a:noFill/>
-          </a:ln>
-          <a:effectLst/>
-        </p:spPr>
-        <p:style>
-          <a:lnRef idx="1">
-            <a:schemeClr val="accent1"/>
-          </a:lnRef>
-          <a:fillRef idx="3">
-            <a:schemeClr val="accent1"/>
-          </a:fillRef>
-          <a:effectRef idx="2">
-            <a:schemeClr val="accent1"/>
-          </a:effectRef>
-          <a:fontRef idx="minor">
-            <a:schemeClr val="lt1"/>
-          </a:fontRef>
-        </p:style>
-        <p:txBody>
-          <a:bodyPr rtlCol="0" anchor="ctr"/>
-          <a:lstStyle/>
-          <a:p>
-            <a:pPr algn="ctr"/>
+          <p:cNvPr id="6" name="TextBox 5"/>
+          <p:cNvSpPr txBox="1"/>
+          <p:nvPr/>
+        </p:nvSpPr>
+        <p:spPr>
+          <a:xfrm>
+            <a:off x="365760" y="5989320"/>
+            <a:ext cx="9174480" cy="411480"/>
+          </a:xfrm>
+          <a:prstGeom prst="rect">
+            <a:avLst/>
+          </a:prstGeom>
+          <a:noFill/>
+        </p:spPr>
+        <p:txBody>
+          <a:bodyPr wrap="square">
+            <a:spAutoFit/>
+          </a:bodyPr>
+          <a:lstStyle/>
+          <a:p>
+            <a:pPr algn="l"/>
+            <a:r>
+              <a:rPr sz="1050" b="0" i="0">
+                <a:solidFill>
+                  <a:srgbClr val="1B365D"/>
+                </a:solidFill>
+                <a:latin typeface="Calibri"/>
+              </a:rPr>
+              <a:t>Decade-by-decade decomposition. The 2016–2026 decade clearly trends at long q (VR &gt; 1 above q ≈ 3 000). The 2006–2016 decade is the most mean-reverting (the QE/ZIRP era). The earlier windows sit closer to the random-walk null — regime change is real and visible in the data.</a:t>
+            </a:r>
           </a:p>
         </p:txBody>
       </p:sp>
       <p:sp>
         <p:nvSpPr>
           <p:cNvPr id="7" name="TextBox 6"/>
-          <p:cNvSpPr txBox="1"/>
-          <p:nvPr/>
-        </p:nvSpPr>
-        <p:spPr>
-          <a:xfrm>
-            <a:off x="640080" y="4462272"/>
-            <a:ext cx="2524760" cy="320040"/>
-          </a:xfrm>
-          <a:prstGeom prst="rect">
-            <a:avLst/>
-          </a:prstGeom>
-          <a:noFill/>
-        </p:spPr>
-        <p:txBody>
-          <a:bodyPr wrap="square">
-            <a:spAutoFit/>
-          </a:bodyPr>
-          <a:lstStyle/>
-          <a:p>
-            <a:pPr algn="l"/>
-            <a:r>
-              <a:rPr sz="1200" b="1" i="0">
-                <a:solidFill>
-                  <a:srgbClr val="A28D5B"/>
-                </a:solidFill>
-                <a:latin typeface="Calibri"/>
-              </a:rPr>
-              <a:t>T = 4 years</a:t>
-            </a:r>
-          </a:p>
-        </p:txBody>
-      </p:sp>
-      <p:sp>
-        <p:nvSpPr>
-          <p:cNvPr id="8" name="Rectangle 7"/>
-          <p:cNvSpPr/>
-          <p:nvPr/>
-        </p:nvSpPr>
-        <p:spPr>
-          <a:xfrm>
-            <a:off x="457200" y="4800600"/>
-            <a:ext cx="2890520" cy="960120"/>
-          </a:xfrm>
-          <a:prstGeom prst="rect">
-            <a:avLst/>
-          </a:prstGeom>
-          <a:solidFill>
-            <a:srgbClr val="F4F1EA"/>
-          </a:solidFill>
-          <a:ln>
-            <a:noFill/>
-          </a:ln>
-          <a:effectLst/>
-        </p:spPr>
-        <p:style>
-          <a:lnRef idx="1">
-            <a:schemeClr val="accent1"/>
-          </a:lnRef>
-          <a:fillRef idx="3">
-            <a:schemeClr val="accent1"/>
-          </a:fillRef>
-          <a:effectRef idx="2">
-            <a:schemeClr val="accent1"/>
-          </a:effectRef>
-          <a:fontRef idx="minor">
-            <a:schemeClr val="lt1"/>
-          </a:fontRef>
-        </p:style>
-        <p:txBody>
-          <a:bodyPr rtlCol="0" anchor="ctr"/>
-          <a:lstStyle/>
-          <a:p>
-            <a:pPr algn="ctr"/>
-          </a:p>
-        </p:txBody>
-      </p:sp>
-      <p:sp>
-        <p:nvSpPr>
-          <p:cNvPr id="9" name="TextBox 8"/>
-          <p:cNvSpPr txBox="1"/>
-          <p:nvPr/>
-        </p:nvSpPr>
-        <p:spPr>
-          <a:xfrm>
-            <a:off x="640080" y="4892040"/>
-            <a:ext cx="2524760" cy="274320"/>
-          </a:xfrm>
-          <a:prstGeom prst="rect">
-            <a:avLst/>
-          </a:prstGeom>
-          <a:noFill/>
-        </p:spPr>
-        <p:txBody>
-          <a:bodyPr wrap="square">
-            <a:spAutoFit/>
-          </a:bodyPr>
-          <a:lstStyle/>
-          <a:p>
-            <a:pPr algn="l"/>
-            <a:r>
-              <a:rPr sz="1050" b="1" i="0">
-                <a:solidFill>
-                  <a:srgbClr val="012169"/>
-                </a:solidFill>
-                <a:latin typeface="Calibri"/>
-              </a:rPr>
-              <a:t>In-sample window</a:t>
-            </a:r>
-          </a:p>
-        </p:txBody>
-      </p:sp>
-      <p:sp>
-        <p:nvSpPr>
-          <p:cNvPr id="10" name="TextBox 9"/>
-          <p:cNvSpPr txBox="1"/>
-          <p:nvPr/>
-        </p:nvSpPr>
-        <p:spPr>
-          <a:xfrm>
-            <a:off x="640080" y="5166360"/>
-            <a:ext cx="2524760" cy="914400"/>
-          </a:xfrm>
-          <a:prstGeom prst="rect">
-            <a:avLst/>
-          </a:prstGeom>
-          <a:noFill/>
-        </p:spPr>
-        <p:txBody>
-          <a:bodyPr wrap="square">
-            <a:spAutoFit/>
-          </a:bodyPr>
-          <a:lstStyle/>
-          <a:p>
-            <a:pPr algn="l"/>
-            <a:r>
-              <a:rPr sz="1000" b="0" i="0">
-                <a:solidFill>
-                  <a:srgbClr val="1B365D"/>
-                </a:solidFill>
-                <a:latin typeface="Calibri"/>
-              </a:rPr>
-              <a:t>Chosen so each IS spans multiple regimes for TY (rate cycles) and the full BTC inception.</a:t>
-            </a:r>
-          </a:p>
-        </p:txBody>
-      </p:sp>
-      <p:sp>
-        <p:nvSpPr>
-          <p:cNvPr id="11" name="Rectangle 10"/>
-          <p:cNvSpPr/>
-          <p:nvPr/>
-        </p:nvSpPr>
-        <p:spPr>
-          <a:xfrm>
-            <a:off x="3439160" y="4389120"/>
-            <a:ext cx="2890520" cy="411480"/>
-          </a:xfrm>
-          <a:prstGeom prst="rect">
-            <a:avLst/>
-          </a:prstGeom>
-          <a:solidFill>
-            <a:srgbClr val="012169"/>
-          </a:solidFill>
-          <a:ln>
-            <a:noFill/>
-          </a:ln>
-          <a:effectLst/>
-        </p:spPr>
-        <p:style>
-          <a:lnRef idx="1">
-            <a:schemeClr val="accent1"/>
-          </a:lnRef>
-          <a:fillRef idx="3">
-            <a:schemeClr val="accent1"/>
-          </a:fillRef>
-          <a:effectRef idx="2">
-            <a:schemeClr val="accent1"/>
-          </a:effectRef>
-          <a:fontRef idx="minor">
-            <a:schemeClr val="lt1"/>
-          </a:fontRef>
-        </p:style>
-        <p:txBody>
-          <a:bodyPr rtlCol="0" anchor="ctr"/>
-          <a:lstStyle/>
-          <a:p>
-            <a:pPr algn="ctr"/>
-          </a:p>
-        </p:txBody>
-      </p:sp>
-      <p:sp>
-        <p:nvSpPr>
-          <p:cNvPr id="12" name="TextBox 11"/>
-          <p:cNvSpPr txBox="1"/>
-          <p:nvPr/>
-        </p:nvSpPr>
-        <p:spPr>
-          <a:xfrm>
-            <a:off x="3622040" y="4462272"/>
-            <a:ext cx="2524760" cy="320040"/>
-          </a:xfrm>
-          <a:prstGeom prst="rect">
-            <a:avLst/>
-          </a:prstGeom>
-          <a:noFill/>
-        </p:spPr>
-        <p:txBody>
-          <a:bodyPr wrap="square">
-            <a:spAutoFit/>
-          </a:bodyPr>
-          <a:lstStyle/>
-          <a:p>
-            <a:pPr algn="l"/>
-            <a:r>
-              <a:rPr sz="1200" b="1" i="0">
-                <a:solidFill>
-                  <a:srgbClr val="A28D5B"/>
-                </a:solidFill>
-                <a:latin typeface="Calibri"/>
-              </a:rPr>
-              <a:t>τ = 1 quarter</a:t>
-            </a:r>
-          </a:p>
-        </p:txBody>
-      </p:sp>
-      <p:sp>
-        <p:nvSpPr>
-          <p:cNvPr id="13" name="Rectangle 12"/>
-          <p:cNvSpPr/>
-          <p:nvPr/>
-        </p:nvSpPr>
-        <p:spPr>
-          <a:xfrm>
-            <a:off x="3439160" y="4800600"/>
-            <a:ext cx="2890520" cy="960120"/>
-          </a:xfrm>
-          <a:prstGeom prst="rect">
-            <a:avLst/>
-          </a:prstGeom>
-          <a:solidFill>
-            <a:srgbClr val="F4F1EA"/>
-          </a:solidFill>
-          <a:ln>
-            <a:noFill/>
-          </a:ln>
-          <a:effectLst/>
-        </p:spPr>
-        <p:style>
-          <a:lnRef idx="1">
-            <a:schemeClr val="accent1"/>
-          </a:lnRef>
-          <a:fillRef idx="3">
-            <a:schemeClr val="accent1"/>
-          </a:fillRef>
-          <a:effectRef idx="2">
-            <a:schemeClr val="accent1"/>
-          </a:effectRef>
-          <a:fontRef idx="minor">
-            <a:schemeClr val="lt1"/>
-          </a:fontRef>
-        </p:style>
-        <p:txBody>
-          <a:bodyPr rtlCol="0" anchor="ctr"/>
-          <a:lstStyle/>
-          <a:p>
-            <a:pPr algn="ctr"/>
-          </a:p>
-        </p:txBody>
-      </p:sp>
-      <p:sp>
-        <p:nvSpPr>
-          <p:cNvPr id="14" name="TextBox 13"/>
-          <p:cNvSpPr txBox="1"/>
-          <p:nvPr/>
-        </p:nvSpPr>
-        <p:spPr>
-          <a:xfrm>
-            <a:off x="3622040" y="4892040"/>
-            <a:ext cx="2524760" cy="274320"/>
-          </a:xfrm>
-          <a:prstGeom prst="rect">
-            <a:avLst/>
-          </a:prstGeom>
-          <a:noFill/>
-        </p:spPr>
-        <p:txBody>
-          <a:bodyPr wrap="square">
-            <a:spAutoFit/>
-          </a:bodyPr>
-          <a:lstStyle/>
-          <a:p>
-            <a:pPr algn="l"/>
-            <a:r>
-              <a:rPr sz="1050" b="1" i="0">
-                <a:solidFill>
-                  <a:srgbClr val="012169"/>
-                </a:solidFill>
-                <a:latin typeface="Calibri"/>
-              </a:rPr>
-              <a:t>Out-of-sample window</a:t>
-            </a:r>
-          </a:p>
-        </p:txBody>
-      </p:sp>
-      <p:sp>
-        <p:nvSpPr>
-          <p:cNvPr id="15" name="TextBox 14"/>
-          <p:cNvSpPr txBox="1"/>
-          <p:nvPr/>
-        </p:nvSpPr>
-        <p:spPr>
-          <a:xfrm>
-            <a:off x="3622040" y="5166360"/>
-            <a:ext cx="2524760" cy="914400"/>
-          </a:xfrm>
-          <a:prstGeom prst="rect">
-            <a:avLst/>
-          </a:prstGeom>
-          <a:noFill/>
-        </p:spPr>
-        <p:txBody>
-          <a:bodyPr wrap="square">
-            <a:spAutoFit/>
-          </a:bodyPr>
-          <a:lstStyle/>
-          <a:p>
-            <a:pPr algn="l"/>
-            <a:r>
-              <a:rPr sz="1000" b="0" i="0">
-                <a:solidFill>
-                  <a:srgbClr val="1B365D"/>
-                </a:solidFill>
-                <a:latin typeface="Calibri"/>
-              </a:rPr>
-              <a:t>Short enough to test near-term generalisation; long enough to gather statistically meaningful trades.</a:t>
-            </a:r>
-          </a:p>
-        </p:txBody>
-      </p:sp>
-      <p:sp>
-        <p:nvSpPr>
-          <p:cNvPr id="16" name="Rectangle 15"/>
-          <p:cNvSpPr/>
-          <p:nvPr/>
-        </p:nvSpPr>
-        <p:spPr>
-          <a:xfrm>
-            <a:off x="6421120" y="4389120"/>
-            <a:ext cx="2890520" cy="411480"/>
-          </a:xfrm>
-          <a:prstGeom prst="rect">
-            <a:avLst/>
-          </a:prstGeom>
-          <a:solidFill>
-            <a:srgbClr val="012169"/>
-          </a:solidFill>
-          <a:ln>
-            <a:noFill/>
-          </a:ln>
-          <a:effectLst/>
-        </p:spPr>
-        <p:style>
-          <a:lnRef idx="1">
-            <a:schemeClr val="accent1"/>
-          </a:lnRef>
-          <a:fillRef idx="3">
-            <a:schemeClr val="accent1"/>
-          </a:fillRef>
-          <a:effectRef idx="2">
-            <a:schemeClr val="accent1"/>
-          </a:effectRef>
-          <a:fontRef idx="minor">
-            <a:schemeClr val="lt1"/>
-          </a:fontRef>
-        </p:style>
-        <p:txBody>
-          <a:bodyPr rtlCol="0" anchor="ctr"/>
-          <a:lstStyle/>
-          <a:p>
-            <a:pPr algn="ctr"/>
-          </a:p>
-        </p:txBody>
-      </p:sp>
-      <p:sp>
-        <p:nvSpPr>
-          <p:cNvPr id="17" name="TextBox 16"/>
-          <p:cNvSpPr txBox="1"/>
-          <p:nvPr/>
-        </p:nvSpPr>
-        <p:spPr>
-          <a:xfrm>
-            <a:off x="6604000" y="4462272"/>
-            <a:ext cx="2524760" cy="320040"/>
-          </a:xfrm>
-          <a:prstGeom prst="rect">
-            <a:avLst/>
-          </a:prstGeom>
-          <a:noFill/>
-        </p:spPr>
-        <p:txBody>
-          <a:bodyPr wrap="square">
-            <a:spAutoFit/>
-          </a:bodyPr>
-          <a:lstStyle/>
-          <a:p>
-            <a:pPr algn="l"/>
-            <a:r>
-              <a:rPr sz="1200" b="1" i="0">
-                <a:solidFill>
-                  <a:srgbClr val="A28D5B"/>
-                </a:solidFill>
-                <a:latin typeface="Calibri"/>
-              </a:rPr>
-              <a:t>Net P / Max DD</a:t>
-            </a:r>
-          </a:p>
-        </p:txBody>
-      </p:sp>
-      <p:sp>
-        <p:nvSpPr>
-          <p:cNvPr id="18" name="Rectangle 17"/>
-          <p:cNvSpPr/>
-          <p:nvPr/>
-        </p:nvSpPr>
-        <p:spPr>
-          <a:xfrm>
-            <a:off x="6421120" y="4800600"/>
-            <a:ext cx="2890520" cy="960120"/>
-          </a:xfrm>
-          <a:prstGeom prst="rect">
-            <a:avLst/>
-          </a:prstGeom>
-          <a:solidFill>
-            <a:srgbClr val="F4F1EA"/>
-          </a:solidFill>
-          <a:ln>
-            <a:noFill/>
-          </a:ln>
-          <a:effectLst/>
-        </p:spPr>
-        <p:style>
-          <a:lnRef idx="1">
-            <a:schemeClr val="accent1"/>
-          </a:lnRef>
-          <a:fillRef idx="3">
-            <a:schemeClr val="accent1"/>
-          </a:fillRef>
-          <a:effectRef idx="2">
-            <a:schemeClr val="accent1"/>
-          </a:effectRef>
-          <a:fontRef idx="minor">
-            <a:schemeClr val="lt1"/>
-          </a:fontRef>
-        </p:style>
-        <p:txBody>
-          <a:bodyPr rtlCol="0" anchor="ctr"/>
-          <a:lstStyle/>
-          <a:p>
-            <a:pPr algn="ctr"/>
-          </a:p>
-        </p:txBody>
-      </p:sp>
-      <p:sp>
-        <p:nvSpPr>
-          <p:cNvPr id="19" name="TextBox 18"/>
-          <p:cNvSpPr txBox="1"/>
-          <p:nvPr/>
-        </p:nvSpPr>
-        <p:spPr>
-          <a:xfrm>
-            <a:off x="6604000" y="4892040"/>
-            <a:ext cx="2524760" cy="274320"/>
-          </a:xfrm>
-          <a:prstGeom prst="rect">
-            <a:avLst/>
-          </a:prstGeom>
-          <a:noFill/>
-        </p:spPr>
-        <p:txBody>
-          <a:bodyPr wrap="square">
-            <a:spAutoFit/>
-          </a:bodyPr>
-          <a:lstStyle/>
-          <a:p>
-            <a:pPr algn="l"/>
-            <a:r>
-              <a:rPr sz="1050" b="1" i="0">
-                <a:solidFill>
-                  <a:srgbClr val="012169"/>
-                </a:solidFill>
-                <a:latin typeface="Calibri"/>
-              </a:rPr>
-              <a:t>Optimisation objective</a:t>
-            </a:r>
-          </a:p>
-        </p:txBody>
-      </p:sp>
-      <p:sp>
-        <p:nvSpPr>
-          <p:cNvPr id="20" name="TextBox 19"/>
-          <p:cNvSpPr txBox="1"/>
-          <p:nvPr/>
-        </p:nvSpPr>
-        <p:spPr>
-          <a:xfrm>
-            <a:off x="6604000" y="5166360"/>
-            <a:ext cx="2524760" cy="914400"/>
-          </a:xfrm>
-          <a:prstGeom prst="rect">
-            <a:avLst/>
-          </a:prstGeom>
-          <a:noFill/>
-        </p:spPr>
-        <p:txBody>
-          <a:bodyPr wrap="square">
-            <a:spAutoFit/>
-          </a:bodyPr>
-          <a:lstStyle/>
-          <a:p>
-            <a:pPr algn="l"/>
-            <a:r>
-              <a:rPr sz="1000" b="0" i="0">
-                <a:solidFill>
-                  <a:srgbClr val="1B365D"/>
-                </a:solidFill>
-                <a:latin typeface="Calibri"/>
-              </a:rPr>
-              <a:t>Calmar-style: rewards capital efficiency, penalises drawdowns. Tie-break on smaller L, then smaller S.</a:t>
-            </a:r>
-          </a:p>
-        </p:txBody>
-      </p:sp>
-      <p:sp>
-        <p:nvSpPr>
-          <p:cNvPr id="21" name="TextBox 20"/>
           <p:cNvSpPr txBox="1"/>
           <p:nvPr/>
         </p:nvSpPr>
@@ -7081,7 +5338,7 @@
       </p:sp>
       <p:sp>
         <p:nvSpPr>
-          <p:cNvPr id="22" name="TextBox 21"/>
+          <p:cNvPr id="8" name="TextBox 7"/>
           <p:cNvSpPr txBox="1"/>
           <p:nvPr/>
         </p:nvSpPr>
@@ -7109,7 +5366,7 @@
                 </a:solidFill>
                 <a:latin typeface="Calibri"/>
               </a:rPr>
-              <a:t>17 / 35</a:t>
+              <a:t>17 / 41</a:t>
             </a:r>
           </a:p>
         </p:txBody>
@@ -7128,7 +5385,7 @@
     <p:bg>
       <p:bgPr>
         <a:solidFill>
-          <a:srgbClr val="012169"/>
+          <a:srgbClr val="FFFFFF"/>
         </a:solidFill>
         <a:effectLst/>
       </p:bgPr>
@@ -7142,128 +5399,178 @@
       <p:grpSpPr/>
       <p:sp>
         <p:nvSpPr>
-          <p:cNvPr id="2" name="Rectangle 1"/>
-          <p:cNvSpPr/>
-          <p:nvPr/>
-        </p:nvSpPr>
-        <p:spPr>
-          <a:xfrm>
-            <a:off x="0" y="0"/>
-            <a:ext cx="9906000" cy="45720"/>
-          </a:xfrm>
-          <a:prstGeom prst="rect">
-            <a:avLst/>
-          </a:prstGeom>
-          <a:solidFill>
-            <a:srgbClr val="A28D5B"/>
-          </a:solidFill>
-          <a:ln>
-            <a:noFill/>
+          <p:cNvPr id="2" name="TextBox 1"/>
+          <p:cNvSpPr txBox="1"/>
+          <p:nvPr/>
+        </p:nvSpPr>
+        <p:spPr>
+          <a:xfrm>
+            <a:off x="365760" y="228600"/>
+            <a:ext cx="9174480" cy="502920"/>
+          </a:xfrm>
+          <a:prstGeom prst="rect">
+            <a:avLst/>
+          </a:prstGeom>
+          <a:noFill/>
+        </p:spPr>
+        <p:txBody>
+          <a:bodyPr wrap="square">
+            <a:spAutoFit/>
+          </a:bodyPr>
+          <a:lstStyle/>
+          <a:p>
+            <a:pPr algn="l"/>
+            <a:r>
+              <a:rPr sz="2400" b="1" i="0">
+                <a:solidFill>
+                  <a:srgbClr val="012169"/>
+                </a:solidFill>
+                <a:latin typeface="Calibri"/>
+              </a:rPr>
+              <a:t>Push-Response Test for TY: short → medium horizons</a:t>
+            </a:r>
+          </a:p>
+        </p:txBody>
+      </p:sp>
+      <p:cxnSp>
+        <p:nvCxnSpPr>
+          <p:cNvPr id="3" name="Connector 2"/>
+          <p:cNvCxnSpPr/>
+          <p:nvPr/>
+        </p:nvCxnSpPr>
+        <p:spPr>
+          <a:xfrm>
+            <a:off x="365760" y="777240"/>
+            <a:ext cx="9174480" cy="0"/>
+          </a:xfrm>
+          <a:prstGeom prst="line">
+            <a:avLst/>
+          </a:prstGeom>
+          <a:ln w="12700">
+            <a:solidFill>
+              <a:srgbClr val="012169"/>
+            </a:solidFill>
           </a:ln>
-          <a:effectLst/>
         </p:spPr>
         <p:style>
-          <a:lnRef idx="1">
+          <a:lnRef idx="2">
             <a:schemeClr val="accent1"/>
           </a:lnRef>
-          <a:fillRef idx="3">
+          <a:fillRef idx="0">
             <a:schemeClr val="accent1"/>
           </a:fillRef>
-          <a:effectRef idx="2">
+          <a:effectRef idx="1">
             <a:schemeClr val="accent1"/>
           </a:effectRef>
           <a:fontRef idx="minor">
-            <a:schemeClr val="lt1"/>
+            <a:schemeClr val="tx1"/>
           </a:fontRef>
         </p:style>
-        <p:txBody>
-          <a:bodyPr rtlCol="0" anchor="ctr"/>
-          <a:lstStyle/>
-          <a:p>
-            <a:pPr algn="ctr"/>
-          </a:p>
-        </p:txBody>
-      </p:sp>
-      <p:sp>
-        <p:nvSpPr>
-          <p:cNvPr id="3" name="TextBox 2"/>
-          <p:cNvSpPr txBox="1"/>
-          <p:nvPr/>
-        </p:nvSpPr>
-        <p:spPr>
-          <a:xfrm>
-            <a:off x="548640" y="2377440"/>
-            <a:ext cx="8808720" cy="457200"/>
-          </a:xfrm>
-          <a:prstGeom prst="rect">
-            <a:avLst/>
-          </a:prstGeom>
-          <a:noFill/>
-        </p:spPr>
-        <p:txBody>
-          <a:bodyPr wrap="square">
-            <a:spAutoFit/>
-          </a:bodyPr>
-          <a:lstStyle/>
-          <a:p>
-            <a:pPr algn="l"/>
-            <a:r>
-              <a:rPr sz="1400" b="1" i="0">
+      </p:cxnSp>
+      <p:sp>
+        <p:nvSpPr>
+          <p:cNvPr id="4" name="TextBox 3"/>
+          <p:cNvSpPr txBox="1"/>
+          <p:nvPr/>
+        </p:nvSpPr>
+        <p:spPr>
+          <a:xfrm>
+            <a:off x="7528560" y="228600"/>
+            <a:ext cx="2011680" cy="365760"/>
+          </a:xfrm>
+          <a:prstGeom prst="rect">
+            <a:avLst/>
+          </a:prstGeom>
+          <a:noFill/>
+        </p:spPr>
+        <p:txBody>
+          <a:bodyPr wrap="square">
+            <a:spAutoFit/>
+          </a:bodyPr>
+          <a:lstStyle/>
+          <a:p>
+            <a:pPr algn="r"/>
+            <a:r>
+              <a:rPr sz="1000" b="1" i="0">
                 <a:solidFill>
                   <a:srgbClr val="A28D5B"/>
                 </a:solidFill>
                 <a:latin typeface="Calibri"/>
               </a:rPr>
-              <a:t>OUT-OF-SAMPLE PERFORMANCE</a:t>
-            </a:r>
-          </a:p>
-        </p:txBody>
-      </p:sp>
-      <p:sp>
-        <p:nvSpPr>
-          <p:cNvPr id="4" name="TextBox 3"/>
-          <p:cNvSpPr txBox="1"/>
-          <p:nvPr/>
-        </p:nvSpPr>
-        <p:spPr>
-          <a:xfrm>
-            <a:off x="548640" y="2834640"/>
-            <a:ext cx="8808720" cy="1828800"/>
-          </a:xfrm>
-          <a:prstGeom prst="rect">
-            <a:avLst/>
-          </a:prstGeom>
-          <a:noFill/>
-        </p:spPr>
-        <p:txBody>
-          <a:bodyPr wrap="square">
-            <a:spAutoFit/>
-          </a:bodyPr>
-          <a:lstStyle/>
-          <a:p>
-            <a:pPr algn="l"/>
-            <a:r>
-              <a:rPr sz="3600" b="1" i="0">
-                <a:solidFill>
-                  <a:srgbClr val="FFFFFF"/>
-                </a:solidFill>
-                <a:latin typeface="Calibri"/>
-              </a:rPr>
-              <a:t>Walk-forward results for both markets</a:t>
-            </a:r>
-          </a:p>
-        </p:txBody>
-      </p:sp>
-      <p:sp>
-        <p:nvSpPr>
-          <p:cNvPr id="5" name="TextBox 4"/>
-          <p:cNvSpPr txBox="1"/>
-          <p:nvPr/>
-        </p:nvSpPr>
-        <p:spPr>
-          <a:xfrm>
-            <a:off x="548640" y="6446520"/>
-            <a:ext cx="8808720" cy="274320"/>
+              <a:t>DIAGNOSTICS</a:t>
+            </a:r>
+          </a:p>
+        </p:txBody>
+      </p:sp>
+      <p:pic>
+        <p:nvPicPr>
+          <p:cNvPr id="5" name="Picture 4" descr="repl_ty_pr_grid.png"/>
+          <p:cNvPicPr>
+            <a:picLocks noChangeAspect="1"/>
+          </p:cNvPicPr>
+          <p:nvPr/>
+        </p:nvPicPr>
+        <p:blipFill>
+          <a:blip r:embed="rId2"/>
+          <a:stretch>
+            <a:fillRect/>
+          </a:stretch>
+        </p:blipFill>
+        <p:spPr>
+          <a:xfrm>
+            <a:off x="761386" y="914400"/>
+            <a:ext cx="8383228" cy="5029200"/>
+          </a:xfrm>
+          <a:prstGeom prst="rect">
+            <a:avLst/>
+          </a:prstGeom>
+        </p:spPr>
+      </p:pic>
+      <p:sp>
+        <p:nvSpPr>
+          <p:cNvPr id="6" name="TextBox 5"/>
+          <p:cNvSpPr txBox="1"/>
+          <p:nvPr/>
+        </p:nvSpPr>
+        <p:spPr>
+          <a:xfrm>
+            <a:off x="365760" y="5989320"/>
+            <a:ext cx="9174480" cy="411480"/>
+          </a:xfrm>
+          <a:prstGeom prst="rect">
+            <a:avLst/>
+          </a:prstGeom>
+          <a:noFill/>
+        </p:spPr>
+        <p:txBody>
+          <a:bodyPr wrap="square">
+            <a:spAutoFit/>
+          </a:bodyPr>
+          <a:lstStyle/>
+          <a:p>
+            <a:pPr algn="l"/>
+            <a:r>
+              <a:rPr sz="1050" b="0" i="0">
+                <a:solidFill>
+                  <a:srgbClr val="1B365D"/>
+                </a:solidFill>
+                <a:latin typeface="Calibri"/>
+              </a:rPr>
+              <a:t>Conditional mean of the forward response, per push-bin, at twelve τ values from 1 to 350 bars. At τ = 1 the response is mean-reverting (negative slope). Around τ = 32–96 the slope flattens, and from τ = 144 onwards the response acquires a clear negative slope on extreme pushes — the multi-week trend regime.</a:t>
+            </a:r>
+          </a:p>
+        </p:txBody>
+      </p:sp>
+      <p:sp>
+        <p:nvSpPr>
+          <p:cNvPr id="7" name="TextBox 6"/>
+          <p:cNvSpPr txBox="1"/>
+          <p:nvPr/>
+        </p:nvSpPr>
+        <p:spPr>
+          <a:xfrm>
+            <a:off x="365760" y="6446520"/>
+            <a:ext cx="9174480" cy="274320"/>
           </a:xfrm>
           <a:prstGeom prst="rect">
             <a:avLst/>
@@ -7280,7 +5587,7 @@
             <a:r>
               <a:rPr sz="900" b="0" i="0">
                 <a:solidFill>
-                  <a:srgbClr val="E6E9EE"/>
+                  <a:srgbClr val="9AA1A9"/>
                 </a:solidFill>
                 <a:latin typeface="Calibri"/>
               </a:rPr>
@@ -7291,7 +5598,7 @@
       </p:sp>
       <p:sp>
         <p:nvSpPr>
-          <p:cNvPr id="6" name="TextBox 5"/>
+          <p:cNvPr id="8" name="TextBox 7"/>
           <p:cNvSpPr txBox="1"/>
           <p:nvPr/>
         </p:nvSpPr>
@@ -7315,11 +5622,11 @@
             <a:r>
               <a:rPr sz="900" b="0" i="0">
                 <a:solidFill>
-                  <a:srgbClr val="E6E9EE"/>
-                </a:solidFill>
-                <a:latin typeface="Calibri"/>
-              </a:rPr>
-              <a:t>18 / 35</a:t>
+                  <a:srgbClr val="9AA1A9"/>
+                </a:solidFill>
+                <a:latin typeface="Calibri"/>
+              </a:rPr>
+              <a:t>18 / 41</a:t>
             </a:r>
           </a:p>
         </p:txBody>
@@ -7380,7 +5687,7 @@
                 </a:solidFill>
                 <a:latin typeface="Calibri"/>
               </a:rPr>
-              <a:t>Performance metrics</a:t>
+              <a:t>Evidence — Push-Response at the optimal horizon (TY vs BTC)</a:t>
             </a:r>
           </a:p>
         </p:txBody>
@@ -7450,14 +5757,14 @@
                 </a:solidFill>
                 <a:latin typeface="Calibri"/>
               </a:rPr>
-              <a:t>RESULTS</a:t>
+              <a:t>DIAGNOSTICS</a:t>
             </a:r>
           </a:p>
         </p:txBody>
       </p:sp>
       <p:pic>
         <p:nvPicPr>
-          <p:cNvPr id="5" name="Picture 4" descr="slide_01_performance_metrics.png"/>
+          <p:cNvPr id="5" name="Picture 4" descr="fig_push_response.png"/>
           <p:cNvPicPr>
             <a:picLocks noChangeAspect="1"/>
           </p:cNvPicPr>
@@ -7471,8 +5778,8 @@
         </p:blipFill>
         <p:spPr>
           <a:xfrm>
-            <a:off x="1167002" y="914400"/>
-            <a:ext cx="7571996" cy="5029200"/>
+            <a:off x="365760" y="1088150"/>
+            <a:ext cx="9174480" cy="4681700"/>
           </a:xfrm>
           <a:prstGeom prst="rect">
             <a:avLst/>
@@ -7509,7 +5816,7 @@
                 </a:solidFill>
                 <a:latin typeface="Calibri"/>
               </a:rPr>
-              <a:t>Both markets earn ≈ 4× Return on Account out-of-sample. TY's signal is slow and low-vol; BTC's is fast and high-vol — same Channel WithDDControl framework, calibrated to each market's autocorrelation structure.</a:t>
+              <a:t>Conditional mean response per push-decile with bin-level standard errors at the *optimal* horizon for each market. TY at q = 1 440 bars (~18 sessions): Spearman ρ ≈ +0.59 (p ≈ 0.06). BTC at q = 3 456 bars (~12 days): ρ ≈ +0.67 (p ≈ 0.02). These horizons drive the walk-forward picks of L*.</a:t>
             </a:r>
           </a:p>
         </p:txBody>
@@ -7579,7 +5886,7 @@
                 </a:solidFill>
                 <a:latin typeface="Calibri"/>
               </a:rPr>
-              <a:t>19 / 35</a:t>
+              <a:t>19 / 41</a:t>
             </a:r>
           </a:p>
         </p:txBody>
@@ -8374,7 +6681,7 @@
                 </a:solidFill>
                 <a:latin typeface="Calibri"/>
               </a:rPr>
-              <a:t>2 / 35</a:t>
+              <a:t>2 / 41</a:t>
             </a:r>
           </a:p>
         </p:txBody>
@@ -8435,7 +6742,7 @@
                 </a:solidFill>
                 <a:latin typeface="Calibri"/>
               </a:rPr>
-              <a:t>TY — out-of-sample equity &amp; portfolio position</a:t>
+              <a:t>Strategy — Channel WithDDControl</a:t>
             </a:r>
           </a:p>
         </p:txBody>
@@ -8505,45 +6812,170 @@
                 </a:solidFill>
                 <a:latin typeface="Calibri"/>
               </a:rPr>
-              <a:t>PRIMARY MARKET — TY</a:t>
-            </a:r>
-          </a:p>
-        </p:txBody>
-      </p:sp>
-      <p:pic>
-        <p:nvPicPr>
-          <p:cNvPr id="5" name="Picture 4" descr="slide_02_ty_equity_position.png"/>
-          <p:cNvPicPr>
-            <a:picLocks noChangeAspect="1"/>
-          </p:cNvPicPr>
-          <p:nvPr/>
-        </p:nvPicPr>
-        <p:blipFill>
-          <a:blip r:embed="rId2"/>
-          <a:stretch>
-            <a:fillRect/>
-          </a:stretch>
-        </p:blipFill>
-        <p:spPr>
-          <a:xfrm>
-            <a:off x="850477" y="914400"/>
-            <a:ext cx="8205046" cy="5029200"/>
-          </a:xfrm>
-          <a:prstGeom prst="rect">
-            <a:avLst/>
-          </a:prstGeom>
-        </p:spPr>
-      </p:pic>
-      <p:sp>
-        <p:nvSpPr>
-          <p:cNvPr id="6" name="TextBox 5"/>
-          <p:cNvSpPr txBox="1"/>
-          <p:nvPr/>
-        </p:nvSpPr>
-        <p:spPr>
-          <a:xfrm>
-            <a:off x="365760" y="5989320"/>
-            <a:ext cx="9174480" cy="411480"/>
+              <a:t>STRATEGY</a:t>
+            </a:r>
+          </a:p>
+        </p:txBody>
+      </p:sp>
+      <p:sp>
+        <p:nvSpPr>
+          <p:cNvPr id="5" name="TextBox 4"/>
+          <p:cNvSpPr txBox="1"/>
+          <p:nvPr/>
+        </p:nvSpPr>
+        <p:spPr>
+          <a:xfrm>
+            <a:off x="457200" y="960120"/>
+            <a:ext cx="4358640" cy="365760"/>
+          </a:xfrm>
+          <a:prstGeom prst="rect">
+            <a:avLst/>
+          </a:prstGeom>
+          <a:noFill/>
+        </p:spPr>
+        <p:txBody>
+          <a:bodyPr wrap="square">
+            <a:spAutoFit/>
+          </a:bodyPr>
+          <a:lstStyle/>
+          <a:p>
+            <a:pPr algn="l"/>
+            <a:r>
+              <a:rPr sz="1400" b="1" i="0">
+                <a:solidFill>
+                  <a:srgbClr val="012169"/>
+                </a:solidFill>
+                <a:latin typeface="Calibri"/>
+              </a:rPr>
+              <a:t>Core parameters</a:t>
+            </a:r>
+          </a:p>
+        </p:txBody>
+      </p:sp>
+      <p:sp>
+        <p:nvSpPr>
+          <p:cNvPr id="6" name="Rectangle 5"/>
+          <p:cNvSpPr/>
+          <p:nvPr/>
+        </p:nvSpPr>
+        <p:spPr>
+          <a:xfrm>
+            <a:off x="457200" y="1371600"/>
+            <a:ext cx="594360" cy="594360"/>
+          </a:xfrm>
+          <a:prstGeom prst="rect">
+            <a:avLst/>
+          </a:prstGeom>
+          <a:solidFill>
+            <a:srgbClr val="012169"/>
+          </a:solidFill>
+          <a:ln>
+            <a:noFill/>
+          </a:ln>
+          <a:effectLst/>
+        </p:spPr>
+        <p:style>
+          <a:lnRef idx="1">
+            <a:schemeClr val="accent1"/>
+          </a:lnRef>
+          <a:fillRef idx="3">
+            <a:schemeClr val="accent1"/>
+          </a:fillRef>
+          <a:effectRef idx="2">
+            <a:schemeClr val="accent1"/>
+          </a:effectRef>
+          <a:fontRef idx="minor">
+            <a:schemeClr val="lt1"/>
+          </a:fontRef>
+        </p:style>
+        <p:txBody>
+          <a:bodyPr rtlCol="0" anchor="ctr"/>
+          <a:lstStyle/>
+          <a:p>
+            <a:pPr algn="ctr"/>
+          </a:p>
+        </p:txBody>
+      </p:sp>
+      <p:sp>
+        <p:nvSpPr>
+          <p:cNvPr id="7" name="TextBox 6"/>
+          <p:cNvSpPr txBox="1"/>
+          <p:nvPr/>
+        </p:nvSpPr>
+        <p:spPr>
+          <a:xfrm>
+            <a:off x="457200" y="1490472"/>
+            <a:ext cx="594360" cy="411480"/>
+          </a:xfrm>
+          <a:prstGeom prst="rect">
+            <a:avLst/>
+          </a:prstGeom>
+          <a:noFill/>
+        </p:spPr>
+        <p:txBody>
+          <a:bodyPr wrap="square">
+            <a:spAutoFit/>
+          </a:bodyPr>
+          <a:lstStyle/>
+          <a:p>
+            <a:pPr algn="ctr"/>
+            <a:r>
+              <a:rPr sz="1800" b="1" i="0">
+                <a:solidFill>
+                  <a:srgbClr val="A28D5B"/>
+                </a:solidFill>
+                <a:latin typeface="Calibri"/>
+              </a:rPr>
+              <a:t>L</a:t>
+            </a:r>
+          </a:p>
+        </p:txBody>
+      </p:sp>
+      <p:sp>
+        <p:nvSpPr>
+          <p:cNvPr id="8" name="TextBox 7"/>
+          <p:cNvSpPr txBox="1"/>
+          <p:nvPr/>
+        </p:nvSpPr>
+        <p:spPr>
+          <a:xfrm>
+            <a:off x="1234440" y="1371600"/>
+            <a:ext cx="3581400" cy="274320"/>
+          </a:xfrm>
+          <a:prstGeom prst="rect">
+            <a:avLst/>
+          </a:prstGeom>
+          <a:noFill/>
+        </p:spPr>
+        <p:txBody>
+          <a:bodyPr wrap="square">
+            <a:spAutoFit/>
+          </a:bodyPr>
+          <a:lstStyle/>
+          <a:p>
+            <a:pPr algn="l"/>
+            <a:r>
+              <a:rPr sz="1200" b="1" i="0">
+                <a:solidFill>
+                  <a:srgbClr val="012169"/>
+                </a:solidFill>
+                <a:latin typeface="Calibri"/>
+              </a:rPr>
+              <a:t>Channel length</a:t>
+            </a:r>
+          </a:p>
+        </p:txBody>
+      </p:sp>
+      <p:sp>
+        <p:nvSpPr>
+          <p:cNvPr id="9" name="TextBox 8"/>
+          <p:cNvSpPr txBox="1"/>
+          <p:nvPr/>
+        </p:nvSpPr>
+        <p:spPr>
+          <a:xfrm>
+            <a:off x="1234440" y="1664208"/>
+            <a:ext cx="3581400" cy="1280160"/>
           </a:xfrm>
           <a:prstGeom prst="rect">
             <a:avLst/>
@@ -8564,14 +6996,1094 @@
                 </a:solidFill>
                 <a:latin typeface="Calibri"/>
               </a:rPr>
-              <a:t>Channel WithDDControl on TY (10-yr Treasury futures) over 1987-06 → 2026-03 — 155 quarterly walk-forward windows stitched, $100k initial equity. Net OOS profit $68 336 / Max DD $15 865 / Return on Account 4.31× / Sharpe 0.31 / 395 trades. Position panel shows long/short/flat state at bar resolution.</a:t>
-            </a:r>
-          </a:p>
-        </p:txBody>
-      </p:sp>
-      <p:sp>
-        <p:nvSpPr>
-          <p:cNvPr id="7" name="TextBox 6"/>
+              <a:t>Number of bars in the rolling High/Low channel. Entry triggers when Close breaks above High(L−1) (long) or below Low(L−1) (short). Captures the trending horizon.</a:t>
+            </a:r>
+          </a:p>
+        </p:txBody>
+      </p:sp>
+      <p:sp>
+        <p:nvSpPr>
+          <p:cNvPr id="10" name="Rectangle 9"/>
+          <p:cNvSpPr/>
+          <p:nvPr/>
+        </p:nvSpPr>
+        <p:spPr>
+          <a:xfrm>
+            <a:off x="457200" y="2788920"/>
+            <a:ext cx="594360" cy="594360"/>
+          </a:xfrm>
+          <a:prstGeom prst="rect">
+            <a:avLst/>
+          </a:prstGeom>
+          <a:solidFill>
+            <a:srgbClr val="012169"/>
+          </a:solidFill>
+          <a:ln>
+            <a:noFill/>
+          </a:ln>
+          <a:effectLst/>
+        </p:spPr>
+        <p:style>
+          <a:lnRef idx="1">
+            <a:schemeClr val="accent1"/>
+          </a:lnRef>
+          <a:fillRef idx="3">
+            <a:schemeClr val="accent1"/>
+          </a:fillRef>
+          <a:effectRef idx="2">
+            <a:schemeClr val="accent1"/>
+          </a:effectRef>
+          <a:fontRef idx="minor">
+            <a:schemeClr val="lt1"/>
+          </a:fontRef>
+        </p:style>
+        <p:txBody>
+          <a:bodyPr rtlCol="0" anchor="ctr"/>
+          <a:lstStyle/>
+          <a:p>
+            <a:pPr algn="ctr"/>
+          </a:p>
+        </p:txBody>
+      </p:sp>
+      <p:sp>
+        <p:nvSpPr>
+          <p:cNvPr id="11" name="TextBox 10"/>
+          <p:cNvSpPr txBox="1"/>
+          <p:nvPr/>
+        </p:nvSpPr>
+        <p:spPr>
+          <a:xfrm>
+            <a:off x="457200" y="2907792"/>
+            <a:ext cx="594360" cy="411480"/>
+          </a:xfrm>
+          <a:prstGeom prst="rect">
+            <a:avLst/>
+          </a:prstGeom>
+          <a:noFill/>
+        </p:spPr>
+        <p:txBody>
+          <a:bodyPr wrap="square">
+            <a:spAutoFit/>
+          </a:bodyPr>
+          <a:lstStyle/>
+          <a:p>
+            <a:pPr algn="ctr"/>
+            <a:r>
+              <a:rPr sz="1800" b="1" i="0">
+                <a:solidFill>
+                  <a:srgbClr val="A28D5B"/>
+                </a:solidFill>
+                <a:latin typeface="Calibri"/>
+              </a:rPr>
+              <a:t>S</a:t>
+            </a:r>
+          </a:p>
+        </p:txBody>
+      </p:sp>
+      <p:sp>
+        <p:nvSpPr>
+          <p:cNvPr id="12" name="TextBox 11"/>
+          <p:cNvSpPr txBox="1"/>
+          <p:nvPr/>
+        </p:nvSpPr>
+        <p:spPr>
+          <a:xfrm>
+            <a:off x="1234440" y="2788920"/>
+            <a:ext cx="3581400" cy="274320"/>
+          </a:xfrm>
+          <a:prstGeom prst="rect">
+            <a:avLst/>
+          </a:prstGeom>
+          <a:noFill/>
+        </p:spPr>
+        <p:txBody>
+          <a:bodyPr wrap="square">
+            <a:spAutoFit/>
+          </a:bodyPr>
+          <a:lstStyle/>
+          <a:p>
+            <a:pPr algn="l"/>
+            <a:r>
+              <a:rPr sz="1200" b="1" i="0">
+                <a:solidFill>
+                  <a:srgbClr val="012169"/>
+                </a:solidFill>
+                <a:latin typeface="Calibri"/>
+              </a:rPr>
+              <a:t>Drawdown stop</a:t>
+            </a:r>
+          </a:p>
+        </p:txBody>
+      </p:sp>
+      <p:sp>
+        <p:nvSpPr>
+          <p:cNvPr id="13" name="TextBox 12"/>
+          <p:cNvSpPr txBox="1"/>
+          <p:nvPr/>
+        </p:nvSpPr>
+        <p:spPr>
+          <a:xfrm>
+            <a:off x="1234440" y="3081528"/>
+            <a:ext cx="3581400" cy="1280160"/>
+          </a:xfrm>
+          <a:prstGeom prst="rect">
+            <a:avLst/>
+          </a:prstGeom>
+          <a:noFill/>
+        </p:spPr>
+        <p:txBody>
+          <a:bodyPr wrap="square">
+            <a:spAutoFit/>
+          </a:bodyPr>
+          <a:lstStyle/>
+          <a:p>
+            <a:pPr algn="l"/>
+            <a:r>
+              <a:rPr sz="1050" b="0" i="0">
+                <a:solidFill>
+                  <a:srgbClr val="1B365D"/>
+                </a:solidFill>
+                <a:latin typeface="Calibri"/>
+              </a:rPr>
+              <a:t>Fraction of running peak equity. Position closes when the running drawdown exceeds S × peak. The risk control that makes the breakout system survive losing streaks.</a:t>
+            </a:r>
+          </a:p>
+        </p:txBody>
+      </p:sp>
+      <p:sp>
+        <p:nvSpPr>
+          <p:cNvPr id="14" name="Rectangle 13"/>
+          <p:cNvSpPr/>
+          <p:nvPr/>
+        </p:nvSpPr>
+        <p:spPr>
+          <a:xfrm>
+            <a:off x="457200" y="4206240"/>
+            <a:ext cx="594360" cy="594360"/>
+          </a:xfrm>
+          <a:prstGeom prst="rect">
+            <a:avLst/>
+          </a:prstGeom>
+          <a:solidFill>
+            <a:srgbClr val="012169"/>
+          </a:solidFill>
+          <a:ln>
+            <a:noFill/>
+          </a:ln>
+          <a:effectLst/>
+        </p:spPr>
+        <p:style>
+          <a:lnRef idx="1">
+            <a:schemeClr val="accent1"/>
+          </a:lnRef>
+          <a:fillRef idx="3">
+            <a:schemeClr val="accent1"/>
+          </a:fillRef>
+          <a:effectRef idx="2">
+            <a:schemeClr val="accent1"/>
+          </a:effectRef>
+          <a:fontRef idx="minor">
+            <a:schemeClr val="lt1"/>
+          </a:fontRef>
+        </p:style>
+        <p:txBody>
+          <a:bodyPr rtlCol="0" anchor="ctr"/>
+          <a:lstStyle/>
+          <a:p>
+            <a:pPr algn="ctr"/>
+          </a:p>
+        </p:txBody>
+      </p:sp>
+      <p:sp>
+        <p:nvSpPr>
+          <p:cNvPr id="15" name="TextBox 14"/>
+          <p:cNvSpPr txBox="1"/>
+          <p:nvPr/>
+        </p:nvSpPr>
+        <p:spPr>
+          <a:xfrm>
+            <a:off x="457200" y="4325112"/>
+            <a:ext cx="594360" cy="411480"/>
+          </a:xfrm>
+          <a:prstGeom prst="rect">
+            <a:avLst/>
+          </a:prstGeom>
+          <a:noFill/>
+        </p:spPr>
+        <p:txBody>
+          <a:bodyPr wrap="square">
+            <a:spAutoFit/>
+          </a:bodyPr>
+          <a:lstStyle/>
+          <a:p>
+            <a:pPr algn="ctr"/>
+            <a:r>
+              <a:rPr sz="1800" b="1" i="0">
+                <a:solidFill>
+                  <a:srgbClr val="A28D5B"/>
+                </a:solidFill>
+                <a:latin typeface="Calibri"/>
+              </a:rPr>
+              <a:t>Slippage</a:t>
+            </a:r>
+          </a:p>
+        </p:txBody>
+      </p:sp>
+      <p:sp>
+        <p:nvSpPr>
+          <p:cNvPr id="16" name="TextBox 15"/>
+          <p:cNvSpPr txBox="1"/>
+          <p:nvPr/>
+        </p:nvSpPr>
+        <p:spPr>
+          <a:xfrm>
+            <a:off x="1234440" y="4206240"/>
+            <a:ext cx="3581400" cy="274320"/>
+          </a:xfrm>
+          <a:prstGeom prst="rect">
+            <a:avLst/>
+          </a:prstGeom>
+          <a:noFill/>
+        </p:spPr>
+        <p:txBody>
+          <a:bodyPr wrap="square">
+            <a:spAutoFit/>
+          </a:bodyPr>
+          <a:lstStyle/>
+          <a:p>
+            <a:pPr algn="l"/>
+            <a:r>
+              <a:rPr sz="1200" b="1" i="0">
+                <a:solidFill>
+                  <a:srgbClr val="012169"/>
+                </a:solidFill>
+                <a:latin typeface="Calibri"/>
+              </a:rPr>
+              <a:t>Round-turn cost</a:t>
+            </a:r>
+          </a:p>
+        </p:txBody>
+      </p:sp>
+      <p:sp>
+        <p:nvSpPr>
+          <p:cNvPr id="17" name="TextBox 16"/>
+          <p:cNvSpPr txBox="1"/>
+          <p:nvPr/>
+        </p:nvSpPr>
+        <p:spPr>
+          <a:xfrm>
+            <a:off x="1234440" y="4498848"/>
+            <a:ext cx="3581400" cy="1280160"/>
+          </a:xfrm>
+          <a:prstGeom prst="rect">
+            <a:avLst/>
+          </a:prstGeom>
+          <a:noFill/>
+        </p:spPr>
+        <p:txBody>
+          <a:bodyPr wrap="square">
+            <a:spAutoFit/>
+          </a:bodyPr>
+          <a:lstStyle/>
+          <a:p>
+            <a:pPr algn="l"/>
+            <a:r>
+              <a:rPr sz="1050" b="0" i="0">
+                <a:solidFill>
+                  <a:srgbClr val="1B365D"/>
+                </a:solidFill>
+                <a:latin typeface="Calibri"/>
+              </a:rPr>
+              <a:t>Debited on every position change. $18.625 for TY, $25.00 for BTC, per TF Data column V. Charged in full on every entry and exit.</a:t>
+            </a:r>
+          </a:p>
+        </p:txBody>
+      </p:sp>
+      <p:sp>
+        <p:nvSpPr>
+          <p:cNvPr id="18" name="TextBox 17"/>
+          <p:cNvSpPr txBox="1"/>
+          <p:nvPr/>
+        </p:nvSpPr>
+        <p:spPr>
+          <a:xfrm>
+            <a:off x="4998720" y="960120"/>
+            <a:ext cx="4358640" cy="365760"/>
+          </a:xfrm>
+          <a:prstGeom prst="rect">
+            <a:avLst/>
+          </a:prstGeom>
+          <a:noFill/>
+        </p:spPr>
+        <p:txBody>
+          <a:bodyPr wrap="square">
+            <a:spAutoFit/>
+          </a:bodyPr>
+          <a:lstStyle/>
+          <a:p>
+            <a:pPr algn="l"/>
+            <a:r>
+              <a:rPr sz="1400" b="1" i="0">
+                <a:solidFill>
+                  <a:srgbClr val="012169"/>
+                </a:solidFill>
+                <a:latin typeface="Calibri"/>
+              </a:rPr>
+              <a:t>Logic flow per bar</a:t>
+            </a:r>
+          </a:p>
+        </p:txBody>
+      </p:sp>
+      <p:sp>
+        <p:nvSpPr>
+          <p:cNvPr id="19" name="Rectangle 18"/>
+          <p:cNvSpPr/>
+          <p:nvPr/>
+        </p:nvSpPr>
+        <p:spPr>
+          <a:xfrm>
+            <a:off x="4998720" y="1371600"/>
+            <a:ext cx="365760" cy="365760"/>
+          </a:xfrm>
+          <a:prstGeom prst="rect">
+            <a:avLst/>
+          </a:prstGeom>
+          <a:solidFill>
+            <a:srgbClr val="A28D5B"/>
+          </a:solidFill>
+          <a:ln>
+            <a:noFill/>
+          </a:ln>
+          <a:effectLst/>
+        </p:spPr>
+        <p:style>
+          <a:lnRef idx="1">
+            <a:schemeClr val="accent1"/>
+          </a:lnRef>
+          <a:fillRef idx="3">
+            <a:schemeClr val="accent1"/>
+          </a:fillRef>
+          <a:effectRef idx="2">
+            <a:schemeClr val="accent1"/>
+          </a:effectRef>
+          <a:fontRef idx="minor">
+            <a:schemeClr val="lt1"/>
+          </a:fontRef>
+        </p:style>
+        <p:txBody>
+          <a:bodyPr rtlCol="0" anchor="ctr"/>
+          <a:lstStyle/>
+          <a:p>
+            <a:pPr algn="ctr"/>
+          </a:p>
+        </p:txBody>
+      </p:sp>
+      <p:sp>
+        <p:nvSpPr>
+          <p:cNvPr id="20" name="TextBox 19"/>
+          <p:cNvSpPr txBox="1"/>
+          <p:nvPr/>
+        </p:nvSpPr>
+        <p:spPr>
+          <a:xfrm>
+            <a:off x="4998720" y="1417320"/>
+            <a:ext cx="365760" cy="292608"/>
+          </a:xfrm>
+          <a:prstGeom prst="rect">
+            <a:avLst/>
+          </a:prstGeom>
+          <a:noFill/>
+        </p:spPr>
+        <p:txBody>
+          <a:bodyPr wrap="square">
+            <a:spAutoFit/>
+          </a:bodyPr>
+          <a:lstStyle/>
+          <a:p>
+            <a:pPr algn="ctr"/>
+            <a:r>
+              <a:rPr sz="1200" b="1" i="0">
+                <a:solidFill>
+                  <a:srgbClr val="FFFFFF"/>
+                </a:solidFill>
+                <a:latin typeface="Calibri"/>
+              </a:rPr>
+              <a:t>1</a:t>
+            </a:r>
+          </a:p>
+        </p:txBody>
+      </p:sp>
+      <p:sp>
+        <p:nvSpPr>
+          <p:cNvPr id="21" name="TextBox 20"/>
+          <p:cNvSpPr txBox="1"/>
+          <p:nvPr/>
+        </p:nvSpPr>
+        <p:spPr>
+          <a:xfrm>
+            <a:off x="5501640" y="1371600"/>
+            <a:ext cx="3855720" cy="274320"/>
+          </a:xfrm>
+          <a:prstGeom prst="rect">
+            <a:avLst/>
+          </a:prstGeom>
+          <a:noFill/>
+        </p:spPr>
+        <p:txBody>
+          <a:bodyPr wrap="square">
+            <a:spAutoFit/>
+          </a:bodyPr>
+          <a:lstStyle/>
+          <a:p>
+            <a:pPr algn="l"/>
+            <a:r>
+              <a:rPr sz="1150" b="1" i="0">
+                <a:solidFill>
+                  <a:srgbClr val="012169"/>
+                </a:solidFill>
+                <a:latin typeface="Calibri"/>
+              </a:rPr>
+              <a:t>Compute rolling channel</a:t>
+            </a:r>
+          </a:p>
+        </p:txBody>
+      </p:sp>
+      <p:sp>
+        <p:nvSpPr>
+          <p:cNvPr id="22" name="TextBox 21"/>
+          <p:cNvSpPr txBox="1"/>
+          <p:nvPr/>
+        </p:nvSpPr>
+        <p:spPr>
+          <a:xfrm>
+            <a:off x="5501640" y="1645920"/>
+            <a:ext cx="3855720" cy="640080"/>
+          </a:xfrm>
+          <a:prstGeom prst="rect">
+            <a:avLst/>
+          </a:prstGeom>
+          <a:noFill/>
+        </p:spPr>
+        <p:txBody>
+          <a:bodyPr wrap="square">
+            <a:spAutoFit/>
+          </a:bodyPr>
+          <a:lstStyle/>
+          <a:p>
+            <a:pPr algn="l"/>
+            <a:r>
+              <a:rPr sz="1000" b="0" i="0">
+                <a:solidFill>
+                  <a:srgbClr val="1B365D"/>
+                </a:solidFill>
+                <a:latin typeface="DejaVu Sans Mono"/>
+              </a:rPr>
+              <a:t>high_band = max(High[t−L .. t−1])
+low_band  = min(Low[t−L .. t−1])</a:t>
+            </a:r>
+          </a:p>
+        </p:txBody>
+      </p:sp>
+      <p:sp>
+        <p:nvSpPr>
+          <p:cNvPr id="23" name="Rectangle 22"/>
+          <p:cNvSpPr/>
+          <p:nvPr/>
+        </p:nvSpPr>
+        <p:spPr>
+          <a:xfrm>
+            <a:off x="4998720" y="2240280"/>
+            <a:ext cx="365760" cy="365760"/>
+          </a:xfrm>
+          <a:prstGeom prst="rect">
+            <a:avLst/>
+          </a:prstGeom>
+          <a:solidFill>
+            <a:srgbClr val="A28D5B"/>
+          </a:solidFill>
+          <a:ln>
+            <a:noFill/>
+          </a:ln>
+          <a:effectLst/>
+        </p:spPr>
+        <p:style>
+          <a:lnRef idx="1">
+            <a:schemeClr val="accent1"/>
+          </a:lnRef>
+          <a:fillRef idx="3">
+            <a:schemeClr val="accent1"/>
+          </a:fillRef>
+          <a:effectRef idx="2">
+            <a:schemeClr val="accent1"/>
+          </a:effectRef>
+          <a:fontRef idx="minor">
+            <a:schemeClr val="lt1"/>
+          </a:fontRef>
+        </p:style>
+        <p:txBody>
+          <a:bodyPr rtlCol="0" anchor="ctr"/>
+          <a:lstStyle/>
+          <a:p>
+            <a:pPr algn="ctr"/>
+          </a:p>
+        </p:txBody>
+      </p:sp>
+      <p:sp>
+        <p:nvSpPr>
+          <p:cNvPr id="24" name="TextBox 23"/>
+          <p:cNvSpPr txBox="1"/>
+          <p:nvPr/>
+        </p:nvSpPr>
+        <p:spPr>
+          <a:xfrm>
+            <a:off x="4998720" y="2286000"/>
+            <a:ext cx="365760" cy="292608"/>
+          </a:xfrm>
+          <a:prstGeom prst="rect">
+            <a:avLst/>
+          </a:prstGeom>
+          <a:noFill/>
+        </p:spPr>
+        <p:txBody>
+          <a:bodyPr wrap="square">
+            <a:spAutoFit/>
+          </a:bodyPr>
+          <a:lstStyle/>
+          <a:p>
+            <a:pPr algn="ctr"/>
+            <a:r>
+              <a:rPr sz="1200" b="1" i="0">
+                <a:solidFill>
+                  <a:srgbClr val="FFFFFF"/>
+                </a:solidFill>
+                <a:latin typeface="Calibri"/>
+              </a:rPr>
+              <a:t>2</a:t>
+            </a:r>
+          </a:p>
+        </p:txBody>
+      </p:sp>
+      <p:sp>
+        <p:nvSpPr>
+          <p:cNvPr id="25" name="TextBox 24"/>
+          <p:cNvSpPr txBox="1"/>
+          <p:nvPr/>
+        </p:nvSpPr>
+        <p:spPr>
+          <a:xfrm>
+            <a:off x="5501640" y="2240280"/>
+            <a:ext cx="3855720" cy="274320"/>
+          </a:xfrm>
+          <a:prstGeom prst="rect">
+            <a:avLst/>
+          </a:prstGeom>
+          <a:noFill/>
+        </p:spPr>
+        <p:txBody>
+          <a:bodyPr wrap="square">
+            <a:spAutoFit/>
+          </a:bodyPr>
+          <a:lstStyle/>
+          <a:p>
+            <a:pPr algn="l"/>
+            <a:r>
+              <a:rPr sz="1150" b="1" i="0">
+                <a:solidFill>
+                  <a:srgbClr val="012169"/>
+                </a:solidFill>
+                <a:latin typeface="Calibri"/>
+              </a:rPr>
+              <a:t>Check breakout</a:t>
+            </a:r>
+          </a:p>
+        </p:txBody>
+      </p:sp>
+      <p:sp>
+        <p:nvSpPr>
+          <p:cNvPr id="26" name="TextBox 25"/>
+          <p:cNvSpPr txBox="1"/>
+          <p:nvPr/>
+        </p:nvSpPr>
+        <p:spPr>
+          <a:xfrm>
+            <a:off x="5501640" y="2514600"/>
+            <a:ext cx="3855720" cy="640080"/>
+          </a:xfrm>
+          <a:prstGeom prst="rect">
+            <a:avLst/>
+          </a:prstGeom>
+          <a:noFill/>
+        </p:spPr>
+        <p:txBody>
+          <a:bodyPr wrap="square">
+            <a:spAutoFit/>
+          </a:bodyPr>
+          <a:lstStyle/>
+          <a:p>
+            <a:pPr algn="l"/>
+            <a:r>
+              <a:rPr sz="1000" b="0" i="0">
+                <a:solidFill>
+                  <a:srgbClr val="1B365D"/>
+                </a:solidFill>
+                <a:latin typeface="DejaVu Sans Mono"/>
+              </a:rPr>
+              <a:t>If Close[t] &gt; high_band → enter LONG
+If Close[t] &lt; low_band → enter SHORT</a:t>
+            </a:r>
+          </a:p>
+        </p:txBody>
+      </p:sp>
+      <p:sp>
+        <p:nvSpPr>
+          <p:cNvPr id="27" name="Rectangle 26"/>
+          <p:cNvSpPr/>
+          <p:nvPr/>
+        </p:nvSpPr>
+        <p:spPr>
+          <a:xfrm>
+            <a:off x="4998720" y="3108960"/>
+            <a:ext cx="365760" cy="365760"/>
+          </a:xfrm>
+          <a:prstGeom prst="rect">
+            <a:avLst/>
+          </a:prstGeom>
+          <a:solidFill>
+            <a:srgbClr val="A28D5B"/>
+          </a:solidFill>
+          <a:ln>
+            <a:noFill/>
+          </a:ln>
+          <a:effectLst/>
+        </p:spPr>
+        <p:style>
+          <a:lnRef idx="1">
+            <a:schemeClr val="accent1"/>
+          </a:lnRef>
+          <a:fillRef idx="3">
+            <a:schemeClr val="accent1"/>
+          </a:fillRef>
+          <a:effectRef idx="2">
+            <a:schemeClr val="accent1"/>
+          </a:effectRef>
+          <a:fontRef idx="minor">
+            <a:schemeClr val="lt1"/>
+          </a:fontRef>
+        </p:style>
+        <p:txBody>
+          <a:bodyPr rtlCol="0" anchor="ctr"/>
+          <a:lstStyle/>
+          <a:p>
+            <a:pPr algn="ctr"/>
+          </a:p>
+        </p:txBody>
+      </p:sp>
+      <p:sp>
+        <p:nvSpPr>
+          <p:cNvPr id="28" name="TextBox 27"/>
+          <p:cNvSpPr txBox="1"/>
+          <p:nvPr/>
+        </p:nvSpPr>
+        <p:spPr>
+          <a:xfrm>
+            <a:off x="4998720" y="3154680"/>
+            <a:ext cx="365760" cy="292608"/>
+          </a:xfrm>
+          <a:prstGeom prst="rect">
+            <a:avLst/>
+          </a:prstGeom>
+          <a:noFill/>
+        </p:spPr>
+        <p:txBody>
+          <a:bodyPr wrap="square">
+            <a:spAutoFit/>
+          </a:bodyPr>
+          <a:lstStyle/>
+          <a:p>
+            <a:pPr algn="ctr"/>
+            <a:r>
+              <a:rPr sz="1200" b="1" i="0">
+                <a:solidFill>
+                  <a:srgbClr val="FFFFFF"/>
+                </a:solidFill>
+                <a:latin typeface="Calibri"/>
+              </a:rPr>
+              <a:t>3</a:t>
+            </a:r>
+          </a:p>
+        </p:txBody>
+      </p:sp>
+      <p:sp>
+        <p:nvSpPr>
+          <p:cNvPr id="29" name="TextBox 28"/>
+          <p:cNvSpPr txBox="1"/>
+          <p:nvPr/>
+        </p:nvSpPr>
+        <p:spPr>
+          <a:xfrm>
+            <a:off x="5501640" y="3108960"/>
+            <a:ext cx="3855720" cy="274320"/>
+          </a:xfrm>
+          <a:prstGeom prst="rect">
+            <a:avLst/>
+          </a:prstGeom>
+          <a:noFill/>
+        </p:spPr>
+        <p:txBody>
+          <a:bodyPr wrap="square">
+            <a:spAutoFit/>
+          </a:bodyPr>
+          <a:lstStyle/>
+          <a:p>
+            <a:pPr algn="l"/>
+            <a:r>
+              <a:rPr sz="1150" b="1" i="0">
+                <a:solidFill>
+                  <a:srgbClr val="012169"/>
+                </a:solidFill>
+                <a:latin typeface="Calibri"/>
+              </a:rPr>
+              <a:t>Track equity &amp; drawdown</a:t>
+            </a:r>
+          </a:p>
+        </p:txBody>
+      </p:sp>
+      <p:sp>
+        <p:nvSpPr>
+          <p:cNvPr id="30" name="TextBox 29"/>
+          <p:cNvSpPr txBox="1"/>
+          <p:nvPr/>
+        </p:nvSpPr>
+        <p:spPr>
+          <a:xfrm>
+            <a:off x="5501640" y="3383280"/>
+            <a:ext cx="3855720" cy="640080"/>
+          </a:xfrm>
+          <a:prstGeom prst="rect">
+            <a:avLst/>
+          </a:prstGeom>
+          <a:noFill/>
+        </p:spPr>
+        <p:txBody>
+          <a:bodyPr wrap="square">
+            <a:spAutoFit/>
+          </a:bodyPr>
+          <a:lstStyle/>
+          <a:p>
+            <a:pPr algn="l"/>
+            <a:r>
+              <a:rPr sz="1000" b="0" i="0">
+                <a:solidFill>
+                  <a:srgbClr val="1B365D"/>
+                </a:solidFill>
+                <a:latin typeface="DejaVu Sans Mono"/>
+              </a:rPr>
+              <a:t>Mark-to-market each bar. Track running peak and drawdown.</a:t>
+            </a:r>
+          </a:p>
+        </p:txBody>
+      </p:sp>
+      <p:sp>
+        <p:nvSpPr>
+          <p:cNvPr id="31" name="Rectangle 30"/>
+          <p:cNvSpPr/>
+          <p:nvPr/>
+        </p:nvSpPr>
+        <p:spPr>
+          <a:xfrm>
+            <a:off x="4998720" y="3977640"/>
+            <a:ext cx="365760" cy="365760"/>
+          </a:xfrm>
+          <a:prstGeom prst="rect">
+            <a:avLst/>
+          </a:prstGeom>
+          <a:solidFill>
+            <a:srgbClr val="A28D5B"/>
+          </a:solidFill>
+          <a:ln>
+            <a:noFill/>
+          </a:ln>
+          <a:effectLst/>
+        </p:spPr>
+        <p:style>
+          <a:lnRef idx="1">
+            <a:schemeClr val="accent1"/>
+          </a:lnRef>
+          <a:fillRef idx="3">
+            <a:schemeClr val="accent1"/>
+          </a:fillRef>
+          <a:effectRef idx="2">
+            <a:schemeClr val="accent1"/>
+          </a:effectRef>
+          <a:fontRef idx="minor">
+            <a:schemeClr val="lt1"/>
+          </a:fontRef>
+        </p:style>
+        <p:txBody>
+          <a:bodyPr rtlCol="0" anchor="ctr"/>
+          <a:lstStyle/>
+          <a:p>
+            <a:pPr algn="ctr"/>
+          </a:p>
+        </p:txBody>
+      </p:sp>
+      <p:sp>
+        <p:nvSpPr>
+          <p:cNvPr id="32" name="TextBox 31"/>
+          <p:cNvSpPr txBox="1"/>
+          <p:nvPr/>
+        </p:nvSpPr>
+        <p:spPr>
+          <a:xfrm>
+            <a:off x="4998720" y="4023360"/>
+            <a:ext cx="365760" cy="292608"/>
+          </a:xfrm>
+          <a:prstGeom prst="rect">
+            <a:avLst/>
+          </a:prstGeom>
+          <a:noFill/>
+        </p:spPr>
+        <p:txBody>
+          <a:bodyPr wrap="square">
+            <a:spAutoFit/>
+          </a:bodyPr>
+          <a:lstStyle/>
+          <a:p>
+            <a:pPr algn="ctr"/>
+            <a:r>
+              <a:rPr sz="1200" b="1" i="0">
+                <a:solidFill>
+                  <a:srgbClr val="FFFFFF"/>
+                </a:solidFill>
+                <a:latin typeface="Calibri"/>
+              </a:rPr>
+              <a:t>4</a:t>
+            </a:r>
+          </a:p>
+        </p:txBody>
+      </p:sp>
+      <p:sp>
+        <p:nvSpPr>
+          <p:cNvPr id="33" name="TextBox 32"/>
+          <p:cNvSpPr txBox="1"/>
+          <p:nvPr/>
+        </p:nvSpPr>
+        <p:spPr>
+          <a:xfrm>
+            <a:off x="5501640" y="3977640"/>
+            <a:ext cx="3855720" cy="274320"/>
+          </a:xfrm>
+          <a:prstGeom prst="rect">
+            <a:avLst/>
+          </a:prstGeom>
+          <a:noFill/>
+        </p:spPr>
+        <p:txBody>
+          <a:bodyPr wrap="square">
+            <a:spAutoFit/>
+          </a:bodyPr>
+          <a:lstStyle/>
+          <a:p>
+            <a:pPr algn="l"/>
+            <a:r>
+              <a:rPr sz="1150" b="1" i="0">
+                <a:solidFill>
+                  <a:srgbClr val="012169"/>
+                </a:solidFill>
+                <a:latin typeface="Calibri"/>
+              </a:rPr>
+              <a:t>Apply drawdown stop</a:t>
+            </a:r>
+          </a:p>
+        </p:txBody>
+      </p:sp>
+      <p:sp>
+        <p:nvSpPr>
+          <p:cNvPr id="34" name="TextBox 33"/>
+          <p:cNvSpPr txBox="1"/>
+          <p:nvPr/>
+        </p:nvSpPr>
+        <p:spPr>
+          <a:xfrm>
+            <a:off x="5501640" y="4251960"/>
+            <a:ext cx="3855720" cy="640080"/>
+          </a:xfrm>
+          <a:prstGeom prst="rect">
+            <a:avLst/>
+          </a:prstGeom>
+          <a:noFill/>
+        </p:spPr>
+        <p:txBody>
+          <a:bodyPr wrap="square">
+            <a:spAutoFit/>
+          </a:bodyPr>
+          <a:lstStyle/>
+          <a:p>
+            <a:pPr algn="l"/>
+            <a:r>
+              <a:rPr sz="1000" b="0" i="0">
+                <a:solidFill>
+                  <a:srgbClr val="1B365D"/>
+                </a:solidFill>
+                <a:latin typeface="DejaVu Sans Mono"/>
+              </a:rPr>
+              <a:t>If (peak − equity) ≥ S × peak → close position; charge slippage.</a:t>
+            </a:r>
+          </a:p>
+        </p:txBody>
+      </p:sp>
+      <p:sp>
+        <p:nvSpPr>
+          <p:cNvPr id="35" name="Rectangle 34"/>
+          <p:cNvSpPr/>
+          <p:nvPr/>
+        </p:nvSpPr>
+        <p:spPr>
+          <a:xfrm>
+            <a:off x="4998720" y="4846320"/>
+            <a:ext cx="365760" cy="365760"/>
+          </a:xfrm>
+          <a:prstGeom prst="rect">
+            <a:avLst/>
+          </a:prstGeom>
+          <a:solidFill>
+            <a:srgbClr val="A28D5B"/>
+          </a:solidFill>
+          <a:ln>
+            <a:noFill/>
+          </a:ln>
+          <a:effectLst/>
+        </p:spPr>
+        <p:style>
+          <a:lnRef idx="1">
+            <a:schemeClr val="accent1"/>
+          </a:lnRef>
+          <a:fillRef idx="3">
+            <a:schemeClr val="accent1"/>
+          </a:fillRef>
+          <a:effectRef idx="2">
+            <a:schemeClr val="accent1"/>
+          </a:effectRef>
+          <a:fontRef idx="minor">
+            <a:schemeClr val="lt1"/>
+          </a:fontRef>
+        </p:style>
+        <p:txBody>
+          <a:bodyPr rtlCol="0" anchor="ctr"/>
+          <a:lstStyle/>
+          <a:p>
+            <a:pPr algn="ctr"/>
+          </a:p>
+        </p:txBody>
+      </p:sp>
+      <p:sp>
+        <p:nvSpPr>
+          <p:cNvPr id="36" name="TextBox 35"/>
+          <p:cNvSpPr txBox="1"/>
+          <p:nvPr/>
+        </p:nvSpPr>
+        <p:spPr>
+          <a:xfrm>
+            <a:off x="4998720" y="4892040"/>
+            <a:ext cx="365760" cy="292608"/>
+          </a:xfrm>
+          <a:prstGeom prst="rect">
+            <a:avLst/>
+          </a:prstGeom>
+          <a:noFill/>
+        </p:spPr>
+        <p:txBody>
+          <a:bodyPr wrap="square">
+            <a:spAutoFit/>
+          </a:bodyPr>
+          <a:lstStyle/>
+          <a:p>
+            <a:pPr algn="ctr"/>
+            <a:r>
+              <a:rPr sz="1200" b="1" i="0">
+                <a:solidFill>
+                  <a:srgbClr val="FFFFFF"/>
+                </a:solidFill>
+                <a:latin typeface="Calibri"/>
+              </a:rPr>
+              <a:t>5</a:t>
+            </a:r>
+          </a:p>
+        </p:txBody>
+      </p:sp>
+      <p:sp>
+        <p:nvSpPr>
+          <p:cNvPr id="37" name="TextBox 36"/>
+          <p:cNvSpPr txBox="1"/>
+          <p:nvPr/>
+        </p:nvSpPr>
+        <p:spPr>
+          <a:xfrm>
+            <a:off x="5501640" y="4846320"/>
+            <a:ext cx="3855720" cy="274320"/>
+          </a:xfrm>
+          <a:prstGeom prst="rect">
+            <a:avLst/>
+          </a:prstGeom>
+          <a:noFill/>
+        </p:spPr>
+        <p:txBody>
+          <a:bodyPr wrap="square">
+            <a:spAutoFit/>
+          </a:bodyPr>
+          <a:lstStyle/>
+          <a:p>
+            <a:pPr algn="l"/>
+            <a:r>
+              <a:rPr sz="1150" b="1" i="0">
+                <a:solidFill>
+                  <a:srgbClr val="012169"/>
+                </a:solidFill>
+                <a:latin typeface="Calibri"/>
+              </a:rPr>
+              <a:t>Emit closed-trade ledger</a:t>
+            </a:r>
+          </a:p>
+        </p:txBody>
+      </p:sp>
+      <p:sp>
+        <p:nvSpPr>
+          <p:cNvPr id="38" name="TextBox 37"/>
+          <p:cNvSpPr txBox="1"/>
+          <p:nvPr/>
+        </p:nvSpPr>
+        <p:spPr>
+          <a:xfrm>
+            <a:off x="5501640" y="5120640"/>
+            <a:ext cx="3855720" cy="640080"/>
+          </a:xfrm>
+          <a:prstGeom prst="rect">
+            <a:avLst/>
+          </a:prstGeom>
+          <a:noFill/>
+        </p:spPr>
+        <p:txBody>
+          <a:bodyPr wrap="square">
+            <a:spAutoFit/>
+          </a:bodyPr>
+          <a:lstStyle/>
+          <a:p>
+            <a:pPr algn="l"/>
+            <a:r>
+              <a:rPr sz="1000" b="0" i="0">
+                <a:solidFill>
+                  <a:srgbClr val="1B365D"/>
+                </a:solidFill>
+                <a:latin typeface="DejaVu Sans Mono"/>
+              </a:rPr>
+              <a:t>Record entry/exit time, direction, prices, duration, PnL, slippage.</a:t>
+            </a:r>
+          </a:p>
+        </p:txBody>
+      </p:sp>
+      <p:sp>
+        <p:nvSpPr>
+          <p:cNvPr id="39" name="TextBox 38"/>
           <p:cNvSpPr txBox="1"/>
           <p:nvPr/>
         </p:nvSpPr>
@@ -8606,7 +8118,7 @@
       </p:sp>
       <p:sp>
         <p:nvSpPr>
-          <p:cNvPr id="8" name="TextBox 7"/>
+          <p:cNvPr id="40" name="TextBox 39"/>
           <p:cNvSpPr txBox="1"/>
           <p:nvPr/>
         </p:nvSpPr>
@@ -8634,7 +8146,7 @@
                 </a:solidFill>
                 <a:latin typeface="Calibri"/>
               </a:rPr>
-              <a:t>20 / 35</a:t>
+              <a:t>20 / 41</a:t>
             </a:r>
           </a:p>
         </p:txBody>
@@ -8695,7 +8207,7 @@
                 </a:solidFill>
                 <a:latin typeface="Calibri"/>
               </a:rPr>
-              <a:t>TY — Chekhlov drawdown family</a:t>
+              <a:t>Walk-forward design</a:t>
             </a:r>
           </a:p>
         </p:txBody>
@@ -8765,14 +8277,14 @@
                 </a:solidFill>
                 <a:latin typeface="Calibri"/>
               </a:rPr>
-              <a:t>PRIMARY MARKET — TY</a:t>
+              <a:t>STRATEGY</a:t>
             </a:r>
           </a:p>
         </p:txBody>
       </p:sp>
       <p:pic>
         <p:nvPicPr>
-          <p:cNvPr id="5" name="Picture 4" descr="slide_03_ty_drawdown_family.png"/>
+          <p:cNvPr id="5" name="Picture 4" descr="front_walkforward_schematic.png"/>
           <p:cNvPicPr>
             <a:picLocks noChangeAspect="1"/>
           </p:cNvPicPr>
@@ -8786,8 +8298,8 @@
         </p:blipFill>
         <p:spPr>
           <a:xfrm>
-            <a:off x="504287" y="914400"/>
-            <a:ext cx="8897425" cy="5029200"/>
+            <a:off x="375441" y="914400"/>
+            <a:ext cx="9155117" cy="3291840"/>
           </a:xfrm>
           <a:prstGeom prst="rect">
             <a:avLst/>
@@ -8796,42 +8308,586 @@
       </p:pic>
       <p:sp>
         <p:nvSpPr>
-          <p:cNvPr id="6" name="TextBox 5"/>
-          <p:cNvSpPr txBox="1"/>
-          <p:nvPr/>
-        </p:nvSpPr>
-        <p:spPr>
-          <a:xfrm>
-            <a:off x="365760" y="5989320"/>
-            <a:ext cx="9174480" cy="411480"/>
-          </a:xfrm>
-          <a:prstGeom prst="rect">
-            <a:avLst/>
-          </a:prstGeom>
-          <a:noFill/>
-        </p:spPr>
-        <p:txBody>
-          <a:bodyPr wrap="square">
-            <a:spAutoFit/>
-          </a:bodyPr>
-          <a:lstStyle/>
-          <a:p>
-            <a:pPr algn="l"/>
-            <a:r>
-              <a:rPr sz="1050" b="0" i="0">
+          <p:cNvPr id="6" name="Rectangle 5"/>
+          <p:cNvSpPr/>
+          <p:nvPr/>
+        </p:nvSpPr>
+        <p:spPr>
+          <a:xfrm>
+            <a:off x="457200" y="4389120"/>
+            <a:ext cx="2890520" cy="411480"/>
+          </a:xfrm>
+          <a:prstGeom prst="rect">
+            <a:avLst/>
+          </a:prstGeom>
+          <a:solidFill>
+            <a:srgbClr val="012169"/>
+          </a:solidFill>
+          <a:ln>
+            <a:noFill/>
+          </a:ln>
+          <a:effectLst/>
+        </p:spPr>
+        <p:style>
+          <a:lnRef idx="1">
+            <a:schemeClr val="accent1"/>
+          </a:lnRef>
+          <a:fillRef idx="3">
+            <a:schemeClr val="accent1"/>
+          </a:fillRef>
+          <a:effectRef idx="2">
+            <a:schemeClr val="accent1"/>
+          </a:effectRef>
+          <a:fontRef idx="minor">
+            <a:schemeClr val="lt1"/>
+          </a:fontRef>
+        </p:style>
+        <p:txBody>
+          <a:bodyPr rtlCol="0" anchor="ctr"/>
+          <a:lstStyle/>
+          <a:p>
+            <a:pPr algn="ctr"/>
+          </a:p>
+        </p:txBody>
+      </p:sp>
+      <p:sp>
+        <p:nvSpPr>
+          <p:cNvPr id="7" name="TextBox 6"/>
+          <p:cNvSpPr txBox="1"/>
+          <p:nvPr/>
+        </p:nvSpPr>
+        <p:spPr>
+          <a:xfrm>
+            <a:off x="640080" y="4462272"/>
+            <a:ext cx="2524760" cy="320040"/>
+          </a:xfrm>
+          <a:prstGeom prst="rect">
+            <a:avLst/>
+          </a:prstGeom>
+          <a:noFill/>
+        </p:spPr>
+        <p:txBody>
+          <a:bodyPr wrap="square">
+            <a:spAutoFit/>
+          </a:bodyPr>
+          <a:lstStyle/>
+          <a:p>
+            <a:pPr algn="l"/>
+            <a:r>
+              <a:rPr sz="1200" b="1" i="0">
+                <a:solidFill>
+                  <a:srgbClr val="A28D5B"/>
+                </a:solidFill>
+                <a:latin typeface="Calibri"/>
+              </a:rPr>
+              <a:t>T = 4 years</a:t>
+            </a:r>
+          </a:p>
+        </p:txBody>
+      </p:sp>
+      <p:sp>
+        <p:nvSpPr>
+          <p:cNvPr id="8" name="Rectangle 7"/>
+          <p:cNvSpPr/>
+          <p:nvPr/>
+        </p:nvSpPr>
+        <p:spPr>
+          <a:xfrm>
+            <a:off x="457200" y="4800600"/>
+            <a:ext cx="2890520" cy="960120"/>
+          </a:xfrm>
+          <a:prstGeom prst="rect">
+            <a:avLst/>
+          </a:prstGeom>
+          <a:solidFill>
+            <a:srgbClr val="F4F1EA"/>
+          </a:solidFill>
+          <a:ln>
+            <a:noFill/>
+          </a:ln>
+          <a:effectLst/>
+        </p:spPr>
+        <p:style>
+          <a:lnRef idx="1">
+            <a:schemeClr val="accent1"/>
+          </a:lnRef>
+          <a:fillRef idx="3">
+            <a:schemeClr val="accent1"/>
+          </a:fillRef>
+          <a:effectRef idx="2">
+            <a:schemeClr val="accent1"/>
+          </a:effectRef>
+          <a:fontRef idx="minor">
+            <a:schemeClr val="lt1"/>
+          </a:fontRef>
+        </p:style>
+        <p:txBody>
+          <a:bodyPr rtlCol="0" anchor="ctr"/>
+          <a:lstStyle/>
+          <a:p>
+            <a:pPr algn="ctr"/>
+          </a:p>
+        </p:txBody>
+      </p:sp>
+      <p:sp>
+        <p:nvSpPr>
+          <p:cNvPr id="9" name="TextBox 8"/>
+          <p:cNvSpPr txBox="1"/>
+          <p:nvPr/>
+        </p:nvSpPr>
+        <p:spPr>
+          <a:xfrm>
+            <a:off x="640080" y="4892040"/>
+            <a:ext cx="2524760" cy="274320"/>
+          </a:xfrm>
+          <a:prstGeom prst="rect">
+            <a:avLst/>
+          </a:prstGeom>
+          <a:noFill/>
+        </p:spPr>
+        <p:txBody>
+          <a:bodyPr wrap="square">
+            <a:spAutoFit/>
+          </a:bodyPr>
+          <a:lstStyle/>
+          <a:p>
+            <a:pPr algn="l"/>
+            <a:r>
+              <a:rPr sz="1050" b="1" i="0">
+                <a:solidFill>
+                  <a:srgbClr val="012169"/>
+                </a:solidFill>
+                <a:latin typeface="Calibri"/>
+              </a:rPr>
+              <a:t>In-sample window</a:t>
+            </a:r>
+          </a:p>
+        </p:txBody>
+      </p:sp>
+      <p:sp>
+        <p:nvSpPr>
+          <p:cNvPr id="10" name="TextBox 9"/>
+          <p:cNvSpPr txBox="1"/>
+          <p:nvPr/>
+        </p:nvSpPr>
+        <p:spPr>
+          <a:xfrm>
+            <a:off x="640080" y="5166360"/>
+            <a:ext cx="2524760" cy="914400"/>
+          </a:xfrm>
+          <a:prstGeom prst="rect">
+            <a:avLst/>
+          </a:prstGeom>
+          <a:noFill/>
+        </p:spPr>
+        <p:txBody>
+          <a:bodyPr wrap="square">
+            <a:spAutoFit/>
+          </a:bodyPr>
+          <a:lstStyle/>
+          <a:p>
+            <a:pPr algn="l"/>
+            <a:r>
+              <a:rPr sz="1000" b="0" i="0">
                 <a:solidFill>
                   <a:srgbClr val="1B365D"/>
                 </a:solidFill>
                 <a:latin typeface="Calibri"/>
               </a:rPr>
-              <a:t>Top: % off running peak. Bottom: $ off running peak. Max DD ≈ 11% / $15.9k. CDD(α=0.05) ≈ $13.3k indicates the worst 5% of drawdown bars are concentrated near the max. Long underwater stretches are structural for a 1.5%/yr trend-following bond strategy.</a:t>
-            </a:r>
-          </a:p>
-        </p:txBody>
-      </p:sp>
-      <p:sp>
-        <p:nvSpPr>
-          <p:cNvPr id="7" name="TextBox 6"/>
+              <a:t>Chosen so each IS spans multiple regimes for TY (rate cycles) and the full BTC inception.</a:t>
+            </a:r>
+          </a:p>
+        </p:txBody>
+      </p:sp>
+      <p:sp>
+        <p:nvSpPr>
+          <p:cNvPr id="11" name="Rectangle 10"/>
+          <p:cNvSpPr/>
+          <p:nvPr/>
+        </p:nvSpPr>
+        <p:spPr>
+          <a:xfrm>
+            <a:off x="3439160" y="4389120"/>
+            <a:ext cx="2890520" cy="411480"/>
+          </a:xfrm>
+          <a:prstGeom prst="rect">
+            <a:avLst/>
+          </a:prstGeom>
+          <a:solidFill>
+            <a:srgbClr val="012169"/>
+          </a:solidFill>
+          <a:ln>
+            <a:noFill/>
+          </a:ln>
+          <a:effectLst/>
+        </p:spPr>
+        <p:style>
+          <a:lnRef idx="1">
+            <a:schemeClr val="accent1"/>
+          </a:lnRef>
+          <a:fillRef idx="3">
+            <a:schemeClr val="accent1"/>
+          </a:fillRef>
+          <a:effectRef idx="2">
+            <a:schemeClr val="accent1"/>
+          </a:effectRef>
+          <a:fontRef idx="minor">
+            <a:schemeClr val="lt1"/>
+          </a:fontRef>
+        </p:style>
+        <p:txBody>
+          <a:bodyPr rtlCol="0" anchor="ctr"/>
+          <a:lstStyle/>
+          <a:p>
+            <a:pPr algn="ctr"/>
+          </a:p>
+        </p:txBody>
+      </p:sp>
+      <p:sp>
+        <p:nvSpPr>
+          <p:cNvPr id="12" name="TextBox 11"/>
+          <p:cNvSpPr txBox="1"/>
+          <p:nvPr/>
+        </p:nvSpPr>
+        <p:spPr>
+          <a:xfrm>
+            <a:off x="3622040" y="4462272"/>
+            <a:ext cx="2524760" cy="320040"/>
+          </a:xfrm>
+          <a:prstGeom prst="rect">
+            <a:avLst/>
+          </a:prstGeom>
+          <a:noFill/>
+        </p:spPr>
+        <p:txBody>
+          <a:bodyPr wrap="square">
+            <a:spAutoFit/>
+          </a:bodyPr>
+          <a:lstStyle/>
+          <a:p>
+            <a:pPr algn="l"/>
+            <a:r>
+              <a:rPr sz="1200" b="1" i="0">
+                <a:solidFill>
+                  <a:srgbClr val="A28D5B"/>
+                </a:solidFill>
+                <a:latin typeface="Calibri"/>
+              </a:rPr>
+              <a:t>τ = 1 quarter</a:t>
+            </a:r>
+          </a:p>
+        </p:txBody>
+      </p:sp>
+      <p:sp>
+        <p:nvSpPr>
+          <p:cNvPr id="13" name="Rectangle 12"/>
+          <p:cNvSpPr/>
+          <p:nvPr/>
+        </p:nvSpPr>
+        <p:spPr>
+          <a:xfrm>
+            <a:off x="3439160" y="4800600"/>
+            <a:ext cx="2890520" cy="960120"/>
+          </a:xfrm>
+          <a:prstGeom prst="rect">
+            <a:avLst/>
+          </a:prstGeom>
+          <a:solidFill>
+            <a:srgbClr val="F4F1EA"/>
+          </a:solidFill>
+          <a:ln>
+            <a:noFill/>
+          </a:ln>
+          <a:effectLst/>
+        </p:spPr>
+        <p:style>
+          <a:lnRef idx="1">
+            <a:schemeClr val="accent1"/>
+          </a:lnRef>
+          <a:fillRef idx="3">
+            <a:schemeClr val="accent1"/>
+          </a:fillRef>
+          <a:effectRef idx="2">
+            <a:schemeClr val="accent1"/>
+          </a:effectRef>
+          <a:fontRef idx="minor">
+            <a:schemeClr val="lt1"/>
+          </a:fontRef>
+        </p:style>
+        <p:txBody>
+          <a:bodyPr rtlCol="0" anchor="ctr"/>
+          <a:lstStyle/>
+          <a:p>
+            <a:pPr algn="ctr"/>
+          </a:p>
+        </p:txBody>
+      </p:sp>
+      <p:sp>
+        <p:nvSpPr>
+          <p:cNvPr id="14" name="TextBox 13"/>
+          <p:cNvSpPr txBox="1"/>
+          <p:nvPr/>
+        </p:nvSpPr>
+        <p:spPr>
+          <a:xfrm>
+            <a:off x="3622040" y="4892040"/>
+            <a:ext cx="2524760" cy="274320"/>
+          </a:xfrm>
+          <a:prstGeom prst="rect">
+            <a:avLst/>
+          </a:prstGeom>
+          <a:noFill/>
+        </p:spPr>
+        <p:txBody>
+          <a:bodyPr wrap="square">
+            <a:spAutoFit/>
+          </a:bodyPr>
+          <a:lstStyle/>
+          <a:p>
+            <a:pPr algn="l"/>
+            <a:r>
+              <a:rPr sz="1050" b="1" i="0">
+                <a:solidFill>
+                  <a:srgbClr val="012169"/>
+                </a:solidFill>
+                <a:latin typeface="Calibri"/>
+              </a:rPr>
+              <a:t>Out-of-sample window</a:t>
+            </a:r>
+          </a:p>
+        </p:txBody>
+      </p:sp>
+      <p:sp>
+        <p:nvSpPr>
+          <p:cNvPr id="15" name="TextBox 14"/>
+          <p:cNvSpPr txBox="1"/>
+          <p:nvPr/>
+        </p:nvSpPr>
+        <p:spPr>
+          <a:xfrm>
+            <a:off x="3622040" y="5166360"/>
+            <a:ext cx="2524760" cy="914400"/>
+          </a:xfrm>
+          <a:prstGeom prst="rect">
+            <a:avLst/>
+          </a:prstGeom>
+          <a:noFill/>
+        </p:spPr>
+        <p:txBody>
+          <a:bodyPr wrap="square">
+            <a:spAutoFit/>
+          </a:bodyPr>
+          <a:lstStyle/>
+          <a:p>
+            <a:pPr algn="l"/>
+            <a:r>
+              <a:rPr sz="1000" b="0" i="0">
+                <a:solidFill>
+                  <a:srgbClr val="1B365D"/>
+                </a:solidFill>
+                <a:latin typeface="Calibri"/>
+              </a:rPr>
+              <a:t>Short enough to test near-term generalisation; long enough to gather statistically meaningful trades.</a:t>
+            </a:r>
+          </a:p>
+        </p:txBody>
+      </p:sp>
+      <p:sp>
+        <p:nvSpPr>
+          <p:cNvPr id="16" name="Rectangle 15"/>
+          <p:cNvSpPr/>
+          <p:nvPr/>
+        </p:nvSpPr>
+        <p:spPr>
+          <a:xfrm>
+            <a:off x="6421120" y="4389120"/>
+            <a:ext cx="2890520" cy="411480"/>
+          </a:xfrm>
+          <a:prstGeom prst="rect">
+            <a:avLst/>
+          </a:prstGeom>
+          <a:solidFill>
+            <a:srgbClr val="012169"/>
+          </a:solidFill>
+          <a:ln>
+            <a:noFill/>
+          </a:ln>
+          <a:effectLst/>
+        </p:spPr>
+        <p:style>
+          <a:lnRef idx="1">
+            <a:schemeClr val="accent1"/>
+          </a:lnRef>
+          <a:fillRef idx="3">
+            <a:schemeClr val="accent1"/>
+          </a:fillRef>
+          <a:effectRef idx="2">
+            <a:schemeClr val="accent1"/>
+          </a:effectRef>
+          <a:fontRef idx="minor">
+            <a:schemeClr val="lt1"/>
+          </a:fontRef>
+        </p:style>
+        <p:txBody>
+          <a:bodyPr rtlCol="0" anchor="ctr"/>
+          <a:lstStyle/>
+          <a:p>
+            <a:pPr algn="ctr"/>
+          </a:p>
+        </p:txBody>
+      </p:sp>
+      <p:sp>
+        <p:nvSpPr>
+          <p:cNvPr id="17" name="TextBox 16"/>
+          <p:cNvSpPr txBox="1"/>
+          <p:nvPr/>
+        </p:nvSpPr>
+        <p:spPr>
+          <a:xfrm>
+            <a:off x="6604000" y="4462272"/>
+            <a:ext cx="2524760" cy="320040"/>
+          </a:xfrm>
+          <a:prstGeom prst="rect">
+            <a:avLst/>
+          </a:prstGeom>
+          <a:noFill/>
+        </p:spPr>
+        <p:txBody>
+          <a:bodyPr wrap="square">
+            <a:spAutoFit/>
+          </a:bodyPr>
+          <a:lstStyle/>
+          <a:p>
+            <a:pPr algn="l"/>
+            <a:r>
+              <a:rPr sz="1200" b="1" i="0">
+                <a:solidFill>
+                  <a:srgbClr val="A28D5B"/>
+                </a:solidFill>
+                <a:latin typeface="Calibri"/>
+              </a:rPr>
+              <a:t>Net P / Max DD</a:t>
+            </a:r>
+          </a:p>
+        </p:txBody>
+      </p:sp>
+      <p:sp>
+        <p:nvSpPr>
+          <p:cNvPr id="18" name="Rectangle 17"/>
+          <p:cNvSpPr/>
+          <p:nvPr/>
+        </p:nvSpPr>
+        <p:spPr>
+          <a:xfrm>
+            <a:off x="6421120" y="4800600"/>
+            <a:ext cx="2890520" cy="960120"/>
+          </a:xfrm>
+          <a:prstGeom prst="rect">
+            <a:avLst/>
+          </a:prstGeom>
+          <a:solidFill>
+            <a:srgbClr val="F4F1EA"/>
+          </a:solidFill>
+          <a:ln>
+            <a:noFill/>
+          </a:ln>
+          <a:effectLst/>
+        </p:spPr>
+        <p:style>
+          <a:lnRef idx="1">
+            <a:schemeClr val="accent1"/>
+          </a:lnRef>
+          <a:fillRef idx="3">
+            <a:schemeClr val="accent1"/>
+          </a:fillRef>
+          <a:effectRef idx="2">
+            <a:schemeClr val="accent1"/>
+          </a:effectRef>
+          <a:fontRef idx="minor">
+            <a:schemeClr val="lt1"/>
+          </a:fontRef>
+        </p:style>
+        <p:txBody>
+          <a:bodyPr rtlCol="0" anchor="ctr"/>
+          <a:lstStyle/>
+          <a:p>
+            <a:pPr algn="ctr"/>
+          </a:p>
+        </p:txBody>
+      </p:sp>
+      <p:sp>
+        <p:nvSpPr>
+          <p:cNvPr id="19" name="TextBox 18"/>
+          <p:cNvSpPr txBox="1"/>
+          <p:nvPr/>
+        </p:nvSpPr>
+        <p:spPr>
+          <a:xfrm>
+            <a:off x="6604000" y="4892040"/>
+            <a:ext cx="2524760" cy="274320"/>
+          </a:xfrm>
+          <a:prstGeom prst="rect">
+            <a:avLst/>
+          </a:prstGeom>
+          <a:noFill/>
+        </p:spPr>
+        <p:txBody>
+          <a:bodyPr wrap="square">
+            <a:spAutoFit/>
+          </a:bodyPr>
+          <a:lstStyle/>
+          <a:p>
+            <a:pPr algn="l"/>
+            <a:r>
+              <a:rPr sz="1050" b="1" i="0">
+                <a:solidFill>
+                  <a:srgbClr val="012169"/>
+                </a:solidFill>
+                <a:latin typeface="Calibri"/>
+              </a:rPr>
+              <a:t>Optimisation objective</a:t>
+            </a:r>
+          </a:p>
+        </p:txBody>
+      </p:sp>
+      <p:sp>
+        <p:nvSpPr>
+          <p:cNvPr id="20" name="TextBox 19"/>
+          <p:cNvSpPr txBox="1"/>
+          <p:nvPr/>
+        </p:nvSpPr>
+        <p:spPr>
+          <a:xfrm>
+            <a:off x="6604000" y="5166360"/>
+            <a:ext cx="2524760" cy="914400"/>
+          </a:xfrm>
+          <a:prstGeom prst="rect">
+            <a:avLst/>
+          </a:prstGeom>
+          <a:noFill/>
+        </p:spPr>
+        <p:txBody>
+          <a:bodyPr wrap="square">
+            <a:spAutoFit/>
+          </a:bodyPr>
+          <a:lstStyle/>
+          <a:p>
+            <a:pPr algn="l"/>
+            <a:r>
+              <a:rPr sz="1000" b="0" i="0">
+                <a:solidFill>
+                  <a:srgbClr val="1B365D"/>
+                </a:solidFill>
+                <a:latin typeface="Calibri"/>
+              </a:rPr>
+              <a:t>Calmar-style: rewards capital efficiency, penalises drawdowns. Tie-break on smaller L, then smaller S.</a:t>
+            </a:r>
+          </a:p>
+        </p:txBody>
+      </p:sp>
+      <p:sp>
+        <p:nvSpPr>
+          <p:cNvPr id="21" name="TextBox 20"/>
           <p:cNvSpPr txBox="1"/>
           <p:nvPr/>
         </p:nvSpPr>
@@ -8866,7 +8922,7 @@
       </p:sp>
       <p:sp>
         <p:nvSpPr>
-          <p:cNvPr id="8" name="TextBox 7"/>
+          <p:cNvPr id="22" name="TextBox 21"/>
           <p:cNvSpPr txBox="1"/>
           <p:nvPr/>
         </p:nvSpPr>
@@ -8894,7 +8950,7 @@
                 </a:solidFill>
                 <a:latin typeface="Calibri"/>
               </a:rPr>
-              <a:t>21 / 35</a:t>
+              <a:t>21 / 41</a:t>
             </a:r>
           </a:p>
         </p:txBody>
@@ -8913,7 +8969,7 @@
     <p:bg>
       <p:bgPr>
         <a:solidFill>
-          <a:srgbClr val="FFFFFF"/>
+          <a:srgbClr val="012169"/>
         </a:solidFill>
         <a:effectLst/>
       </p:bgPr>
@@ -8927,74 +8983,83 @@
       <p:grpSpPr/>
       <p:sp>
         <p:nvSpPr>
-          <p:cNvPr id="2" name="TextBox 1"/>
-          <p:cNvSpPr txBox="1"/>
-          <p:nvPr/>
-        </p:nvSpPr>
-        <p:spPr>
-          <a:xfrm>
-            <a:off x="365760" y="228600"/>
-            <a:ext cx="9174480" cy="502920"/>
-          </a:xfrm>
-          <a:prstGeom prst="rect">
-            <a:avLst/>
-          </a:prstGeom>
-          <a:noFill/>
-        </p:spPr>
-        <p:txBody>
-          <a:bodyPr wrap="square">
-            <a:spAutoFit/>
-          </a:bodyPr>
-          <a:lstStyle/>
-          <a:p>
-            <a:pPr algn="l"/>
-            <a:r>
-              <a:rPr sz="2400" b="1" i="0">
-                <a:solidFill>
-                  <a:srgbClr val="012169"/>
-                </a:solidFill>
-                <a:latin typeface="Calibri"/>
-              </a:rPr>
-              <a:t>TY — out-of-sample trade PnL distribution</a:t>
-            </a:r>
-          </a:p>
-        </p:txBody>
-      </p:sp>
-      <p:cxnSp>
-        <p:nvCxnSpPr>
-          <p:cNvPr id="3" name="Connector 2"/>
-          <p:cNvCxnSpPr/>
-          <p:nvPr/>
-        </p:nvCxnSpPr>
-        <p:spPr>
-          <a:xfrm>
-            <a:off x="365760" y="777240"/>
-            <a:ext cx="9174480" cy="0"/>
-          </a:xfrm>
-          <a:prstGeom prst="line">
-            <a:avLst/>
-          </a:prstGeom>
-          <a:ln w="12700">
-            <a:solidFill>
-              <a:srgbClr val="012169"/>
-            </a:solidFill>
+          <p:cNvPr id="2" name="Rectangle 1"/>
+          <p:cNvSpPr/>
+          <p:nvPr/>
+        </p:nvSpPr>
+        <p:spPr>
+          <a:xfrm>
+            <a:off x="0" y="0"/>
+            <a:ext cx="9906000" cy="45720"/>
+          </a:xfrm>
+          <a:prstGeom prst="rect">
+            <a:avLst/>
+          </a:prstGeom>
+          <a:solidFill>
+            <a:srgbClr val="A28D5B"/>
+          </a:solidFill>
+          <a:ln>
+            <a:noFill/>
           </a:ln>
+          <a:effectLst/>
         </p:spPr>
         <p:style>
-          <a:lnRef idx="2">
+          <a:lnRef idx="1">
             <a:schemeClr val="accent1"/>
           </a:lnRef>
-          <a:fillRef idx="0">
+          <a:fillRef idx="3">
             <a:schemeClr val="accent1"/>
           </a:fillRef>
-          <a:effectRef idx="1">
+          <a:effectRef idx="2">
             <a:schemeClr val="accent1"/>
           </a:effectRef>
           <a:fontRef idx="minor">
-            <a:schemeClr val="tx1"/>
+            <a:schemeClr val="lt1"/>
           </a:fontRef>
         </p:style>
-      </p:cxnSp>
+        <p:txBody>
+          <a:bodyPr rtlCol="0" anchor="ctr"/>
+          <a:lstStyle/>
+          <a:p>
+            <a:pPr algn="ctr"/>
+          </a:p>
+        </p:txBody>
+      </p:sp>
+      <p:sp>
+        <p:nvSpPr>
+          <p:cNvPr id="3" name="TextBox 2"/>
+          <p:cNvSpPr txBox="1"/>
+          <p:nvPr/>
+        </p:nvSpPr>
+        <p:spPr>
+          <a:xfrm>
+            <a:off x="548640" y="2377440"/>
+            <a:ext cx="8808720" cy="457200"/>
+          </a:xfrm>
+          <a:prstGeom prst="rect">
+            <a:avLst/>
+          </a:prstGeom>
+          <a:noFill/>
+        </p:spPr>
+        <p:txBody>
+          <a:bodyPr wrap="square">
+            <a:spAutoFit/>
+          </a:bodyPr>
+          <a:lstStyle/>
+          <a:p>
+            <a:pPr algn="l"/>
+            <a:r>
+              <a:rPr sz="1400" b="1" i="0">
+                <a:solidFill>
+                  <a:srgbClr val="A28D5B"/>
+                </a:solidFill>
+                <a:latin typeface="Calibri"/>
+              </a:rPr>
+              <a:t>OUT-OF-SAMPLE PERFORMANCE</a:t>
+            </a:r>
+          </a:p>
+        </p:txBody>
+      </p:sp>
       <p:sp>
         <p:nvSpPr>
           <p:cNvPr id="4" name="TextBox 3"/>
@@ -9003,130 +9068,71 @@
         </p:nvSpPr>
         <p:spPr>
           <a:xfrm>
-            <a:off x="7528560" y="228600"/>
-            <a:ext cx="2011680" cy="365760"/>
-          </a:xfrm>
-          <a:prstGeom prst="rect">
-            <a:avLst/>
-          </a:prstGeom>
-          <a:noFill/>
-        </p:spPr>
-        <p:txBody>
-          <a:bodyPr wrap="square">
-            <a:spAutoFit/>
-          </a:bodyPr>
-          <a:lstStyle/>
-          <a:p>
-            <a:pPr algn="r"/>
-            <a:r>
-              <a:rPr sz="1000" b="1" i="0">
-                <a:solidFill>
-                  <a:srgbClr val="A28D5B"/>
-                </a:solidFill>
-                <a:latin typeface="Calibri"/>
-              </a:rPr>
-              <a:t>PRIMARY MARKET — TY</a:t>
-            </a:r>
-          </a:p>
-        </p:txBody>
-      </p:sp>
-      <p:pic>
-        <p:nvPicPr>
-          <p:cNvPr id="5" name="Picture 4" descr="slide_04_ty_trade_distribution.png"/>
-          <p:cNvPicPr>
-            <a:picLocks noChangeAspect="1"/>
-          </p:cNvPicPr>
-          <p:nvPr/>
-        </p:nvPicPr>
-        <p:blipFill>
-          <a:blip r:embed="rId2"/>
-          <a:stretch>
-            <a:fillRect/>
-          </a:stretch>
-        </p:blipFill>
-        <p:spPr>
-          <a:xfrm>
-            <a:off x="393560" y="914400"/>
-            <a:ext cx="9118879" cy="5029200"/>
-          </a:xfrm>
-          <a:prstGeom prst="rect">
-            <a:avLst/>
-          </a:prstGeom>
-        </p:spPr>
-      </p:pic>
+            <a:off x="548640" y="2834640"/>
+            <a:ext cx="8808720" cy="1828800"/>
+          </a:xfrm>
+          <a:prstGeom prst="rect">
+            <a:avLst/>
+          </a:prstGeom>
+          <a:noFill/>
+        </p:spPr>
+        <p:txBody>
+          <a:bodyPr wrap="square">
+            <a:spAutoFit/>
+          </a:bodyPr>
+          <a:lstStyle/>
+          <a:p>
+            <a:pPr algn="l"/>
+            <a:r>
+              <a:rPr sz="3600" b="1" i="0">
+                <a:solidFill>
+                  <a:srgbClr val="FFFFFF"/>
+                </a:solidFill>
+                <a:latin typeface="Calibri"/>
+              </a:rPr>
+              <a:t>Walk-forward results for both markets</a:t>
+            </a:r>
+          </a:p>
+        </p:txBody>
+      </p:sp>
+      <p:sp>
+        <p:nvSpPr>
+          <p:cNvPr id="5" name="TextBox 4"/>
+          <p:cNvSpPr txBox="1"/>
+          <p:nvPr/>
+        </p:nvSpPr>
+        <p:spPr>
+          <a:xfrm>
+            <a:off x="548640" y="6446520"/>
+            <a:ext cx="8808720" cy="274320"/>
+          </a:xfrm>
+          <a:prstGeom prst="rect">
+            <a:avLst/>
+          </a:prstGeom>
+          <a:noFill/>
+        </p:spPr>
+        <p:txBody>
+          <a:bodyPr wrap="square">
+            <a:spAutoFit/>
+          </a:bodyPr>
+          <a:lstStyle/>
+          <a:p>
+            <a:pPr algn="l"/>
+            <a:r>
+              <a:rPr sz="900" b="0" i="0">
+                <a:solidFill>
+                  <a:srgbClr val="E6E9EE"/>
+                </a:solidFill>
+                <a:latin typeface="Calibri"/>
+              </a:rPr>
+              <a:t>MATH GR5360 Final Project · Group 1 · Columbia MAFN — Spring 2026</a:t>
+            </a:r>
+          </a:p>
+        </p:txBody>
+      </p:sp>
       <p:sp>
         <p:nvSpPr>
           <p:cNvPr id="6" name="TextBox 5"/>
-          <p:cNvSpPr txBox="1"/>
-          <p:nvPr/>
-        </p:nvSpPr>
-        <p:spPr>
-          <a:xfrm>
-            <a:off x="365760" y="5989320"/>
-            <a:ext cx="9174480" cy="411480"/>
-          </a:xfrm>
-          <a:prstGeom prst="rect">
-            <a:avLst/>
-          </a:prstGeom>
-          <a:noFill/>
-        </p:spPr>
-        <p:txBody>
-          <a:bodyPr wrap="square">
-            <a:spAutoFit/>
-          </a:bodyPr>
-          <a:lstStyle/>
-          <a:p>
-            <a:pPr algn="l"/>
-            <a:r>
-              <a:rPr sz="1050" b="0" i="0">
-                <a:solidFill>
-                  <a:srgbClr val="1B365D"/>
-                </a:solidFill>
-                <a:latin typeface="Calibri"/>
-              </a:rPr>
-              <a:t>Win rate 33% but average winner $1 265 vs average loser −$897 — classic right-skewed breakout payoff. Profit factor 0.70 because the system loses small and wins large; the assignment-mandated Net P / Max DD objective is what we optimise against (4.31×).</a:t>
-            </a:r>
-          </a:p>
-        </p:txBody>
-      </p:sp>
-      <p:sp>
-        <p:nvSpPr>
-          <p:cNvPr id="7" name="TextBox 6"/>
-          <p:cNvSpPr txBox="1"/>
-          <p:nvPr/>
-        </p:nvSpPr>
-        <p:spPr>
-          <a:xfrm>
-            <a:off x="365760" y="6446520"/>
-            <a:ext cx="9174480" cy="274320"/>
-          </a:xfrm>
-          <a:prstGeom prst="rect">
-            <a:avLst/>
-          </a:prstGeom>
-          <a:noFill/>
-        </p:spPr>
-        <p:txBody>
-          <a:bodyPr wrap="square">
-            <a:spAutoFit/>
-          </a:bodyPr>
-          <a:lstStyle/>
-          <a:p>
-            <a:pPr algn="l"/>
-            <a:r>
-              <a:rPr sz="900" b="0" i="0">
-                <a:solidFill>
-                  <a:srgbClr val="9AA1A9"/>
-                </a:solidFill>
-                <a:latin typeface="Calibri"/>
-              </a:rPr>
-              <a:t>MATH GR5360 Final Project · Group 1 · Columbia MAFN — Spring 2026</a:t>
-            </a:r>
-          </a:p>
-        </p:txBody>
-      </p:sp>
-      <p:sp>
-        <p:nvSpPr>
-          <p:cNvPr id="8" name="TextBox 7"/>
           <p:cNvSpPr txBox="1"/>
           <p:nvPr/>
         </p:nvSpPr>
@@ -9150,11 +9156,11 @@
             <a:r>
               <a:rPr sz="900" b="0" i="0">
                 <a:solidFill>
-                  <a:srgbClr val="9AA1A9"/>
-                </a:solidFill>
-                <a:latin typeface="Calibri"/>
-              </a:rPr>
-              <a:t>22 / 35</a:t>
+                  <a:srgbClr val="E6E9EE"/>
+                </a:solidFill>
+                <a:latin typeface="Calibri"/>
+              </a:rPr>
+              <a:t>22 / 41</a:t>
             </a:r>
           </a:p>
         </p:txBody>
@@ -9215,7 +9221,7 @@
                 </a:solidFill>
                 <a:latin typeface="Calibri"/>
               </a:rPr>
-              <a:t>TY — most profitable OOS trade (autopsy)</a:t>
+              <a:t>Performance metrics</a:t>
             </a:r>
           </a:p>
         </p:txBody>
@@ -9285,14 +9291,14 @@
                 </a:solidFill>
                 <a:latin typeface="Calibri"/>
               </a:rPr>
-              <a:t>PRIMARY MARKET — TY</a:t>
+              <a:t>RESULTS</a:t>
             </a:r>
           </a:p>
         </p:txBody>
       </p:sp>
       <p:pic>
         <p:nvPicPr>
-          <p:cNvPr id="5" name="Picture 4" descr="slide_05_ty_best_trade.png"/>
+          <p:cNvPr id="5" name="Picture 4" descr="slide_01_performance_metrics.png"/>
           <p:cNvPicPr>
             <a:picLocks noChangeAspect="1"/>
           </p:cNvPicPr>
@@ -9306,8 +9312,8 @@
         </p:blipFill>
         <p:spPr>
           <a:xfrm>
-            <a:off x="485463" y="914400"/>
-            <a:ext cx="8935074" cy="5029200"/>
+            <a:off x="1167002" y="914400"/>
+            <a:ext cx="7571996" cy="5029200"/>
           </a:xfrm>
           <a:prstGeom prst="rect">
             <a:avLst/>
@@ -9344,7 +9350,7 @@
                 </a:solidFill>
                 <a:latin typeface="Calibri"/>
               </a:rPr>
-              <a:t>21 Jan 2020 LONG 129.56 → 137.75 over 50 days (+$8 170). Channel breakout above the 1 920-bar high right as COVID drove a flight-to-safety bond rally. Trailing-equity stop fired after the initial impulse decayed — textbook trend payoff.</a:t>
+              <a:t>Both markets earn ≈ 4× Return on Account out-of-sample. TY's signal is slow and low-vol; BTC's is fast and high-vol — same Channel WithDDControl framework, calibrated to each market's autocorrelation structure.</a:t>
             </a:r>
           </a:p>
         </p:txBody>
@@ -9414,7 +9420,7 @@
                 </a:solidFill>
                 <a:latin typeface="Calibri"/>
               </a:rPr>
-              <a:t>23 / 35</a:t>
+              <a:t>23 / 41</a:t>
             </a:r>
           </a:p>
         </p:txBody>
@@ -9475,7 +9481,7 @@
                 </a:solidFill>
                 <a:latin typeface="Calibri"/>
               </a:rPr>
-              <a:t>TY — worst OOS trade · why it got cooked</a:t>
+              <a:t>TY — out-of-sample equity &amp; portfolio position</a:t>
             </a:r>
           </a:p>
         </p:txBody>
@@ -9552,7 +9558,7 @@
       </p:sp>
       <p:pic>
         <p:nvPicPr>
-          <p:cNvPr id="5" name="Picture 4" descr="slide_06_ty_worst_trade.png"/>
+          <p:cNvPr id="5" name="Picture 4" descr="slide_02_ty_equity_position.png"/>
           <p:cNvPicPr>
             <a:picLocks noChangeAspect="1"/>
           </p:cNvPicPr>
@@ -9566,8 +9572,8 @@
         </p:blipFill>
         <p:spPr>
           <a:xfrm>
-            <a:off x="365760" y="1728001"/>
-            <a:ext cx="6141720" cy="3401997"/>
+            <a:off x="850477" y="914400"/>
+            <a:ext cx="8205046" cy="5029200"/>
           </a:xfrm>
           <a:prstGeom prst="rect">
             <a:avLst/>
@@ -9577,179 +9583,6 @@
       <p:sp>
         <p:nvSpPr>
           <p:cNvPr id="6" name="TextBox 5"/>
-          <p:cNvSpPr txBox="1"/>
-          <p:nvPr/>
-        </p:nvSpPr>
-        <p:spPr>
-          <a:xfrm>
-            <a:off x="6690360" y="1005840"/>
-            <a:ext cx="2849880" cy="4846320"/>
-          </a:xfrm>
-          <a:prstGeom prst="rect">
-            <a:avLst/>
-          </a:prstGeom>
-          <a:noFill/>
-        </p:spPr>
-        <p:txBody>
-          <a:bodyPr wrap="square">
-            <a:spAutoFit/>
-          </a:bodyPr>
-          <a:lstStyle/>
-          <a:p>
-            <a:pPr algn="l">
-              <a:lnSpc>
-                <a:spcPct val="115000"/>
-              </a:lnSpc>
-            </a:pPr>
-            <a:r>
-              <a:rPr sz="1100" b="1">
-                <a:solidFill>
-                  <a:srgbClr val="A28D5B"/>
-                </a:solidFill>
-                <a:latin typeface="Calibri"/>
-              </a:rPr>
-              <a:t>•  </a:t>
-            </a:r>
-            <a:r>
-              <a:rPr sz="1100">
-                <a:solidFill>
-                  <a:srgbClr val="1B365D"/>
-                </a:solidFill>
-                <a:latin typeface="Calibri"/>
-              </a:rPr>
-              <a:t>22 Feb 2002 LONG @ 107.38 — broke above the 3 200-bar (~40-day) high.</a:t>
-            </a:r>
-          </a:p>
-          <a:p>
-            <a:pPr algn="l">
-              <a:lnSpc>
-                <a:spcPct val="115000"/>
-              </a:lnSpc>
-            </a:pPr>
-            <a:r>
-              <a:rPr sz="1100" b="1">
-                <a:solidFill>
-                  <a:srgbClr val="A28D5B"/>
-                </a:solidFill>
-                <a:latin typeface="Calibri"/>
-              </a:rPr>
-              <a:t>•  </a:t>
-            </a:r>
-            <a:r>
-              <a:rPr sz="1100">
-                <a:solidFill>
-                  <a:srgbClr val="1B365D"/>
-                </a:solidFill>
-                <a:latin typeface="Calibri"/>
-              </a:rPr>
-              <a:t>Treasuries reversed almost immediately on hawkish-Fed signals at the late-Feb FOMC.</a:t>
-            </a:r>
-          </a:p>
-          <a:p>
-            <a:pPr algn="l">
-              <a:lnSpc>
-                <a:spcPct val="115000"/>
-              </a:lnSpc>
-            </a:pPr>
-            <a:r>
-              <a:rPr sz="1100" b="1">
-                <a:solidFill>
-                  <a:srgbClr val="A28D5B"/>
-                </a:solidFill>
-                <a:latin typeface="Calibri"/>
-              </a:rPr>
-              <a:t>•  </a:t>
-            </a:r>
-            <a:r>
-              <a:rPr sz="1100">
-                <a:solidFill>
-                  <a:srgbClr val="1B365D"/>
-                </a:solidFill>
-                <a:latin typeface="Calibri"/>
-              </a:rPr>
-              <a:t>Price slid 2.93 pts in 12 days; trailing stop fired at $-2 952.</a:t>
-            </a:r>
-          </a:p>
-          <a:p>
-            <a:pPr algn="l">
-              <a:lnSpc>
-                <a:spcPct val="115000"/>
-              </a:lnSpc>
-            </a:pPr>
-            <a:r>
-              <a:rPr sz="1100" b="1">
-                <a:solidFill>
-                  <a:srgbClr val="A28D5B"/>
-                </a:solidFill>
-                <a:latin typeface="Calibri"/>
-              </a:rPr>
-              <a:t>•  </a:t>
-            </a:r>
-            <a:r>
-              <a:rPr sz="1100">
-                <a:solidFill>
-                  <a:srgbClr val="1B365D"/>
-                </a:solidFill>
-                <a:latin typeface="Calibri"/>
-              </a:rPr>
-              <a:t>Classic 'breakout caught at the local top' before mean-reversion fired.</a:t>
-            </a:r>
-          </a:p>
-          <a:p>
-            <a:pPr algn="l">
-              <a:lnSpc>
-                <a:spcPct val="115000"/>
-              </a:lnSpc>
-            </a:pPr>
-            <a:r>
-              <a:rPr sz="1100" b="1">
-                <a:solidFill>
-                  <a:srgbClr val="A28D5B"/>
-                </a:solidFill>
-                <a:latin typeface="Calibri"/>
-              </a:rPr>
-              <a:t>•  </a:t>
-            </a:r>
-            <a:r>
-              <a:rPr sz="1100">
-                <a:solidFill>
-                  <a:srgbClr val="1B365D"/>
-                </a:solidFill>
-                <a:latin typeface="Calibri"/>
-              </a:rPr>
-              <a:t>Wide L = 3 200 channel made the per-bar stop physically distant — loss compounded before exit.</a:t>
-            </a:r>
-          </a:p>
-          <a:p>
-            <a:pPr algn="l">
-              <a:lnSpc>
-                <a:spcPct val="115000"/>
-              </a:lnSpc>
-            </a:pPr>
-            <a:r>
-              <a:rPr sz="1100" b="1">
-                <a:solidFill>
-                  <a:srgbClr val="A28D5B"/>
-                </a:solidFill>
-                <a:latin typeface="Calibri"/>
-              </a:rPr>
-              <a:t>•  </a:t>
-            </a:r>
-            <a:r>
-              <a:rPr sz="1100">
-                <a:solidFill>
-                  <a:srgbClr val="1B365D"/>
-                </a:solidFill>
-                <a:latin typeface="Calibri"/>
-              </a:rPr>
-              <a:t>The push-response diagnostic for short horizons is near zero; some breakouts get faded.</a:t>
-            </a:r>
-          </a:p>
-        </p:txBody>
-      </p:sp>
-      <p:sp>
-        <p:nvSpPr>
-          <p:cNvPr id="7" name="TextBox 6"/>
           <p:cNvSpPr txBox="1"/>
           <p:nvPr/>
         </p:nvSpPr>
@@ -9777,14 +9610,14 @@
                 </a:solidFill>
                 <a:latin typeface="Calibri"/>
               </a:rPr>
-              <a:t>Source: Group 1 walk-forward (TF Data 5-min OHLC, $100k initial equity)</a:t>
-            </a:r>
-          </a:p>
-        </p:txBody>
-      </p:sp>
-      <p:sp>
-        <p:nvSpPr>
-          <p:cNvPr id="8" name="TextBox 7"/>
+              <a:t>Channel WithDDControl on TY (10-yr Treasury futures) over 1987-06 → 2026-03 — 155 quarterly walk-forward windows stitched, $100k initial equity. Net OOS profit $68 336 / Max DD $15 865 / Return on Account 4.31× / Sharpe 0.31 / 395 trades. Position panel shows long/short/flat state at bar resolution.</a:t>
+            </a:r>
+          </a:p>
+        </p:txBody>
+      </p:sp>
+      <p:sp>
+        <p:nvSpPr>
+          <p:cNvPr id="7" name="TextBox 6"/>
           <p:cNvSpPr txBox="1"/>
           <p:nvPr/>
         </p:nvSpPr>
@@ -9819,7 +9652,7 @@
       </p:sp>
       <p:sp>
         <p:nvSpPr>
-          <p:cNvPr id="9" name="TextBox 8"/>
+          <p:cNvPr id="8" name="TextBox 7"/>
           <p:cNvSpPr txBox="1"/>
           <p:nvPr/>
         </p:nvSpPr>
@@ -9847,7 +9680,7 @@
                 </a:solidFill>
                 <a:latin typeface="Calibri"/>
               </a:rPr>
-              <a:t>24 / 35</a:t>
+              <a:t>24 / 41</a:t>
             </a:r>
           </a:p>
         </p:txBody>
@@ -9908,7 +9741,7 @@
                 </a:solidFill>
                 <a:latin typeface="Calibri"/>
               </a:rPr>
-              <a:t>TY — walk-forward parameter stability</a:t>
+              <a:t>TY — Chekhlov drawdown family</a:t>
             </a:r>
           </a:p>
         </p:txBody>
@@ -9985,7 +9818,7 @@
       </p:sp>
       <p:pic>
         <p:nvPicPr>
-          <p:cNvPr id="5" name="Picture 4" descr="slide_07_ty_param_stability.png"/>
+          <p:cNvPr id="5" name="Picture 4" descr="slide_03_ty_drawdown_family.png"/>
           <p:cNvPicPr>
             <a:picLocks noChangeAspect="1"/>
           </p:cNvPicPr>
@@ -9999,8 +9832,8 @@
         </p:blipFill>
         <p:spPr>
           <a:xfrm>
-            <a:off x="365760" y="994315"/>
-            <a:ext cx="9174480" cy="4869370"/>
+            <a:off x="504287" y="914400"/>
+            <a:ext cx="8897425" cy="5029200"/>
           </a:xfrm>
           <a:prstGeom prst="rect">
             <a:avLst/>
@@ -10037,7 +9870,7 @@
                 </a:solidFill>
                 <a:latin typeface="Calibri"/>
               </a:rPr>
-              <a:t>Channel length L converges to a tight cluster around 1 920 bars (≈ 24 trading days). Drawdown stop S almost always at 1% of running equity. Optimiser does not flip wildly — the chosen objective (Net Profit / Max Drawdown) is well-behaved on TY.</a:t>
+              <a:t>Top: % off running peak. Bottom: $ off running peak. Max DD ≈ 11% / $15.9k. CDD(α=0.05) ≈ $13.3k indicates the worst 5% of drawdown bars are concentrated near the max. Long underwater stretches are structural for a 1.5%/yr trend-following bond strategy.</a:t>
             </a:r>
           </a:p>
         </p:txBody>
@@ -10107,7 +9940,7 @@
                 </a:solidFill>
                 <a:latin typeface="Calibri"/>
               </a:rPr>
-              <a:t>25 / 35</a:t>
+              <a:t>25 / 41</a:t>
             </a:r>
           </a:p>
         </p:txBody>
@@ -10126,7 +9959,7 @@
     <p:bg>
       <p:bgPr>
         <a:solidFill>
-          <a:srgbClr val="012169"/>
+          <a:srgbClr val="FFFFFF"/>
         </a:solidFill>
         <a:effectLst/>
       </p:bgPr>
@@ -10140,128 +9973,178 @@
       <p:grpSpPr/>
       <p:sp>
         <p:nvSpPr>
-          <p:cNvPr id="2" name="Rectangle 1"/>
-          <p:cNvSpPr/>
-          <p:nvPr/>
-        </p:nvSpPr>
-        <p:spPr>
-          <a:xfrm>
-            <a:off x="0" y="0"/>
-            <a:ext cx="9906000" cy="45720"/>
-          </a:xfrm>
-          <a:prstGeom prst="rect">
-            <a:avLst/>
-          </a:prstGeom>
-          <a:solidFill>
-            <a:srgbClr val="A28D5B"/>
-          </a:solidFill>
-          <a:ln>
-            <a:noFill/>
+          <p:cNvPr id="2" name="TextBox 1"/>
+          <p:cNvSpPr txBox="1"/>
+          <p:nvPr/>
+        </p:nvSpPr>
+        <p:spPr>
+          <a:xfrm>
+            <a:off x="365760" y="228600"/>
+            <a:ext cx="9174480" cy="502920"/>
+          </a:xfrm>
+          <a:prstGeom prst="rect">
+            <a:avLst/>
+          </a:prstGeom>
+          <a:noFill/>
+        </p:spPr>
+        <p:txBody>
+          <a:bodyPr wrap="square">
+            <a:spAutoFit/>
+          </a:bodyPr>
+          <a:lstStyle/>
+          <a:p>
+            <a:pPr algn="l"/>
+            <a:r>
+              <a:rPr sz="2400" b="1" i="0">
+                <a:solidFill>
+                  <a:srgbClr val="012169"/>
+                </a:solidFill>
+                <a:latin typeface="Calibri"/>
+              </a:rPr>
+              <a:t>TY — out-of-sample trade % return distribution</a:t>
+            </a:r>
+          </a:p>
+        </p:txBody>
+      </p:sp>
+      <p:cxnSp>
+        <p:nvCxnSpPr>
+          <p:cNvPr id="3" name="Connector 2"/>
+          <p:cNvCxnSpPr/>
+          <p:nvPr/>
+        </p:nvCxnSpPr>
+        <p:spPr>
+          <a:xfrm>
+            <a:off x="365760" y="777240"/>
+            <a:ext cx="9174480" cy="0"/>
+          </a:xfrm>
+          <a:prstGeom prst="line">
+            <a:avLst/>
+          </a:prstGeom>
+          <a:ln w="12700">
+            <a:solidFill>
+              <a:srgbClr val="012169"/>
+            </a:solidFill>
           </a:ln>
-          <a:effectLst/>
         </p:spPr>
         <p:style>
-          <a:lnRef idx="1">
+          <a:lnRef idx="2">
             <a:schemeClr val="accent1"/>
           </a:lnRef>
-          <a:fillRef idx="3">
+          <a:fillRef idx="0">
             <a:schemeClr val="accent1"/>
           </a:fillRef>
-          <a:effectRef idx="2">
+          <a:effectRef idx="1">
             <a:schemeClr val="accent1"/>
           </a:effectRef>
           <a:fontRef idx="minor">
-            <a:schemeClr val="lt1"/>
+            <a:schemeClr val="tx1"/>
           </a:fontRef>
         </p:style>
-        <p:txBody>
-          <a:bodyPr rtlCol="0" anchor="ctr"/>
-          <a:lstStyle/>
-          <a:p>
-            <a:pPr algn="ctr"/>
-          </a:p>
-        </p:txBody>
-      </p:sp>
-      <p:sp>
-        <p:nvSpPr>
-          <p:cNvPr id="3" name="TextBox 2"/>
-          <p:cNvSpPr txBox="1"/>
-          <p:nvPr/>
-        </p:nvSpPr>
-        <p:spPr>
-          <a:xfrm>
-            <a:off x="548640" y="2377440"/>
-            <a:ext cx="8808720" cy="457200"/>
-          </a:xfrm>
-          <a:prstGeom prst="rect">
-            <a:avLst/>
-          </a:prstGeom>
-          <a:noFill/>
-        </p:spPr>
-        <p:txBody>
-          <a:bodyPr wrap="square">
-            <a:spAutoFit/>
-          </a:bodyPr>
-          <a:lstStyle/>
-          <a:p>
-            <a:pPr algn="l"/>
-            <a:r>
-              <a:rPr sz="1400" b="1" i="0">
+      </p:cxnSp>
+      <p:sp>
+        <p:nvSpPr>
+          <p:cNvPr id="4" name="TextBox 3"/>
+          <p:cNvSpPr txBox="1"/>
+          <p:nvPr/>
+        </p:nvSpPr>
+        <p:spPr>
+          <a:xfrm>
+            <a:off x="7528560" y="228600"/>
+            <a:ext cx="2011680" cy="365760"/>
+          </a:xfrm>
+          <a:prstGeom prst="rect">
+            <a:avLst/>
+          </a:prstGeom>
+          <a:noFill/>
+        </p:spPr>
+        <p:txBody>
+          <a:bodyPr wrap="square">
+            <a:spAutoFit/>
+          </a:bodyPr>
+          <a:lstStyle/>
+          <a:p>
+            <a:pPr algn="r"/>
+            <a:r>
+              <a:rPr sz="1000" b="1" i="0">
                 <a:solidFill>
                   <a:srgbClr val="A28D5B"/>
                 </a:solidFill>
                 <a:latin typeface="Calibri"/>
               </a:rPr>
-              <a:t>SECONDARY MARKET — BTC</a:t>
-            </a:r>
-          </a:p>
-        </p:txBody>
-      </p:sp>
-      <p:sp>
-        <p:nvSpPr>
-          <p:cNvPr id="4" name="TextBox 3"/>
-          <p:cNvSpPr txBox="1"/>
-          <p:nvPr/>
-        </p:nvSpPr>
-        <p:spPr>
-          <a:xfrm>
-            <a:off x="548640" y="2834640"/>
-            <a:ext cx="8808720" cy="1828800"/>
-          </a:xfrm>
-          <a:prstGeom prst="rect">
-            <a:avLst/>
-          </a:prstGeom>
-          <a:noFill/>
-        </p:spPr>
-        <p:txBody>
-          <a:bodyPr wrap="square">
-            <a:spAutoFit/>
-          </a:bodyPr>
-          <a:lstStyle/>
-          <a:p>
-            <a:pPr algn="l"/>
-            <a:r>
-              <a:rPr sz="3600" b="1" i="0">
-                <a:solidFill>
-                  <a:srgbClr val="FFFFFF"/>
-                </a:solidFill>
-                <a:latin typeface="Calibri"/>
-              </a:rPr>
-              <a:t>Same framework, faster horizon</a:t>
-            </a:r>
-          </a:p>
-        </p:txBody>
-      </p:sp>
-      <p:sp>
-        <p:nvSpPr>
-          <p:cNvPr id="5" name="TextBox 4"/>
-          <p:cNvSpPr txBox="1"/>
-          <p:nvPr/>
-        </p:nvSpPr>
-        <p:spPr>
-          <a:xfrm>
-            <a:off x="548640" y="6446520"/>
-            <a:ext cx="8808720" cy="274320"/>
+              <a:t>PRIMARY MARKET — TY</a:t>
+            </a:r>
+          </a:p>
+        </p:txBody>
+      </p:sp>
+      <p:pic>
+        <p:nvPicPr>
+          <p:cNvPr id="5" name="Picture 4" descr="repl_ty_pct_returns.png"/>
+          <p:cNvPicPr>
+            <a:picLocks noChangeAspect="1"/>
+          </p:cNvPicPr>
+          <p:nvPr/>
+        </p:nvPicPr>
+        <p:blipFill>
+          <a:blip r:embed="rId2"/>
+          <a:stretch>
+            <a:fillRect/>
+          </a:stretch>
+        </p:blipFill>
+        <p:spPr>
+          <a:xfrm>
+            <a:off x="365760" y="1056203"/>
+            <a:ext cx="9174480" cy="4745594"/>
+          </a:xfrm>
+          <a:prstGeom prst="rect">
+            <a:avLst/>
+          </a:prstGeom>
+        </p:spPr>
+      </p:pic>
+      <p:sp>
+        <p:nvSpPr>
+          <p:cNvPr id="6" name="TextBox 5"/>
+          <p:cNvSpPr txBox="1"/>
+          <p:nvPr/>
+        </p:nvSpPr>
+        <p:spPr>
+          <a:xfrm>
+            <a:off x="365760" y="5989320"/>
+            <a:ext cx="9174480" cy="411480"/>
+          </a:xfrm>
+          <a:prstGeom prst="rect">
+            <a:avLst/>
+          </a:prstGeom>
+          <a:noFill/>
+        </p:spPr>
+        <p:txBody>
+          <a:bodyPr wrap="square">
+            <a:spAutoFit/>
+          </a:bodyPr>
+          <a:lstStyle/>
+          <a:p>
+            <a:pPr algn="l"/>
+            <a:r>
+              <a:rPr sz="1050" b="0" i="0">
+                <a:solidFill>
+                  <a:srgbClr val="1B365D"/>
+                </a:solidFill>
+                <a:latin typeface="Calibri"/>
+              </a:rPr>
+              <a:t>Per-trade % returns — left panel = price-move % captured per trade; right panel = equity-return % per trade (PnL / $100k). Mean equity-return per trade is −0.18% (small losing tail of −2.95%); winners reach +8.17% on the COVID flight-to-safety long.</a:t>
+            </a:r>
+          </a:p>
+        </p:txBody>
+      </p:sp>
+      <p:sp>
+        <p:nvSpPr>
+          <p:cNvPr id="7" name="TextBox 6"/>
+          <p:cNvSpPr txBox="1"/>
+          <p:nvPr/>
+        </p:nvSpPr>
+        <p:spPr>
+          <a:xfrm>
+            <a:off x="365760" y="6446520"/>
+            <a:ext cx="9174480" cy="274320"/>
           </a:xfrm>
           <a:prstGeom prst="rect">
             <a:avLst/>
@@ -10278,7 +10161,7 @@
             <a:r>
               <a:rPr sz="900" b="0" i="0">
                 <a:solidFill>
-                  <a:srgbClr val="E6E9EE"/>
+                  <a:srgbClr val="9AA1A9"/>
                 </a:solidFill>
                 <a:latin typeface="Calibri"/>
               </a:rPr>
@@ -10289,7 +10172,7 @@
       </p:sp>
       <p:sp>
         <p:nvSpPr>
-          <p:cNvPr id="6" name="TextBox 5"/>
+          <p:cNvPr id="8" name="TextBox 7"/>
           <p:cNvSpPr txBox="1"/>
           <p:nvPr/>
         </p:nvSpPr>
@@ -10313,11 +10196,11 @@
             <a:r>
               <a:rPr sz="900" b="0" i="0">
                 <a:solidFill>
-                  <a:srgbClr val="E6E9EE"/>
-                </a:solidFill>
-                <a:latin typeface="Calibri"/>
-              </a:rPr>
-              <a:t>26 / 35</a:t>
+                  <a:srgbClr val="9AA1A9"/>
+                </a:solidFill>
+                <a:latin typeface="Calibri"/>
+              </a:rPr>
+              <a:t>26 / 41</a:t>
             </a:r>
           </a:p>
         </p:txBody>
@@ -10378,7 +10261,7 @@
                 </a:solidFill>
                 <a:latin typeface="Calibri"/>
               </a:rPr>
-              <a:t>BTC — out-of-sample equity &amp; portfolio position</a:t>
+              <a:t>TY — out-of-sample dollar-PnL distribution</a:t>
             </a:r>
           </a:p>
         </p:txBody>
@@ -10448,14 +10331,14 @@
                 </a:solidFill>
                 <a:latin typeface="Calibri"/>
               </a:rPr>
-              <a:t>SECONDARY MARKET — BTC</a:t>
+              <a:t>PRIMARY MARKET — TY</a:t>
             </a:r>
           </a:p>
         </p:txBody>
       </p:sp>
       <p:pic>
         <p:nvPicPr>
-          <p:cNvPr id="5" name="Picture 4" descr="slide_02_btc_equity_position.png"/>
+          <p:cNvPr id="5" name="Picture 4" descr="slide_04_ty_trade_distribution.png"/>
           <p:cNvPicPr>
             <a:picLocks noChangeAspect="1"/>
           </p:cNvPicPr>
@@ -10469,8 +10352,8 @@
         </p:blipFill>
         <p:spPr>
           <a:xfrm>
-            <a:off x="850477" y="914400"/>
-            <a:ext cx="8205046" cy="5029200"/>
+            <a:off x="393560" y="914400"/>
+            <a:ext cx="9118879" cy="5029200"/>
           </a:xfrm>
           <a:prstGeom prst="rect">
             <a:avLst/>
@@ -10507,7 +10390,7 @@
                 </a:solidFill>
                 <a:latin typeface="Calibri"/>
               </a:rPr>
-              <a:t>Channel WithDDControl on BTC (CME Bitcoin futures) over 2023-08 → 2026-02 — 7 quarterly OOS windows. Net OOS profit $536 397 / Max DD $131 729 / Return on Account 4.07× / Sharpe 3.01 / 1 094 trades. Equity grows from $100k to $636k driven by the 2024-25 cycle.</a:t>
+              <a:t>Same trades shown in dollar terms. Win rate 33%, average winner $1 265 vs average loser −$897. The dollar view exaggerates outliers because the position size is fixed at one contract — the % view above is the cleaner cross-market comparator.</a:t>
             </a:r>
           </a:p>
         </p:txBody>
@@ -10577,7 +10460,7 @@
                 </a:solidFill>
                 <a:latin typeface="Calibri"/>
               </a:rPr>
-              <a:t>27 / 35</a:t>
+              <a:t>27 / 41</a:t>
             </a:r>
           </a:p>
         </p:txBody>
@@ -10638,7 +10521,7 @@
                 </a:solidFill>
                 <a:latin typeface="Calibri"/>
               </a:rPr>
-              <a:t>BTC — Chekhlov drawdown family</a:t>
+              <a:t>TY — most profitable OOS trade (autopsy)</a:t>
             </a:r>
           </a:p>
         </p:txBody>
@@ -10708,14 +10591,14 @@
                 </a:solidFill>
                 <a:latin typeface="Calibri"/>
               </a:rPr>
-              <a:t>SECONDARY MARKET — BTC</a:t>
+              <a:t>PRIMARY MARKET — TY</a:t>
             </a:r>
           </a:p>
         </p:txBody>
       </p:sp>
       <p:pic>
         <p:nvPicPr>
-          <p:cNvPr id="5" name="Picture 4" descr="slide_03_btc_drawdown_family.png"/>
+          <p:cNvPr id="5" name="Picture 4" descr="slide_05_ty_best_trade.png"/>
           <p:cNvPicPr>
             <a:picLocks noChangeAspect="1"/>
           </p:cNvPicPr>
@@ -10729,8 +10612,8 @@
         </p:blipFill>
         <p:spPr>
           <a:xfrm>
-            <a:off x="466264" y="914400"/>
-            <a:ext cx="8973471" cy="5029200"/>
+            <a:off x="485463" y="914400"/>
+            <a:ext cx="8935074" cy="5029200"/>
           </a:xfrm>
           <a:prstGeom prst="rect">
             <a:avLst/>
@@ -10767,7 +10650,7 @@
                 </a:solidFill>
                 <a:latin typeface="Calibri"/>
               </a:rPr>
-              <a:t>Max DD ≈ 22% / $131.7k. Recovery is fast — most underwater stretches are weeks, not months. CDD(α=0.05) ≈ $111.8k. Larger absolute dollar swings than TY, but realised vol is ~8× higher so the % drawdown footprint is comparable.</a:t>
+              <a:t>21 Jan 2020 LONG 129.56 → 137.75 over 50 days (+$8 170). Channel breakout above the 1 920-bar high right as COVID drove a flight-to-safety bond rally. Trailing-equity stop fired after the initial impulse decayed — textbook trend payoff.</a:t>
             </a:r>
           </a:p>
         </p:txBody>
@@ -10837,7 +10720,7 @@
                 </a:solidFill>
                 <a:latin typeface="Calibri"/>
               </a:rPr>
-              <a:t>28 / 35</a:t>
+              <a:t>28 / 41</a:t>
             </a:r>
           </a:p>
         </p:txBody>
@@ -10898,7 +10781,7 @@
                 </a:solidFill>
                 <a:latin typeface="Calibri"/>
               </a:rPr>
-              <a:t>BTC — out-of-sample trade PnL distribution</a:t>
+              <a:t>TY — worst OOS trade · why it got cooked</a:t>
             </a:r>
           </a:p>
         </p:txBody>
@@ -10968,14 +10851,14 @@
                 </a:solidFill>
                 <a:latin typeface="Calibri"/>
               </a:rPr>
-              <a:t>SECONDARY MARKET — BTC</a:t>
+              <a:t>PRIMARY MARKET — TY</a:t>
             </a:r>
           </a:p>
         </p:txBody>
       </p:sp>
       <p:pic>
         <p:nvPicPr>
-          <p:cNvPr id="5" name="Picture 4" descr="slide_04_btc_trade_distribution.png"/>
+          <p:cNvPr id="5" name="Picture 4" descr="slide_06_ty_worst_trade.png"/>
           <p:cNvPicPr>
             <a:picLocks noChangeAspect="1"/>
           </p:cNvPicPr>
@@ -10989,8 +10872,8 @@
         </p:blipFill>
         <p:spPr>
           <a:xfrm>
-            <a:off x="365760" y="921860"/>
-            <a:ext cx="9174480" cy="5014280"/>
+            <a:off x="365760" y="1728001"/>
+            <a:ext cx="6141720" cy="3401997"/>
           </a:xfrm>
           <a:prstGeom prst="rect">
             <a:avLst/>
@@ -11000,6 +10883,179 @@
       <p:sp>
         <p:nvSpPr>
           <p:cNvPr id="6" name="TextBox 5"/>
+          <p:cNvSpPr txBox="1"/>
+          <p:nvPr/>
+        </p:nvSpPr>
+        <p:spPr>
+          <a:xfrm>
+            <a:off x="6690360" y="1005840"/>
+            <a:ext cx="2849880" cy="4846320"/>
+          </a:xfrm>
+          <a:prstGeom prst="rect">
+            <a:avLst/>
+          </a:prstGeom>
+          <a:noFill/>
+        </p:spPr>
+        <p:txBody>
+          <a:bodyPr wrap="square">
+            <a:spAutoFit/>
+          </a:bodyPr>
+          <a:lstStyle/>
+          <a:p>
+            <a:pPr algn="l">
+              <a:lnSpc>
+                <a:spcPct val="115000"/>
+              </a:lnSpc>
+            </a:pPr>
+            <a:r>
+              <a:rPr sz="1100" b="1">
+                <a:solidFill>
+                  <a:srgbClr val="A28D5B"/>
+                </a:solidFill>
+                <a:latin typeface="Calibri"/>
+              </a:rPr>
+              <a:t>•  </a:t>
+            </a:r>
+            <a:r>
+              <a:rPr sz="1100">
+                <a:solidFill>
+                  <a:srgbClr val="1B365D"/>
+                </a:solidFill>
+                <a:latin typeface="Calibri"/>
+              </a:rPr>
+              <a:t>22 Feb 2002 LONG @ 107.38 — broke above the 3 200-bar (~40-day) high.</a:t>
+            </a:r>
+          </a:p>
+          <a:p>
+            <a:pPr algn="l">
+              <a:lnSpc>
+                <a:spcPct val="115000"/>
+              </a:lnSpc>
+            </a:pPr>
+            <a:r>
+              <a:rPr sz="1100" b="1">
+                <a:solidFill>
+                  <a:srgbClr val="A28D5B"/>
+                </a:solidFill>
+                <a:latin typeface="Calibri"/>
+              </a:rPr>
+              <a:t>•  </a:t>
+            </a:r>
+            <a:r>
+              <a:rPr sz="1100">
+                <a:solidFill>
+                  <a:srgbClr val="1B365D"/>
+                </a:solidFill>
+                <a:latin typeface="Calibri"/>
+              </a:rPr>
+              <a:t>Treasuries reversed almost immediately on hawkish-Fed signals at the late-Feb FOMC.</a:t>
+            </a:r>
+          </a:p>
+          <a:p>
+            <a:pPr algn="l">
+              <a:lnSpc>
+                <a:spcPct val="115000"/>
+              </a:lnSpc>
+            </a:pPr>
+            <a:r>
+              <a:rPr sz="1100" b="1">
+                <a:solidFill>
+                  <a:srgbClr val="A28D5B"/>
+                </a:solidFill>
+                <a:latin typeface="Calibri"/>
+              </a:rPr>
+              <a:t>•  </a:t>
+            </a:r>
+            <a:r>
+              <a:rPr sz="1100">
+                <a:solidFill>
+                  <a:srgbClr val="1B365D"/>
+                </a:solidFill>
+                <a:latin typeface="Calibri"/>
+              </a:rPr>
+              <a:t>Price slid 2.93 pts in 12 days; trailing stop fired at $-2 952.</a:t>
+            </a:r>
+          </a:p>
+          <a:p>
+            <a:pPr algn="l">
+              <a:lnSpc>
+                <a:spcPct val="115000"/>
+              </a:lnSpc>
+            </a:pPr>
+            <a:r>
+              <a:rPr sz="1100" b="1">
+                <a:solidFill>
+                  <a:srgbClr val="A28D5B"/>
+                </a:solidFill>
+                <a:latin typeface="Calibri"/>
+              </a:rPr>
+              <a:t>•  </a:t>
+            </a:r>
+            <a:r>
+              <a:rPr sz="1100">
+                <a:solidFill>
+                  <a:srgbClr val="1B365D"/>
+                </a:solidFill>
+                <a:latin typeface="Calibri"/>
+              </a:rPr>
+              <a:t>Classic 'breakout caught at the local top' before mean-reversion fired.</a:t>
+            </a:r>
+          </a:p>
+          <a:p>
+            <a:pPr algn="l">
+              <a:lnSpc>
+                <a:spcPct val="115000"/>
+              </a:lnSpc>
+            </a:pPr>
+            <a:r>
+              <a:rPr sz="1100" b="1">
+                <a:solidFill>
+                  <a:srgbClr val="A28D5B"/>
+                </a:solidFill>
+                <a:latin typeface="Calibri"/>
+              </a:rPr>
+              <a:t>•  </a:t>
+            </a:r>
+            <a:r>
+              <a:rPr sz="1100">
+                <a:solidFill>
+                  <a:srgbClr val="1B365D"/>
+                </a:solidFill>
+                <a:latin typeface="Calibri"/>
+              </a:rPr>
+              <a:t>Wide L = 3 200 channel made the per-bar stop physically distant — loss compounded before exit.</a:t>
+            </a:r>
+          </a:p>
+          <a:p>
+            <a:pPr algn="l">
+              <a:lnSpc>
+                <a:spcPct val="115000"/>
+              </a:lnSpc>
+            </a:pPr>
+            <a:r>
+              <a:rPr sz="1100" b="1">
+                <a:solidFill>
+                  <a:srgbClr val="A28D5B"/>
+                </a:solidFill>
+                <a:latin typeface="Calibri"/>
+              </a:rPr>
+              <a:t>•  </a:t>
+            </a:r>
+            <a:r>
+              <a:rPr sz="1100">
+                <a:solidFill>
+                  <a:srgbClr val="1B365D"/>
+                </a:solidFill>
+                <a:latin typeface="Calibri"/>
+              </a:rPr>
+              <a:t>The push-response diagnostic for short horizons is near zero; some breakouts get faded.</a:t>
+            </a:r>
+          </a:p>
+        </p:txBody>
+      </p:sp>
+      <p:sp>
+        <p:nvSpPr>
+          <p:cNvPr id="7" name="TextBox 6"/>
           <p:cNvSpPr txBox="1"/>
           <p:nvPr/>
         </p:nvSpPr>
@@ -11027,14 +11083,14 @@
                 </a:solidFill>
                 <a:latin typeface="Calibri"/>
               </a:rPr>
-              <a:t>Win rate 42% with average winner $4 327 vs average loser −$2 285 — same right-skew as TY but with a higher hit rate. Profit factor 1.37. The intraday push-response is positive at the right horizons, supporting the higher hit rate.</a:t>
-            </a:r>
-          </a:p>
-        </p:txBody>
-      </p:sp>
-      <p:sp>
-        <p:nvSpPr>
-          <p:cNvPr id="7" name="TextBox 6"/>
+              <a:t>Source: Group 1 walk-forward (TF Data 5-min OHLC, $100k initial equity)</a:t>
+            </a:r>
+          </a:p>
+        </p:txBody>
+      </p:sp>
+      <p:sp>
+        <p:nvSpPr>
+          <p:cNvPr id="8" name="TextBox 7"/>
           <p:cNvSpPr txBox="1"/>
           <p:nvPr/>
         </p:nvSpPr>
@@ -11069,7 +11125,7 @@
       </p:sp>
       <p:sp>
         <p:nvSpPr>
-          <p:cNvPr id="8" name="TextBox 7"/>
+          <p:cNvPr id="9" name="TextBox 8"/>
           <p:cNvSpPr txBox="1"/>
           <p:nvPr/>
         </p:nvSpPr>
@@ -11097,7 +11153,7 @@
                 </a:solidFill>
                 <a:latin typeface="Calibri"/>
               </a:rPr>
-              <a:t>29 / 35</a:t>
+              <a:t>29 / 41</a:t>
             </a:r>
           </a:p>
         </p:txBody>
@@ -12456,7 +12512,7 @@
                 </a:solidFill>
                 <a:latin typeface="Calibri"/>
               </a:rPr>
-              <a:t>3 / 35</a:t>
+              <a:t>3 / 41</a:t>
             </a:r>
           </a:p>
         </p:txBody>
@@ -12517,7 +12573,7 @@
                 </a:solidFill>
                 <a:latin typeface="Calibri"/>
               </a:rPr>
-              <a:t>BTC — most profitable OOS trade (autopsy)</a:t>
+              <a:t>TY — walk-forward parameter stability</a:t>
             </a:r>
           </a:p>
         </p:txBody>
@@ -12587,14 +12643,14 @@
                 </a:solidFill>
                 <a:latin typeface="Calibri"/>
               </a:rPr>
-              <a:t>SECONDARY MARKET — BTC</a:t>
+              <a:t>PRIMARY MARKET — TY</a:t>
             </a:r>
           </a:p>
         </p:txBody>
       </p:sp>
       <p:pic>
         <p:nvPicPr>
-          <p:cNvPr id="5" name="Picture 4" descr="slide_05_btc_best_trade.png"/>
+          <p:cNvPr id="5" name="Picture 4" descr="slide_07_ty_param_stability.png"/>
           <p:cNvPicPr>
             <a:picLocks noChangeAspect="1"/>
           </p:cNvPicPr>
@@ -12608,8 +12664,8 @@
         </p:blipFill>
         <p:spPr>
           <a:xfrm>
-            <a:off x="365760" y="926403"/>
-            <a:ext cx="9174480" cy="5005194"/>
+            <a:off x="365760" y="994315"/>
+            <a:ext cx="9174480" cy="4869370"/>
           </a:xfrm>
           <a:prstGeom prst="rect">
             <a:avLst/>
@@ -12646,7 +12702,7 @@
                 </a:solidFill>
                 <a:latin typeface="Calibri"/>
               </a:rPr>
-              <a:t>02 Mar 2025 LONG 85 720 → 94 748 in 25 minutes (+$45 115). Channel break above the 276-bar (1-day) high; weekend gap aligned with the breakout direction. $9 028 price move × $5 BTC point value − $25 round-turn slippage = +$45 115 in 5 bars.</a:t>
+              <a:t>Channel length L converges to a tight cluster around 1 920 bars (≈ 24 trading days). Drawdown stop S almost always at 1% of running equity. Optimiser does not flip wildly — the chosen objective (Net Profit / Max Drawdown) is well-behaved on TY.</a:t>
             </a:r>
           </a:p>
         </p:txBody>
@@ -12716,7 +12772,7 @@
                 </a:solidFill>
                 <a:latin typeface="Calibri"/>
               </a:rPr>
-              <a:t>30 / 35</a:t>
+              <a:t>30 / 41</a:t>
             </a:r>
           </a:p>
         </p:txBody>
@@ -12735,7 +12791,7 @@
     <p:bg>
       <p:bgPr>
         <a:solidFill>
-          <a:srgbClr val="FFFFFF"/>
+          <a:srgbClr val="012169"/>
         </a:solidFill>
         <a:effectLst/>
       </p:bgPr>
@@ -12749,74 +12805,83 @@
       <p:grpSpPr/>
       <p:sp>
         <p:nvSpPr>
-          <p:cNvPr id="2" name="TextBox 1"/>
-          <p:cNvSpPr txBox="1"/>
-          <p:nvPr/>
-        </p:nvSpPr>
-        <p:spPr>
-          <a:xfrm>
-            <a:off x="365760" y="228600"/>
-            <a:ext cx="9174480" cy="502920"/>
-          </a:xfrm>
-          <a:prstGeom prst="rect">
-            <a:avLst/>
-          </a:prstGeom>
-          <a:noFill/>
-        </p:spPr>
-        <p:txBody>
-          <a:bodyPr wrap="square">
-            <a:spAutoFit/>
-          </a:bodyPr>
-          <a:lstStyle/>
-          <a:p>
-            <a:pPr algn="l"/>
-            <a:r>
-              <a:rPr sz="2400" b="1" i="0">
-                <a:solidFill>
-                  <a:srgbClr val="012169"/>
-                </a:solidFill>
-                <a:latin typeface="Calibri"/>
-              </a:rPr>
-              <a:t>BTC — worst OOS trade · why it got cooked</a:t>
-            </a:r>
-          </a:p>
-        </p:txBody>
-      </p:sp>
-      <p:cxnSp>
-        <p:nvCxnSpPr>
-          <p:cNvPr id="3" name="Connector 2"/>
-          <p:cNvCxnSpPr/>
-          <p:nvPr/>
-        </p:nvCxnSpPr>
-        <p:spPr>
-          <a:xfrm>
-            <a:off x="365760" y="777240"/>
-            <a:ext cx="9174480" cy="0"/>
-          </a:xfrm>
-          <a:prstGeom prst="line">
-            <a:avLst/>
-          </a:prstGeom>
-          <a:ln w="12700">
-            <a:solidFill>
-              <a:srgbClr val="012169"/>
-            </a:solidFill>
+          <p:cNvPr id="2" name="Rectangle 1"/>
+          <p:cNvSpPr/>
+          <p:nvPr/>
+        </p:nvSpPr>
+        <p:spPr>
+          <a:xfrm>
+            <a:off x="0" y="0"/>
+            <a:ext cx="9906000" cy="45720"/>
+          </a:xfrm>
+          <a:prstGeom prst="rect">
+            <a:avLst/>
+          </a:prstGeom>
+          <a:solidFill>
+            <a:srgbClr val="A28D5B"/>
+          </a:solidFill>
+          <a:ln>
+            <a:noFill/>
           </a:ln>
+          <a:effectLst/>
         </p:spPr>
         <p:style>
-          <a:lnRef idx="2">
+          <a:lnRef idx="1">
             <a:schemeClr val="accent1"/>
           </a:lnRef>
-          <a:fillRef idx="0">
+          <a:fillRef idx="3">
             <a:schemeClr val="accent1"/>
           </a:fillRef>
-          <a:effectRef idx="1">
+          <a:effectRef idx="2">
             <a:schemeClr val="accent1"/>
           </a:effectRef>
           <a:fontRef idx="minor">
-            <a:schemeClr val="tx1"/>
+            <a:schemeClr val="lt1"/>
           </a:fontRef>
         </p:style>
-      </p:cxnSp>
+        <p:txBody>
+          <a:bodyPr rtlCol="0" anchor="ctr"/>
+          <a:lstStyle/>
+          <a:p>
+            <a:pPr algn="ctr"/>
+          </a:p>
+        </p:txBody>
+      </p:sp>
+      <p:sp>
+        <p:nvSpPr>
+          <p:cNvPr id="3" name="TextBox 2"/>
+          <p:cNvSpPr txBox="1"/>
+          <p:nvPr/>
+        </p:nvSpPr>
+        <p:spPr>
+          <a:xfrm>
+            <a:off x="548640" y="2377440"/>
+            <a:ext cx="8808720" cy="457200"/>
+          </a:xfrm>
+          <a:prstGeom prst="rect">
+            <a:avLst/>
+          </a:prstGeom>
+          <a:noFill/>
+        </p:spPr>
+        <p:txBody>
+          <a:bodyPr wrap="square">
+            <a:spAutoFit/>
+          </a:bodyPr>
+          <a:lstStyle/>
+          <a:p>
+            <a:pPr algn="l"/>
+            <a:r>
+              <a:rPr sz="1400" b="1" i="0">
+                <a:solidFill>
+                  <a:srgbClr val="A28D5B"/>
+                </a:solidFill>
+                <a:latin typeface="Calibri"/>
+              </a:rPr>
+              <a:t>SECONDARY MARKET — BTC</a:t>
+            </a:r>
+          </a:p>
+        </p:txBody>
+      </p:sp>
       <p:sp>
         <p:nvSpPr>
           <p:cNvPr id="4" name="TextBox 3"/>
@@ -12825,303 +12890,71 @@
         </p:nvSpPr>
         <p:spPr>
           <a:xfrm>
-            <a:off x="7528560" y="228600"/>
-            <a:ext cx="2011680" cy="365760"/>
-          </a:xfrm>
-          <a:prstGeom prst="rect">
-            <a:avLst/>
-          </a:prstGeom>
-          <a:noFill/>
-        </p:spPr>
-        <p:txBody>
-          <a:bodyPr wrap="square">
-            <a:spAutoFit/>
-          </a:bodyPr>
-          <a:lstStyle/>
-          <a:p>
-            <a:pPr algn="r"/>
-            <a:r>
-              <a:rPr sz="1000" b="1" i="0">
-                <a:solidFill>
-                  <a:srgbClr val="A28D5B"/>
-                </a:solidFill>
-                <a:latin typeface="Calibri"/>
-              </a:rPr>
-              <a:t>SECONDARY MARKET — BTC</a:t>
-            </a:r>
-          </a:p>
-        </p:txBody>
-      </p:sp>
-      <p:pic>
-        <p:nvPicPr>
-          <p:cNvPr id="5" name="Picture 4" descr="slide_06_btc_worst_trade.png"/>
-          <p:cNvPicPr>
-            <a:picLocks noChangeAspect="1"/>
-          </p:cNvPicPr>
-          <p:nvPr/>
-        </p:nvPicPr>
-        <p:blipFill>
-          <a:blip r:embed="rId2"/>
-          <a:stretch>
-            <a:fillRect/>
-          </a:stretch>
-        </p:blipFill>
-        <p:spPr>
-          <a:xfrm>
-            <a:off x="365760" y="1742360"/>
-            <a:ext cx="6141720" cy="3373280"/>
-          </a:xfrm>
-          <a:prstGeom prst="rect">
-            <a:avLst/>
-          </a:prstGeom>
-        </p:spPr>
-      </p:pic>
+            <a:off x="548640" y="2834640"/>
+            <a:ext cx="8808720" cy="1828800"/>
+          </a:xfrm>
+          <a:prstGeom prst="rect">
+            <a:avLst/>
+          </a:prstGeom>
+          <a:noFill/>
+        </p:spPr>
+        <p:txBody>
+          <a:bodyPr wrap="square">
+            <a:spAutoFit/>
+          </a:bodyPr>
+          <a:lstStyle/>
+          <a:p>
+            <a:pPr algn="l"/>
+            <a:r>
+              <a:rPr sz="3600" b="1" i="0">
+                <a:solidFill>
+                  <a:srgbClr val="FFFFFF"/>
+                </a:solidFill>
+                <a:latin typeface="Calibri"/>
+              </a:rPr>
+              <a:t>Same framework, faster horizon</a:t>
+            </a:r>
+          </a:p>
+        </p:txBody>
+      </p:sp>
+      <p:sp>
+        <p:nvSpPr>
+          <p:cNvPr id="5" name="TextBox 4"/>
+          <p:cNvSpPr txBox="1"/>
+          <p:nvPr/>
+        </p:nvSpPr>
+        <p:spPr>
+          <a:xfrm>
+            <a:off x="548640" y="6446520"/>
+            <a:ext cx="8808720" cy="274320"/>
+          </a:xfrm>
+          <a:prstGeom prst="rect">
+            <a:avLst/>
+          </a:prstGeom>
+          <a:noFill/>
+        </p:spPr>
+        <p:txBody>
+          <a:bodyPr wrap="square">
+            <a:spAutoFit/>
+          </a:bodyPr>
+          <a:lstStyle/>
+          <a:p>
+            <a:pPr algn="l"/>
+            <a:r>
+              <a:rPr sz="900" b="0" i="0">
+                <a:solidFill>
+                  <a:srgbClr val="E6E9EE"/>
+                </a:solidFill>
+                <a:latin typeface="Calibri"/>
+              </a:rPr>
+              <a:t>MATH GR5360 Final Project · Group 1 · Columbia MAFN — Spring 2026</a:t>
+            </a:r>
+          </a:p>
+        </p:txBody>
+      </p:sp>
       <p:sp>
         <p:nvSpPr>
           <p:cNvPr id="6" name="TextBox 5"/>
-          <p:cNvSpPr txBox="1"/>
-          <p:nvPr/>
-        </p:nvSpPr>
-        <p:spPr>
-          <a:xfrm>
-            <a:off x="6690360" y="1005840"/>
-            <a:ext cx="2849880" cy="4846320"/>
-          </a:xfrm>
-          <a:prstGeom prst="rect">
-            <a:avLst/>
-          </a:prstGeom>
-          <a:noFill/>
-        </p:spPr>
-        <p:txBody>
-          <a:bodyPr wrap="square">
-            <a:spAutoFit/>
-          </a:bodyPr>
-          <a:lstStyle/>
-          <a:p>
-            <a:pPr algn="l">
-              <a:lnSpc>
-                <a:spcPct val="115000"/>
-              </a:lnSpc>
-            </a:pPr>
-            <a:r>
-              <a:rPr sz="1100" b="1">
-                <a:solidFill>
-                  <a:srgbClr val="A28D5B"/>
-                </a:solidFill>
-                <a:latin typeface="Calibri"/>
-              </a:rPr>
-              <a:t>•  </a:t>
-            </a:r>
-            <a:r>
-              <a:rPr sz="1100">
-                <a:solidFill>
-                  <a:srgbClr val="1B365D"/>
-                </a:solidFill>
-                <a:latin typeface="Calibri"/>
-              </a:rPr>
-              <a:t>22 Aug 2025 SHORT @ 112 075 — broke below the 276-bar (1-day) low.</a:t>
-            </a:r>
-          </a:p>
-          <a:p>
-            <a:pPr algn="l">
-              <a:lnSpc>
-                <a:spcPct val="115000"/>
-              </a:lnSpc>
-            </a:pPr>
-            <a:r>
-              <a:rPr sz="1100" b="1">
-                <a:solidFill>
-                  <a:srgbClr val="A28D5B"/>
-                </a:solidFill>
-                <a:latin typeface="Calibri"/>
-              </a:rPr>
-              <a:t>•  </a:t>
-            </a:r>
-            <a:r>
-              <a:rPr sz="1100">
-                <a:solidFill>
-                  <a:srgbClr val="1B365D"/>
-                </a:solidFill>
-                <a:latin typeface="Calibri"/>
-              </a:rPr>
-              <a:t>Within 90 minutes BTC pumped $2 115 (+1.9%) against the position.</a:t>
-            </a:r>
-          </a:p>
-          <a:p>
-            <a:pPr algn="l">
-              <a:lnSpc>
-                <a:spcPct val="115000"/>
-              </a:lnSpc>
-            </a:pPr>
-            <a:r>
-              <a:rPr sz="1100" b="1">
-                <a:solidFill>
-                  <a:srgbClr val="A28D5B"/>
-                </a:solidFill>
-                <a:latin typeface="Calibri"/>
-              </a:rPr>
-              <a:t>•  </a:t>
-            </a:r>
-            <a:r>
-              <a:rPr sz="1100">
-                <a:solidFill>
-                  <a:srgbClr val="1B365D"/>
-                </a:solidFill>
-                <a:latin typeface="Calibri"/>
-              </a:rPr>
-              <a:t>Tight 1% drawdown stop fired at the second bar after the move ($114 190).</a:t>
-            </a:r>
-          </a:p>
-          <a:p>
-            <a:pPr algn="l">
-              <a:lnSpc>
-                <a:spcPct val="115000"/>
-              </a:lnSpc>
-            </a:pPr>
-            <a:r>
-              <a:rPr sz="1100" b="1">
-                <a:solidFill>
-                  <a:srgbClr val="A28D5B"/>
-                </a:solidFill>
-                <a:latin typeface="Calibri"/>
-              </a:rPr>
-              <a:t>•  </a:t>
-            </a:r>
-            <a:r>
-              <a:rPr sz="1100">
-                <a:solidFill>
-                  <a:srgbClr val="1B365D"/>
-                </a:solidFill>
-                <a:latin typeface="Calibri"/>
-              </a:rPr>
-              <a:t>Channel breakout in BTC's mean-reverting 1-day regime — recurring failure mode.</a:t>
-            </a:r>
-          </a:p>
-          <a:p>
-            <a:pPr algn="l">
-              <a:lnSpc>
-                <a:spcPct val="115000"/>
-              </a:lnSpc>
-            </a:pPr>
-            <a:r>
-              <a:rPr sz="1100" b="1">
-                <a:solidFill>
-                  <a:srgbClr val="A28D5B"/>
-                </a:solidFill>
-                <a:latin typeface="Calibri"/>
-              </a:rPr>
-              <a:t>•  </a:t>
-            </a:r>
-            <a:r>
-              <a:rPr sz="1100">
-                <a:solidFill>
-                  <a:srgbClr val="1B365D"/>
-                </a:solidFill>
-                <a:latin typeface="Calibri"/>
-              </a:rPr>
-              <a:t>The push-response diagram already flagged BTC as mean-reverting at the 1-day horizon (Spearman ρ = −0.38).</a:t>
-            </a:r>
-          </a:p>
-          <a:p>
-            <a:pPr algn="l">
-              <a:lnSpc>
-                <a:spcPct val="115000"/>
-              </a:lnSpc>
-            </a:pPr>
-            <a:r>
-              <a:rPr sz="1100" b="1">
-                <a:solidFill>
-                  <a:srgbClr val="A28D5B"/>
-                </a:solidFill>
-                <a:latin typeface="Calibri"/>
-              </a:rPr>
-              <a:t>•  </a:t>
-            </a:r>
-            <a:r>
-              <a:rPr sz="1100">
-                <a:solidFill>
-                  <a:srgbClr val="1B365D"/>
-                </a:solidFill>
-                <a:latin typeface="Calibri"/>
-              </a:rPr>
-              <a:t>The −$10 600 loss is ≈ 8% of the OOS Max DD — paid once to stay in the longer-horizon trend regime.</a:t>
-            </a:r>
-          </a:p>
-        </p:txBody>
-      </p:sp>
-      <p:sp>
-        <p:nvSpPr>
-          <p:cNvPr id="7" name="TextBox 6"/>
-          <p:cNvSpPr txBox="1"/>
-          <p:nvPr/>
-        </p:nvSpPr>
-        <p:spPr>
-          <a:xfrm>
-            <a:off x="365760" y="5989320"/>
-            <a:ext cx="9174480" cy="411480"/>
-          </a:xfrm>
-          <a:prstGeom prst="rect">
-            <a:avLst/>
-          </a:prstGeom>
-          <a:noFill/>
-        </p:spPr>
-        <p:txBody>
-          <a:bodyPr wrap="square">
-            <a:spAutoFit/>
-          </a:bodyPr>
-          <a:lstStyle/>
-          <a:p>
-            <a:pPr algn="l"/>
-            <a:r>
-              <a:rPr sz="1050" b="0" i="0">
-                <a:solidFill>
-                  <a:srgbClr val="1B365D"/>
-                </a:solidFill>
-                <a:latin typeface="Calibri"/>
-              </a:rPr>
-              <a:t>Source: Group 1 walk-forward (TF Data 5-min OHLC, $100k initial equity)</a:t>
-            </a:r>
-          </a:p>
-        </p:txBody>
-      </p:sp>
-      <p:sp>
-        <p:nvSpPr>
-          <p:cNvPr id="8" name="TextBox 7"/>
-          <p:cNvSpPr txBox="1"/>
-          <p:nvPr/>
-        </p:nvSpPr>
-        <p:spPr>
-          <a:xfrm>
-            <a:off x="365760" y="6446520"/>
-            <a:ext cx="9174480" cy="274320"/>
-          </a:xfrm>
-          <a:prstGeom prst="rect">
-            <a:avLst/>
-          </a:prstGeom>
-          <a:noFill/>
-        </p:spPr>
-        <p:txBody>
-          <a:bodyPr wrap="square">
-            <a:spAutoFit/>
-          </a:bodyPr>
-          <a:lstStyle/>
-          <a:p>
-            <a:pPr algn="l"/>
-            <a:r>
-              <a:rPr sz="900" b="0" i="0">
-                <a:solidFill>
-                  <a:srgbClr val="9AA1A9"/>
-                </a:solidFill>
-                <a:latin typeface="Calibri"/>
-              </a:rPr>
-              <a:t>MATH GR5360 Final Project · Group 1 · Columbia MAFN — Spring 2026</a:t>
-            </a:r>
-          </a:p>
-        </p:txBody>
-      </p:sp>
-      <p:sp>
-        <p:nvSpPr>
-          <p:cNvPr id="9" name="TextBox 8"/>
           <p:cNvSpPr txBox="1"/>
           <p:nvPr/>
         </p:nvSpPr>
@@ -13145,11 +12978,11 @@
             <a:r>
               <a:rPr sz="900" b="0" i="0">
                 <a:solidFill>
-                  <a:srgbClr val="9AA1A9"/>
-                </a:solidFill>
-                <a:latin typeface="Calibri"/>
-              </a:rPr>
-              <a:t>31 / 35</a:t>
+                  <a:srgbClr val="E6E9EE"/>
+                </a:solidFill>
+                <a:latin typeface="Calibri"/>
+              </a:rPr>
+              <a:t>31 / 41</a:t>
             </a:r>
           </a:p>
         </p:txBody>
@@ -13210,7 +13043,7 @@
                 </a:solidFill>
                 <a:latin typeface="Calibri"/>
               </a:rPr>
-              <a:t>BTC — walk-forward parameter stability</a:t>
+              <a:t>BTC — out-of-sample equity &amp; portfolio position</a:t>
             </a:r>
           </a:p>
         </p:txBody>
@@ -13287,7 +13120,7 @@
       </p:sp>
       <p:pic>
         <p:nvPicPr>
-          <p:cNvPr id="5" name="Picture 4" descr="slide_07_btc_param_stability.png"/>
+          <p:cNvPr id="5" name="Picture 4" descr="slide_02_btc_equity_position.png"/>
           <p:cNvPicPr>
             <a:picLocks noChangeAspect="1"/>
           </p:cNvPicPr>
@@ -13301,8 +13134,8 @@
         </p:blipFill>
         <p:spPr>
           <a:xfrm>
-            <a:off x="365760" y="1013572"/>
-            <a:ext cx="9174480" cy="4830856"/>
+            <a:off x="850477" y="914400"/>
+            <a:ext cx="8205046" cy="5029200"/>
           </a:xfrm>
           <a:prstGeom prst="rect">
             <a:avLst/>
@@ -13339,7 +13172,7 @@
                 </a:solidFill>
                 <a:latin typeface="Calibri"/>
               </a:rPr>
-              <a:t>BTC has only 7 quarterly OOS windows (the sample's IS warmup eats ~4 years from inception). Optimiser cycles between L = 276 (1 day) in choppy regimes and L = 1 104 (4 days) in the late-2025 trend phase. S* fixed at 1%. Instability is structural — BTC's regime is shifting.</a:t>
+              <a:t>Channel WithDDControl on BTC (CME Bitcoin futures) over 2023-08 → 2026-02 — 7 quarterly OOS windows. Net OOS profit $536 397 / Max DD $131 729 / Return on Account 4.07× / Sharpe 3.01 / 1 094 trades. Equity grows from $100k to $636k driven by the 2024-25 cycle.</a:t>
             </a:r>
           </a:p>
         </p:txBody>
@@ -13409,7 +13242,7 @@
                 </a:solidFill>
                 <a:latin typeface="Calibri"/>
               </a:rPr>
-              <a:t>32 / 35</a:t>
+              <a:t>32 / 41</a:t>
             </a:r>
           </a:p>
         </p:txBody>
@@ -13470,7 +13303,7 @@
                 </a:solidFill>
                 <a:latin typeface="Calibri"/>
               </a:rPr>
-              <a:t>In-sample vs out-of-sample decay</a:t>
+              <a:t>BTC — Chekhlov drawdown family</a:t>
             </a:r>
           </a:p>
         </p:txBody>
@@ -13540,14 +13373,14 @@
                 </a:solidFill>
                 <a:latin typeface="Calibri"/>
               </a:rPr>
-              <a:t>ROBUSTNESS</a:t>
+              <a:t>SECONDARY MARKET — BTC</a:t>
             </a:r>
           </a:p>
         </p:txBody>
       </p:sp>
       <p:pic>
         <p:nvPicPr>
-          <p:cNvPr id="5" name="Picture 4" descr="fig_is_oos_metrics.png"/>
+          <p:cNvPr id="5" name="Picture 4" descr="slide_03_btc_drawdown_family.png"/>
           <p:cNvPicPr>
             <a:picLocks noChangeAspect="1"/>
           </p:cNvPicPr>
@@ -13561,8 +13394,8 @@
         </p:blipFill>
         <p:spPr>
           <a:xfrm>
-            <a:off x="365760" y="1115154"/>
-            <a:ext cx="9174480" cy="4627691"/>
+            <a:off x="466264" y="914400"/>
+            <a:ext cx="8973471" cy="5029200"/>
           </a:xfrm>
           <a:prstGeom prst="rect">
             <a:avLst/>
@@ -13599,7 +13432,7 @@
                 </a:solidFill>
                 <a:latin typeface="Calibri"/>
               </a:rPr>
-              <a:t>Sharpe decay: TY 0.41 → 0.31 (-24%); BTC 4.52 → 3.01 (-33%). Profit-per-quarter decay: TY 26%, BTC 130% (BTC's IS objective favoured smaller L which truncated the most explosive late-2024 trends — sample-specific, not a forward claim). Quarterly OOS hit rate: TY 54.8% (85/155), BTC 100% (7/7).</a:t>
+              <a:t>Max DD ≈ 22% / $131.7k. Recovery is fast — most underwater stretches are weeks, not months. CDD(α=0.05) ≈ $111.8k. Larger absolute dollar swings than TY, but realised vol is ~8× higher so the % drawdown footprint is comparable.</a:t>
             </a:r>
           </a:p>
         </p:txBody>
@@ -13669,7 +13502,7 @@
                 </a:solidFill>
                 <a:latin typeface="Calibri"/>
               </a:rPr>
-              <a:t>33 / 35</a:t>
+              <a:t>33 / 41</a:t>
             </a:r>
           </a:p>
         </p:txBody>
@@ -13730,7 +13563,7 @@
                 </a:solidFill>
                 <a:latin typeface="Calibri"/>
               </a:rPr>
-              <a:t>Conclusion</a:t>
+              <a:t>BTC — out-of-sample trade % return distribution</a:t>
             </a:r>
           </a:p>
         </p:txBody>
@@ -13800,46 +13633,35 @@
                 </a:solidFill>
                 <a:latin typeface="Calibri"/>
               </a:rPr>
-              <a:t>SUMMARY</a:t>
-            </a:r>
-          </a:p>
-        </p:txBody>
-      </p:sp>
-      <p:sp>
-        <p:nvSpPr>
-          <p:cNvPr id="5" name="TextBox 4"/>
-          <p:cNvSpPr txBox="1"/>
-          <p:nvPr/>
-        </p:nvSpPr>
-        <p:spPr>
-          <a:xfrm>
-            <a:off x="548640" y="1005840"/>
-            <a:ext cx="8808720" cy="640080"/>
-          </a:xfrm>
-          <a:prstGeom prst="rect">
-            <a:avLst/>
-          </a:prstGeom>
-          <a:noFill/>
-        </p:spPr>
-        <p:txBody>
-          <a:bodyPr wrap="square">
-            <a:spAutoFit/>
-          </a:bodyPr>
-          <a:lstStyle/>
-          <a:p>
-            <a:pPr algn="l"/>
-            <a:r>
-              <a:rPr sz="1800" b="1" i="1">
-                <a:solidFill>
-                  <a:srgbClr val="012169"/>
-                </a:solidFill>
-                <a:latin typeface="Calibri"/>
-              </a:rPr>
-              <a:t>"Trend-following is real in both markets — but the usable horizon is market-specific."</a:t>
-            </a:r>
-          </a:p>
-        </p:txBody>
-      </p:sp>
+              <a:t>SECONDARY MARKET — BTC</a:t>
+            </a:r>
+          </a:p>
+        </p:txBody>
+      </p:sp>
+      <p:pic>
+        <p:nvPicPr>
+          <p:cNvPr id="5" name="Picture 4" descr="repl_btc_pct_returns.png"/>
+          <p:cNvPicPr>
+            <a:picLocks noChangeAspect="1"/>
+          </p:cNvPicPr>
+          <p:nvPr/>
+        </p:nvPicPr>
+        <p:blipFill>
+          <a:blip r:embed="rId2"/>
+          <a:stretch>
+            <a:fillRect/>
+          </a:stretch>
+        </p:blipFill>
+        <p:spPr>
+          <a:xfrm>
+            <a:off x="365760" y="1056203"/>
+            <a:ext cx="9174480" cy="4745594"/>
+          </a:xfrm>
+          <a:prstGeom prst="rect">
+            <a:avLst/>
+          </a:prstGeom>
+        </p:spPr>
+      </p:pic>
       <p:sp>
         <p:nvSpPr>
           <p:cNvPr id="6" name="TextBox 5"/>
@@ -13848,29 +13670,29 @@
         </p:nvSpPr>
         <p:spPr>
           <a:xfrm>
-            <a:off x="548640" y="1828800"/>
-            <a:ext cx="640080" cy="914400"/>
-          </a:xfrm>
-          <a:prstGeom prst="rect">
-            <a:avLst/>
-          </a:prstGeom>
-          <a:noFill/>
-        </p:spPr>
-        <p:txBody>
-          <a:bodyPr wrap="square">
-            <a:spAutoFit/>
-          </a:bodyPr>
-          <a:lstStyle/>
-          <a:p>
-            <a:pPr algn="l"/>
-            <a:r>
-              <a:rPr sz="2800" b="1" i="0">
-                <a:solidFill>
-                  <a:srgbClr val="A28D5B"/>
-                </a:solidFill>
-                <a:latin typeface="Calibri"/>
-              </a:rPr>
-              <a:t>01</a:t>
+            <a:off x="365760" y="5989320"/>
+            <a:ext cx="9174480" cy="411480"/>
+          </a:xfrm>
+          <a:prstGeom prst="rect">
+            <a:avLst/>
+          </a:prstGeom>
+          <a:noFill/>
+        </p:spPr>
+        <p:txBody>
+          <a:bodyPr wrap="square">
+            <a:spAutoFit/>
+          </a:bodyPr>
+          <a:lstStyle/>
+          <a:p>
+            <a:pPr algn="l"/>
+            <a:r>
+              <a:rPr sz="1050" b="0" i="0">
+                <a:solidFill>
+                  <a:srgbClr val="1B365D"/>
+                </a:solidFill>
+                <a:latin typeface="Calibri"/>
+              </a:rPr>
+              <a:t>Per-trade % returns — left panel = price-move % captured; right panel = equity-return %. BTC's right tail is dramatic: best equity-return trade is +45% (the 25-minute weekend-gap long); worst is −10.6% (the channel-break short that BTC pumped through). Mean is +0.49%.</a:t>
             </a:r>
           </a:p>
         </p:txBody>
@@ -13878,391 +13700,6 @@
       <p:sp>
         <p:nvSpPr>
           <p:cNvPr id="7" name="TextBox 6"/>
-          <p:cNvSpPr txBox="1"/>
-          <p:nvPr/>
-        </p:nvSpPr>
-        <p:spPr>
-          <a:xfrm>
-            <a:off x="1280160" y="1828800"/>
-            <a:ext cx="1920240" cy="365760"/>
-          </a:xfrm>
-          <a:prstGeom prst="rect">
-            <a:avLst/>
-          </a:prstGeom>
-          <a:noFill/>
-        </p:spPr>
-        <p:txBody>
-          <a:bodyPr wrap="square">
-            <a:spAutoFit/>
-          </a:bodyPr>
-          <a:lstStyle/>
-          <a:p>
-            <a:pPr algn="l"/>
-            <a:r>
-              <a:rPr sz="1300" b="1" i="0">
-                <a:solidFill>
-                  <a:srgbClr val="012169"/>
-                </a:solidFill>
-                <a:latin typeface="Calibri"/>
-              </a:rPr>
-              <a:t>Diagnostics</a:t>
-            </a:r>
-          </a:p>
-        </p:txBody>
-      </p:sp>
-      <p:sp>
-        <p:nvSpPr>
-          <p:cNvPr id="8" name="TextBox 7"/>
-          <p:cNvSpPr txBox="1"/>
-          <p:nvPr/>
-        </p:nvSpPr>
-        <p:spPr>
-          <a:xfrm>
-            <a:off x="3291840" y="1828800"/>
-            <a:ext cx="6248400" cy="914400"/>
-          </a:xfrm>
-          <a:prstGeom prst="rect">
-            <a:avLst/>
-          </a:prstGeom>
-          <a:noFill/>
-        </p:spPr>
-        <p:txBody>
-          <a:bodyPr wrap="square">
-            <a:spAutoFit/>
-          </a:bodyPr>
-          <a:lstStyle/>
-          <a:p>
-            <a:pPr algn="l"/>
-            <a:r>
-              <a:rPr sz="1050" b="0" i="0">
-                <a:solidFill>
-                  <a:srgbClr val="1B365D"/>
-                </a:solidFill>
-                <a:latin typeface="Calibri"/>
-              </a:rPr>
-              <a:t>Variance-ratio test and push-response confirm trend-following at the multi-week horizon for TY (Spearman ρ ≈ 0.59 at 18 sessions) and at the multi-day horizon for BTC (ρ ≈ 0.67 at 12 days). Same statistical framework — different frequency bands.</a:t>
-            </a:r>
-          </a:p>
-        </p:txBody>
-      </p:sp>
-      <p:sp>
-        <p:nvSpPr>
-          <p:cNvPr id="9" name="TextBox 8"/>
-          <p:cNvSpPr txBox="1"/>
-          <p:nvPr/>
-        </p:nvSpPr>
-        <p:spPr>
-          <a:xfrm>
-            <a:off x="548640" y="2788920"/>
-            <a:ext cx="640080" cy="914400"/>
-          </a:xfrm>
-          <a:prstGeom prst="rect">
-            <a:avLst/>
-          </a:prstGeom>
-          <a:noFill/>
-        </p:spPr>
-        <p:txBody>
-          <a:bodyPr wrap="square">
-            <a:spAutoFit/>
-          </a:bodyPr>
-          <a:lstStyle/>
-          <a:p>
-            <a:pPr algn="l"/>
-            <a:r>
-              <a:rPr sz="2800" b="1" i="0">
-                <a:solidFill>
-                  <a:srgbClr val="A28D5B"/>
-                </a:solidFill>
-                <a:latin typeface="Calibri"/>
-              </a:rPr>
-              <a:t>02</a:t>
-            </a:r>
-          </a:p>
-        </p:txBody>
-      </p:sp>
-      <p:sp>
-        <p:nvSpPr>
-          <p:cNvPr id="10" name="TextBox 9"/>
-          <p:cNvSpPr txBox="1"/>
-          <p:nvPr/>
-        </p:nvSpPr>
-        <p:spPr>
-          <a:xfrm>
-            <a:off x="1280160" y="2788920"/>
-            <a:ext cx="1920240" cy="365760"/>
-          </a:xfrm>
-          <a:prstGeom prst="rect">
-            <a:avLst/>
-          </a:prstGeom>
-          <a:noFill/>
-        </p:spPr>
-        <p:txBody>
-          <a:bodyPr wrap="square">
-            <a:spAutoFit/>
-          </a:bodyPr>
-          <a:lstStyle/>
-          <a:p>
-            <a:pPr algn="l"/>
-            <a:r>
-              <a:rPr sz="1300" b="1" i="0">
-                <a:solidFill>
-                  <a:srgbClr val="012169"/>
-                </a:solidFill>
-                <a:latin typeface="Calibri"/>
-              </a:rPr>
-              <a:t>Strategy</a:t>
-            </a:r>
-          </a:p>
-        </p:txBody>
-      </p:sp>
-      <p:sp>
-        <p:nvSpPr>
-          <p:cNvPr id="11" name="TextBox 10"/>
-          <p:cNvSpPr txBox="1"/>
-          <p:nvPr/>
-        </p:nvSpPr>
-        <p:spPr>
-          <a:xfrm>
-            <a:off x="3291840" y="2788920"/>
-            <a:ext cx="6248400" cy="914400"/>
-          </a:xfrm>
-          <a:prstGeom prst="rect">
-            <a:avLst/>
-          </a:prstGeom>
-          <a:noFill/>
-        </p:spPr>
-        <p:txBody>
-          <a:bodyPr wrap="square">
-            <a:spAutoFit/>
-          </a:bodyPr>
-          <a:lstStyle/>
-          <a:p>
-            <a:pPr algn="l"/>
-            <a:r>
-              <a:rPr sz="1050" b="0" i="0">
-                <a:solidFill>
-                  <a:srgbClr val="1B365D"/>
-                </a:solidFill>
-                <a:latin typeface="Calibri"/>
-              </a:rPr>
-              <a:t>Channel WithDDControl ported from main.m / ezread.m to Python (Numba JIT) and C++17. Walk-forward 4-yr IS / 1-Q OOS over the full ChnLen × StpPct grid, objective = Net Profit / Max Drawdown.</a:t>
-            </a:r>
-          </a:p>
-        </p:txBody>
-      </p:sp>
-      <p:sp>
-        <p:nvSpPr>
-          <p:cNvPr id="12" name="TextBox 11"/>
-          <p:cNvSpPr txBox="1"/>
-          <p:nvPr/>
-        </p:nvSpPr>
-        <p:spPr>
-          <a:xfrm>
-            <a:off x="548640" y="3749040"/>
-            <a:ext cx="640080" cy="914400"/>
-          </a:xfrm>
-          <a:prstGeom prst="rect">
-            <a:avLst/>
-          </a:prstGeom>
-          <a:noFill/>
-        </p:spPr>
-        <p:txBody>
-          <a:bodyPr wrap="square">
-            <a:spAutoFit/>
-          </a:bodyPr>
-          <a:lstStyle/>
-          <a:p>
-            <a:pPr algn="l"/>
-            <a:r>
-              <a:rPr sz="2800" b="1" i="0">
-                <a:solidFill>
-                  <a:srgbClr val="A28D5B"/>
-                </a:solidFill>
-                <a:latin typeface="Calibri"/>
-              </a:rPr>
-              <a:t>03</a:t>
-            </a:r>
-          </a:p>
-        </p:txBody>
-      </p:sp>
-      <p:sp>
-        <p:nvSpPr>
-          <p:cNvPr id="13" name="TextBox 12"/>
-          <p:cNvSpPr txBox="1"/>
-          <p:nvPr/>
-        </p:nvSpPr>
-        <p:spPr>
-          <a:xfrm>
-            <a:off x="1280160" y="3749040"/>
-            <a:ext cx="1920240" cy="365760"/>
-          </a:xfrm>
-          <a:prstGeom prst="rect">
-            <a:avLst/>
-          </a:prstGeom>
-          <a:noFill/>
-        </p:spPr>
-        <p:txBody>
-          <a:bodyPr wrap="square">
-            <a:spAutoFit/>
-          </a:bodyPr>
-          <a:lstStyle/>
-          <a:p>
-            <a:pPr algn="l"/>
-            <a:r>
-              <a:rPr sz="1300" b="1" i="0">
-                <a:solidFill>
-                  <a:srgbClr val="012169"/>
-                </a:solidFill>
-                <a:latin typeface="Calibri"/>
-              </a:rPr>
-              <a:t>OOS Results</a:t>
-            </a:r>
-          </a:p>
-        </p:txBody>
-      </p:sp>
-      <p:sp>
-        <p:nvSpPr>
-          <p:cNvPr id="14" name="TextBox 13"/>
-          <p:cNvSpPr txBox="1"/>
-          <p:nvPr/>
-        </p:nvSpPr>
-        <p:spPr>
-          <a:xfrm>
-            <a:off x="3291840" y="3749040"/>
-            <a:ext cx="6248400" cy="914400"/>
-          </a:xfrm>
-          <a:prstGeom prst="rect">
-            <a:avLst/>
-          </a:prstGeom>
-          <a:noFill/>
-        </p:spPr>
-        <p:txBody>
-          <a:bodyPr wrap="square">
-            <a:spAutoFit/>
-          </a:bodyPr>
-          <a:lstStyle/>
-          <a:p>
-            <a:pPr algn="l"/>
-            <a:r>
-              <a:rPr sz="1050" b="0" i="0">
-                <a:solidFill>
-                  <a:srgbClr val="1B365D"/>
-                </a:solidFill>
-                <a:latin typeface="Calibri"/>
-              </a:rPr>
-              <a:t>TY: $68 336 net / 4.31× RoA / Sharpe 0.31 over 1987–2026 (155 quarters). BTC: $536 397 net / 4.07× RoA / Sharpe 3.01 over 2023–2026 (7 quarters). Both deliver ≈ 4× return-on-account with full slippage charged.</a:t>
-            </a:r>
-          </a:p>
-        </p:txBody>
-      </p:sp>
-      <p:sp>
-        <p:nvSpPr>
-          <p:cNvPr id="15" name="TextBox 14"/>
-          <p:cNvSpPr txBox="1"/>
-          <p:nvPr/>
-        </p:nvSpPr>
-        <p:spPr>
-          <a:xfrm>
-            <a:off x="548640" y="4709160"/>
-            <a:ext cx="640080" cy="914400"/>
-          </a:xfrm>
-          <a:prstGeom prst="rect">
-            <a:avLst/>
-          </a:prstGeom>
-          <a:noFill/>
-        </p:spPr>
-        <p:txBody>
-          <a:bodyPr wrap="square">
-            <a:spAutoFit/>
-          </a:bodyPr>
-          <a:lstStyle/>
-          <a:p>
-            <a:pPr algn="l"/>
-            <a:r>
-              <a:rPr sz="2800" b="1" i="0">
-                <a:solidFill>
-                  <a:srgbClr val="A28D5B"/>
-                </a:solidFill>
-                <a:latin typeface="Calibri"/>
-              </a:rPr>
-              <a:t>04</a:t>
-            </a:r>
-          </a:p>
-        </p:txBody>
-      </p:sp>
-      <p:sp>
-        <p:nvSpPr>
-          <p:cNvPr id="16" name="TextBox 15"/>
-          <p:cNvSpPr txBox="1"/>
-          <p:nvPr/>
-        </p:nvSpPr>
-        <p:spPr>
-          <a:xfrm>
-            <a:off x="1280160" y="4709160"/>
-            <a:ext cx="1920240" cy="365760"/>
-          </a:xfrm>
-          <a:prstGeom prst="rect">
-            <a:avLst/>
-          </a:prstGeom>
-          <a:noFill/>
-        </p:spPr>
-        <p:txBody>
-          <a:bodyPr wrap="square">
-            <a:spAutoFit/>
-          </a:bodyPr>
-          <a:lstStyle/>
-          <a:p>
-            <a:pPr algn="l"/>
-            <a:r>
-              <a:rPr sz="1300" b="1" i="0">
-                <a:solidFill>
-                  <a:srgbClr val="012169"/>
-                </a:solidFill>
-                <a:latin typeface="Calibri"/>
-              </a:rPr>
-              <a:t>Robustness</a:t>
-            </a:r>
-          </a:p>
-        </p:txBody>
-      </p:sp>
-      <p:sp>
-        <p:nvSpPr>
-          <p:cNvPr id="17" name="TextBox 16"/>
-          <p:cNvSpPr txBox="1"/>
-          <p:nvPr/>
-        </p:nvSpPr>
-        <p:spPr>
-          <a:xfrm>
-            <a:off x="3291840" y="4709160"/>
-            <a:ext cx="6248400" cy="914400"/>
-          </a:xfrm>
-          <a:prstGeom prst="rect">
-            <a:avLst/>
-          </a:prstGeom>
-          <a:noFill/>
-        </p:spPr>
-        <p:txBody>
-          <a:bodyPr wrap="square">
-            <a:spAutoFit/>
-          </a:bodyPr>
-          <a:lstStyle/>
-          <a:p>
-            <a:pPr algn="l"/>
-            <a:r>
-              <a:rPr sz="1050" b="0" i="0">
-                <a:solidFill>
-                  <a:srgbClr val="1B365D"/>
-                </a:solidFill>
-                <a:latin typeface="Calibri"/>
-              </a:rPr>
-              <a:t>Python ↔ C++ parity to float-64 on every metric and every closed trade. T × τ sweep confirms (4 yr, 1 Q) is the well-behaved choice. 1-minute resolution earns marginally more (RoA 4.61×) but does not change the picture.</a:t>
-            </a:r>
-          </a:p>
-        </p:txBody>
-      </p:sp>
-      <p:sp>
-        <p:nvSpPr>
-          <p:cNvPr id="18" name="TextBox 17"/>
           <p:cNvSpPr txBox="1"/>
           <p:nvPr/>
         </p:nvSpPr>
@@ -14297,7 +13734,7 @@
       </p:sp>
       <p:sp>
         <p:nvSpPr>
-          <p:cNvPr id="19" name="TextBox 18"/>
+          <p:cNvPr id="8" name="TextBox 7"/>
           <p:cNvSpPr txBox="1"/>
           <p:nvPr/>
         </p:nvSpPr>
@@ -14325,7 +13762,7 @@
                 </a:solidFill>
                 <a:latin typeface="Calibri"/>
               </a:rPr>
-              <a:t>34 / 35</a:t>
+              <a:t>34 / 41</a:t>
             </a:r>
           </a:p>
         </p:txBody>
@@ -14386,7 +13823,7 @@
                 </a:solidFill>
                 <a:latin typeface="Calibri"/>
               </a:rPr>
-              <a:t>Appendix — repository, parity, key figures</a:t>
+              <a:t>BTC — out-of-sample dollar-PnL distribution</a:t>
             </a:r>
           </a:p>
         </p:txBody>
@@ -14456,21 +13893,565 @@
                 </a:solidFill>
                 <a:latin typeface="Calibri"/>
               </a:rPr>
-              <a:t>APPENDIX</a:t>
-            </a:r>
-          </a:p>
-        </p:txBody>
-      </p:sp>
-      <p:sp>
-        <p:nvSpPr>
-          <p:cNvPr id="5" name="TextBox 4"/>
-          <p:cNvSpPr txBox="1"/>
-          <p:nvPr/>
-        </p:nvSpPr>
-        <p:spPr>
-          <a:xfrm>
-            <a:off x="548640" y="1097280"/>
-            <a:ext cx="8808720" cy="4846320"/>
+              <a:t>SECONDARY MARKET — BTC</a:t>
+            </a:r>
+          </a:p>
+        </p:txBody>
+      </p:sp>
+      <p:pic>
+        <p:nvPicPr>
+          <p:cNvPr id="5" name="Picture 4" descr="slide_04_btc_trade_distribution.png"/>
+          <p:cNvPicPr>
+            <a:picLocks noChangeAspect="1"/>
+          </p:cNvPicPr>
+          <p:nvPr/>
+        </p:nvPicPr>
+        <p:blipFill>
+          <a:blip r:embed="rId2"/>
+          <a:stretch>
+            <a:fillRect/>
+          </a:stretch>
+        </p:blipFill>
+        <p:spPr>
+          <a:xfrm>
+            <a:off x="365760" y="921860"/>
+            <a:ext cx="9174480" cy="5014280"/>
+          </a:xfrm>
+          <a:prstGeom prst="rect">
+            <a:avLst/>
+          </a:prstGeom>
+        </p:spPr>
+      </p:pic>
+      <p:sp>
+        <p:nvSpPr>
+          <p:cNvPr id="6" name="TextBox 5"/>
+          <p:cNvSpPr txBox="1"/>
+          <p:nvPr/>
+        </p:nvSpPr>
+        <p:spPr>
+          <a:xfrm>
+            <a:off x="365760" y="5989320"/>
+            <a:ext cx="9174480" cy="411480"/>
+          </a:xfrm>
+          <a:prstGeom prst="rect">
+            <a:avLst/>
+          </a:prstGeom>
+          <a:noFill/>
+        </p:spPr>
+        <p:txBody>
+          <a:bodyPr wrap="square">
+            <a:spAutoFit/>
+          </a:bodyPr>
+          <a:lstStyle/>
+          <a:p>
+            <a:pPr algn="l"/>
+            <a:r>
+              <a:rPr sz="1050" b="0" i="0">
+                <a:solidFill>
+                  <a:srgbClr val="1B365D"/>
+                </a:solidFill>
+                <a:latin typeface="Calibri"/>
+              </a:rPr>
+              <a:t>Win rate 42% with average winner $4 327 vs average loser −$2 285 — same right-skew as TY but with a higher hit rate. Profit factor 1.37. The intraday push-response is positive at the right horizons, supporting the higher hit rate.</a:t>
+            </a:r>
+          </a:p>
+        </p:txBody>
+      </p:sp>
+      <p:sp>
+        <p:nvSpPr>
+          <p:cNvPr id="7" name="TextBox 6"/>
+          <p:cNvSpPr txBox="1"/>
+          <p:nvPr/>
+        </p:nvSpPr>
+        <p:spPr>
+          <a:xfrm>
+            <a:off x="365760" y="6446520"/>
+            <a:ext cx="9174480" cy="274320"/>
+          </a:xfrm>
+          <a:prstGeom prst="rect">
+            <a:avLst/>
+          </a:prstGeom>
+          <a:noFill/>
+        </p:spPr>
+        <p:txBody>
+          <a:bodyPr wrap="square">
+            <a:spAutoFit/>
+          </a:bodyPr>
+          <a:lstStyle/>
+          <a:p>
+            <a:pPr algn="l"/>
+            <a:r>
+              <a:rPr sz="900" b="0" i="0">
+                <a:solidFill>
+                  <a:srgbClr val="9AA1A9"/>
+                </a:solidFill>
+                <a:latin typeface="Calibri"/>
+              </a:rPr>
+              <a:t>MATH GR5360 Final Project · Group 1 · Columbia MAFN — Spring 2026</a:t>
+            </a:r>
+          </a:p>
+        </p:txBody>
+      </p:sp>
+      <p:sp>
+        <p:nvSpPr>
+          <p:cNvPr id="8" name="TextBox 7"/>
+          <p:cNvSpPr txBox="1"/>
+          <p:nvPr/>
+        </p:nvSpPr>
+        <p:spPr>
+          <a:xfrm>
+            <a:off x="8625840" y="6446520"/>
+            <a:ext cx="914400" cy="274320"/>
+          </a:xfrm>
+          <a:prstGeom prst="rect">
+            <a:avLst/>
+          </a:prstGeom>
+          <a:noFill/>
+        </p:spPr>
+        <p:txBody>
+          <a:bodyPr wrap="square">
+            <a:spAutoFit/>
+          </a:bodyPr>
+          <a:lstStyle/>
+          <a:p>
+            <a:pPr algn="r"/>
+            <a:r>
+              <a:rPr sz="900" b="0" i="0">
+                <a:solidFill>
+                  <a:srgbClr val="9AA1A9"/>
+                </a:solidFill>
+                <a:latin typeface="Calibri"/>
+              </a:rPr>
+              <a:t>35 / 41</a:t>
+            </a:r>
+          </a:p>
+        </p:txBody>
+      </p:sp>
+    </p:spTree>
+  </p:cSld>
+  <p:clrMapOvr>
+    <a:masterClrMapping/>
+  </p:clrMapOvr>
+</p:sld>
+</file>
+
+<file path=ppt/slides/slide36.xml><?xml version="1.0" encoding="utf-8"?>
+<p:sld xmlns:a="http://schemas.openxmlformats.org/drawingml/2006/main" xmlns:p="http://schemas.openxmlformats.org/presentationml/2006/main" xmlns:r="http://schemas.openxmlformats.org/officeDocument/2006/relationships">
+  <p:cSld>
+    <p:bg>
+      <p:bgPr>
+        <a:solidFill>
+          <a:srgbClr val="FFFFFF"/>
+        </a:solidFill>
+        <a:effectLst/>
+      </p:bgPr>
+    </p:bg>
+    <p:spTree>
+      <p:nvGrpSpPr>
+        <p:cNvPr id="1" name=""/>
+        <p:cNvGrpSpPr/>
+        <p:nvPr/>
+      </p:nvGrpSpPr>
+      <p:grpSpPr/>
+      <p:sp>
+        <p:nvSpPr>
+          <p:cNvPr id="2" name="TextBox 1"/>
+          <p:cNvSpPr txBox="1"/>
+          <p:nvPr/>
+        </p:nvSpPr>
+        <p:spPr>
+          <a:xfrm>
+            <a:off x="365760" y="228600"/>
+            <a:ext cx="9174480" cy="502920"/>
+          </a:xfrm>
+          <a:prstGeom prst="rect">
+            <a:avLst/>
+          </a:prstGeom>
+          <a:noFill/>
+        </p:spPr>
+        <p:txBody>
+          <a:bodyPr wrap="square">
+            <a:spAutoFit/>
+          </a:bodyPr>
+          <a:lstStyle/>
+          <a:p>
+            <a:pPr algn="l"/>
+            <a:r>
+              <a:rPr sz="2400" b="1" i="0">
+                <a:solidFill>
+                  <a:srgbClr val="012169"/>
+                </a:solidFill>
+                <a:latin typeface="Calibri"/>
+              </a:rPr>
+              <a:t>BTC — most profitable OOS trade (autopsy)</a:t>
+            </a:r>
+          </a:p>
+        </p:txBody>
+      </p:sp>
+      <p:cxnSp>
+        <p:nvCxnSpPr>
+          <p:cNvPr id="3" name="Connector 2"/>
+          <p:cNvCxnSpPr/>
+          <p:nvPr/>
+        </p:nvCxnSpPr>
+        <p:spPr>
+          <a:xfrm>
+            <a:off x="365760" y="777240"/>
+            <a:ext cx="9174480" cy="0"/>
+          </a:xfrm>
+          <a:prstGeom prst="line">
+            <a:avLst/>
+          </a:prstGeom>
+          <a:ln w="12700">
+            <a:solidFill>
+              <a:srgbClr val="012169"/>
+            </a:solidFill>
+          </a:ln>
+        </p:spPr>
+        <p:style>
+          <a:lnRef idx="2">
+            <a:schemeClr val="accent1"/>
+          </a:lnRef>
+          <a:fillRef idx="0">
+            <a:schemeClr val="accent1"/>
+          </a:fillRef>
+          <a:effectRef idx="1">
+            <a:schemeClr val="accent1"/>
+          </a:effectRef>
+          <a:fontRef idx="minor">
+            <a:schemeClr val="tx1"/>
+          </a:fontRef>
+        </p:style>
+      </p:cxnSp>
+      <p:sp>
+        <p:nvSpPr>
+          <p:cNvPr id="4" name="TextBox 3"/>
+          <p:cNvSpPr txBox="1"/>
+          <p:nvPr/>
+        </p:nvSpPr>
+        <p:spPr>
+          <a:xfrm>
+            <a:off x="7528560" y="228600"/>
+            <a:ext cx="2011680" cy="365760"/>
+          </a:xfrm>
+          <a:prstGeom prst="rect">
+            <a:avLst/>
+          </a:prstGeom>
+          <a:noFill/>
+        </p:spPr>
+        <p:txBody>
+          <a:bodyPr wrap="square">
+            <a:spAutoFit/>
+          </a:bodyPr>
+          <a:lstStyle/>
+          <a:p>
+            <a:pPr algn="r"/>
+            <a:r>
+              <a:rPr sz="1000" b="1" i="0">
+                <a:solidFill>
+                  <a:srgbClr val="A28D5B"/>
+                </a:solidFill>
+                <a:latin typeface="Calibri"/>
+              </a:rPr>
+              <a:t>SECONDARY MARKET — BTC</a:t>
+            </a:r>
+          </a:p>
+        </p:txBody>
+      </p:sp>
+      <p:pic>
+        <p:nvPicPr>
+          <p:cNvPr id="5" name="Picture 4" descr="slide_05_btc_best_trade.png"/>
+          <p:cNvPicPr>
+            <a:picLocks noChangeAspect="1"/>
+          </p:cNvPicPr>
+          <p:nvPr/>
+        </p:nvPicPr>
+        <p:blipFill>
+          <a:blip r:embed="rId2"/>
+          <a:stretch>
+            <a:fillRect/>
+          </a:stretch>
+        </p:blipFill>
+        <p:spPr>
+          <a:xfrm>
+            <a:off x="365760" y="926403"/>
+            <a:ext cx="9174480" cy="5005194"/>
+          </a:xfrm>
+          <a:prstGeom prst="rect">
+            <a:avLst/>
+          </a:prstGeom>
+        </p:spPr>
+      </p:pic>
+      <p:sp>
+        <p:nvSpPr>
+          <p:cNvPr id="6" name="TextBox 5"/>
+          <p:cNvSpPr txBox="1"/>
+          <p:nvPr/>
+        </p:nvSpPr>
+        <p:spPr>
+          <a:xfrm>
+            <a:off x="365760" y="5989320"/>
+            <a:ext cx="9174480" cy="411480"/>
+          </a:xfrm>
+          <a:prstGeom prst="rect">
+            <a:avLst/>
+          </a:prstGeom>
+          <a:noFill/>
+        </p:spPr>
+        <p:txBody>
+          <a:bodyPr wrap="square">
+            <a:spAutoFit/>
+          </a:bodyPr>
+          <a:lstStyle/>
+          <a:p>
+            <a:pPr algn="l"/>
+            <a:r>
+              <a:rPr sz="1050" b="0" i="0">
+                <a:solidFill>
+                  <a:srgbClr val="1B365D"/>
+                </a:solidFill>
+                <a:latin typeface="Calibri"/>
+              </a:rPr>
+              <a:t>02 Mar 2025 LONG 85 720 → 94 748 in 25 minutes (+$45 115). Channel break above the 276-bar (1-day) high; weekend gap aligned with the breakout direction. $9 028 price move × $5 BTC point value − $25 round-turn slippage = +$45 115 in 5 bars.</a:t>
+            </a:r>
+          </a:p>
+        </p:txBody>
+      </p:sp>
+      <p:sp>
+        <p:nvSpPr>
+          <p:cNvPr id="7" name="TextBox 6"/>
+          <p:cNvSpPr txBox="1"/>
+          <p:nvPr/>
+        </p:nvSpPr>
+        <p:spPr>
+          <a:xfrm>
+            <a:off x="365760" y="6446520"/>
+            <a:ext cx="9174480" cy="274320"/>
+          </a:xfrm>
+          <a:prstGeom prst="rect">
+            <a:avLst/>
+          </a:prstGeom>
+          <a:noFill/>
+        </p:spPr>
+        <p:txBody>
+          <a:bodyPr wrap="square">
+            <a:spAutoFit/>
+          </a:bodyPr>
+          <a:lstStyle/>
+          <a:p>
+            <a:pPr algn="l"/>
+            <a:r>
+              <a:rPr sz="900" b="0" i="0">
+                <a:solidFill>
+                  <a:srgbClr val="9AA1A9"/>
+                </a:solidFill>
+                <a:latin typeface="Calibri"/>
+              </a:rPr>
+              <a:t>MATH GR5360 Final Project · Group 1 · Columbia MAFN — Spring 2026</a:t>
+            </a:r>
+          </a:p>
+        </p:txBody>
+      </p:sp>
+      <p:sp>
+        <p:nvSpPr>
+          <p:cNvPr id="8" name="TextBox 7"/>
+          <p:cNvSpPr txBox="1"/>
+          <p:nvPr/>
+        </p:nvSpPr>
+        <p:spPr>
+          <a:xfrm>
+            <a:off x="8625840" y="6446520"/>
+            <a:ext cx="914400" cy="274320"/>
+          </a:xfrm>
+          <a:prstGeom prst="rect">
+            <a:avLst/>
+          </a:prstGeom>
+          <a:noFill/>
+        </p:spPr>
+        <p:txBody>
+          <a:bodyPr wrap="square">
+            <a:spAutoFit/>
+          </a:bodyPr>
+          <a:lstStyle/>
+          <a:p>
+            <a:pPr algn="r"/>
+            <a:r>
+              <a:rPr sz="900" b="0" i="0">
+                <a:solidFill>
+                  <a:srgbClr val="9AA1A9"/>
+                </a:solidFill>
+                <a:latin typeface="Calibri"/>
+              </a:rPr>
+              <a:t>36 / 41</a:t>
+            </a:r>
+          </a:p>
+        </p:txBody>
+      </p:sp>
+    </p:spTree>
+  </p:cSld>
+  <p:clrMapOvr>
+    <a:masterClrMapping/>
+  </p:clrMapOvr>
+</p:sld>
+</file>
+
+<file path=ppt/slides/slide37.xml><?xml version="1.0" encoding="utf-8"?>
+<p:sld xmlns:a="http://schemas.openxmlformats.org/drawingml/2006/main" xmlns:p="http://schemas.openxmlformats.org/presentationml/2006/main" xmlns:r="http://schemas.openxmlformats.org/officeDocument/2006/relationships">
+  <p:cSld>
+    <p:bg>
+      <p:bgPr>
+        <a:solidFill>
+          <a:srgbClr val="FFFFFF"/>
+        </a:solidFill>
+        <a:effectLst/>
+      </p:bgPr>
+    </p:bg>
+    <p:spTree>
+      <p:nvGrpSpPr>
+        <p:cNvPr id="1" name=""/>
+        <p:cNvGrpSpPr/>
+        <p:nvPr/>
+      </p:nvGrpSpPr>
+      <p:grpSpPr/>
+      <p:sp>
+        <p:nvSpPr>
+          <p:cNvPr id="2" name="TextBox 1"/>
+          <p:cNvSpPr txBox="1"/>
+          <p:nvPr/>
+        </p:nvSpPr>
+        <p:spPr>
+          <a:xfrm>
+            <a:off x="365760" y="228600"/>
+            <a:ext cx="9174480" cy="502920"/>
+          </a:xfrm>
+          <a:prstGeom prst="rect">
+            <a:avLst/>
+          </a:prstGeom>
+          <a:noFill/>
+        </p:spPr>
+        <p:txBody>
+          <a:bodyPr wrap="square">
+            <a:spAutoFit/>
+          </a:bodyPr>
+          <a:lstStyle/>
+          <a:p>
+            <a:pPr algn="l"/>
+            <a:r>
+              <a:rPr sz="2400" b="1" i="0">
+                <a:solidFill>
+                  <a:srgbClr val="012169"/>
+                </a:solidFill>
+                <a:latin typeface="Calibri"/>
+              </a:rPr>
+              <a:t>BTC — worst OOS trade · why it got cooked</a:t>
+            </a:r>
+          </a:p>
+        </p:txBody>
+      </p:sp>
+      <p:cxnSp>
+        <p:nvCxnSpPr>
+          <p:cNvPr id="3" name="Connector 2"/>
+          <p:cNvCxnSpPr/>
+          <p:nvPr/>
+        </p:nvCxnSpPr>
+        <p:spPr>
+          <a:xfrm>
+            <a:off x="365760" y="777240"/>
+            <a:ext cx="9174480" cy="0"/>
+          </a:xfrm>
+          <a:prstGeom prst="line">
+            <a:avLst/>
+          </a:prstGeom>
+          <a:ln w="12700">
+            <a:solidFill>
+              <a:srgbClr val="012169"/>
+            </a:solidFill>
+          </a:ln>
+        </p:spPr>
+        <p:style>
+          <a:lnRef idx="2">
+            <a:schemeClr val="accent1"/>
+          </a:lnRef>
+          <a:fillRef idx="0">
+            <a:schemeClr val="accent1"/>
+          </a:fillRef>
+          <a:effectRef idx="1">
+            <a:schemeClr val="accent1"/>
+          </a:effectRef>
+          <a:fontRef idx="minor">
+            <a:schemeClr val="tx1"/>
+          </a:fontRef>
+        </p:style>
+      </p:cxnSp>
+      <p:sp>
+        <p:nvSpPr>
+          <p:cNvPr id="4" name="TextBox 3"/>
+          <p:cNvSpPr txBox="1"/>
+          <p:nvPr/>
+        </p:nvSpPr>
+        <p:spPr>
+          <a:xfrm>
+            <a:off x="7528560" y="228600"/>
+            <a:ext cx="2011680" cy="365760"/>
+          </a:xfrm>
+          <a:prstGeom prst="rect">
+            <a:avLst/>
+          </a:prstGeom>
+          <a:noFill/>
+        </p:spPr>
+        <p:txBody>
+          <a:bodyPr wrap="square">
+            <a:spAutoFit/>
+          </a:bodyPr>
+          <a:lstStyle/>
+          <a:p>
+            <a:pPr algn="r"/>
+            <a:r>
+              <a:rPr sz="1000" b="1" i="0">
+                <a:solidFill>
+                  <a:srgbClr val="A28D5B"/>
+                </a:solidFill>
+                <a:latin typeface="Calibri"/>
+              </a:rPr>
+              <a:t>SECONDARY MARKET — BTC</a:t>
+            </a:r>
+          </a:p>
+        </p:txBody>
+      </p:sp>
+      <p:pic>
+        <p:nvPicPr>
+          <p:cNvPr id="5" name="Picture 4" descr="slide_06_btc_worst_trade.png"/>
+          <p:cNvPicPr>
+            <a:picLocks noChangeAspect="1"/>
+          </p:cNvPicPr>
+          <p:nvPr/>
+        </p:nvPicPr>
+        <p:blipFill>
+          <a:blip r:embed="rId2"/>
+          <a:stretch>
+            <a:fillRect/>
+          </a:stretch>
+        </p:blipFill>
+        <p:spPr>
+          <a:xfrm>
+            <a:off x="365760" y="1742360"/>
+            <a:ext cx="6141720" cy="3373280"/>
+          </a:xfrm>
+          <a:prstGeom prst="rect">
+            <a:avLst/>
+          </a:prstGeom>
+        </p:spPr>
+      </p:pic>
+      <p:sp>
+        <p:nvSpPr>
+          <p:cNvPr id="6" name="TextBox 5"/>
+          <p:cNvSpPr txBox="1"/>
+          <p:nvPr/>
+        </p:nvSpPr>
+        <p:spPr>
+          <a:xfrm>
+            <a:off x="6690360" y="1005840"/>
+            <a:ext cx="2849880" cy="4846320"/>
           </a:xfrm>
           <a:prstGeom prst="rect">
             <a:avLst/>
@@ -14489,7 +14470,7 @@
               </a:lnSpc>
             </a:pPr>
             <a:r>
-              <a:rPr sz="1200" b="1">
+              <a:rPr sz="1100" b="1">
                 <a:solidFill>
                   <a:srgbClr val="A28D5B"/>
                 </a:solidFill>
@@ -14498,13 +14479,13 @@
               <a:t>•  </a:t>
             </a:r>
             <a:r>
-              <a:rPr sz="1200">
+              <a:rPr sz="1100">
                 <a:solidFill>
                   <a:srgbClr val="1B365D"/>
                 </a:solidFill>
                 <a:latin typeface="Calibri"/>
               </a:rPr>
-              <a:t>Repository: github.com/nl2992/MATH5360_Final_Project</a:t>
+              <a:t>22 Aug 2025 SHORT @ 112 075 — broke below the 276-bar (1-day) low.</a:t>
             </a:r>
           </a:p>
           <a:p>
@@ -14514,7 +14495,7 @@
               </a:lnSpc>
             </a:pPr>
             <a:r>
-              <a:rPr sz="1200" b="1">
+              <a:rPr sz="1100" b="1">
                 <a:solidFill>
                   <a:srgbClr val="A28D5B"/>
                 </a:solidFill>
@@ -14523,13 +14504,13 @@
               <a:t>•  </a:t>
             </a:r>
             <a:r>
-              <a:rPr sz="1200">
+              <a:rPr sz="1100">
                 <a:solidFill>
                   <a:srgbClr val="1B365D"/>
                 </a:solidFill>
                 <a:latin typeface="Calibri"/>
               </a:rPr>
-              <a:t>Walk-forward Python artifacts: results/walkforward/{TY_5m, BTC_5m, TY_1m}/</a:t>
+              <a:t>Within 90 minutes BTC pumped $2 115 (+1.9%) against the position.</a:t>
             </a:r>
           </a:p>
           <a:p>
@@ -14539,7 +14520,7 @@
               </a:lnSpc>
             </a:pPr>
             <a:r>
-              <a:rPr sz="1200" b="1">
+              <a:rPr sz="1100" b="1">
                 <a:solidFill>
                   <a:srgbClr val="A28D5B"/>
                 </a:solidFill>
@@ -14548,13 +14529,13 @@
               <a:t>•  </a:t>
             </a:r>
             <a:r>
-              <a:rPr sz="1200">
+              <a:rPr sz="1100">
                 <a:solidFill>
                   <a:srgbClr val="1B365D"/>
                 </a:solidFill>
                 <a:latin typeface="Calibri"/>
               </a:rPr>
-              <a:t>C++ parity artifacts: results/cpp_parity/{TY, BTC}/</a:t>
+              <a:t>Tight 1% drawdown stop fired at the second bar after the move ($114 190).</a:t>
             </a:r>
           </a:p>
           <a:p>
@@ -14564,7 +14545,7 @@
               </a:lnSpc>
             </a:pPr>
             <a:r>
-              <a:rPr sz="1200" b="1">
+              <a:rPr sz="1100" b="1">
                 <a:solidFill>
                   <a:srgbClr val="A28D5B"/>
                 </a:solidFill>
@@ -14573,13 +14554,13 @@
               <a:t>•  </a:t>
             </a:r>
             <a:r>
-              <a:rPr sz="1200">
+              <a:rPr sz="1100">
                 <a:solidFill>
                   <a:srgbClr val="1B365D"/>
                 </a:solidFill>
                 <a:latin typeface="Calibri"/>
               </a:rPr>
-              <a:t>Diagnostics (VR + Push-Response cached tables): results/diagnostics/</a:t>
+              <a:t>Channel breakout in BTC's mean-reverting 1-day regime — recurring failure mode.</a:t>
             </a:r>
           </a:p>
           <a:p>
@@ -14589,7 +14570,7 @@
               </a:lnSpc>
             </a:pPr>
             <a:r>
-              <a:rPr sz="1200" b="1">
+              <a:rPr sz="1100" b="1">
                 <a:solidFill>
                   <a:srgbClr val="A28D5B"/>
                 </a:solidFill>
@@ -14598,13 +14579,13 @@
               <a:t>•  </a:t>
             </a:r>
             <a:r>
-              <a:rPr sz="1200">
+              <a:rPr sz="1100">
                 <a:solidFill>
                   <a:srgbClr val="1B365D"/>
                 </a:solidFill>
                 <a:latin typeface="Calibri"/>
               </a:rPr>
-              <a:t>Comprehensive write-up: report/FINAL_REPORT.md</a:t>
+              <a:t>The push-response diagram already flagged BTC as mean-reverting at the 1-day horizon (Spearman ρ = −0.38).</a:t>
             </a:r>
           </a:p>
           <a:p>
@@ -14614,7 +14595,7 @@
               </a:lnSpc>
             </a:pPr>
             <a:r>
-              <a:rPr sz="1200" b="1">
+              <a:rPr sz="1100" b="1">
                 <a:solidFill>
                   <a:srgbClr val="A28D5B"/>
                 </a:solidFill>
@@ -14623,105 +14604,55 @@
               <a:t>•  </a:t>
             </a:r>
             <a:r>
-              <a:rPr sz="1200">
+              <a:rPr sz="1100">
                 <a:solidFill>
                   <a:srgbClr val="1B365D"/>
                 </a:solidFill>
                 <a:latin typeface="Calibri"/>
               </a:rPr>
-              <a:t>Slide-companion narrative: report/presentation/demo.md</a:t>
-            </a:r>
-          </a:p>
-          <a:p>
-            <a:pPr algn="l">
-              <a:lnSpc>
-                <a:spcPct val="115000"/>
-              </a:lnSpc>
-            </a:pPr>
-            <a:r>
-              <a:rPr sz="1200" b="1">
-                <a:solidFill>
-                  <a:srgbClr val="A28D5B"/>
-                </a:solidFill>
-                <a:latin typeface="Calibri"/>
-              </a:rPr>
-              <a:t>•  </a:t>
-            </a:r>
-            <a:r>
-              <a:rPr sz="1200">
+              <a:t>The −$10 600 loss is ≈ 8% of the OOS Max DD — paid once to stay in the longer-horizon trend regime.</a:t>
+            </a:r>
+          </a:p>
+        </p:txBody>
+      </p:sp>
+      <p:sp>
+        <p:nvSpPr>
+          <p:cNvPr id="7" name="TextBox 6"/>
+          <p:cNvSpPr txBox="1"/>
+          <p:nvPr/>
+        </p:nvSpPr>
+        <p:spPr>
+          <a:xfrm>
+            <a:off x="365760" y="5989320"/>
+            <a:ext cx="9174480" cy="411480"/>
+          </a:xfrm>
+          <a:prstGeom prst="rect">
+            <a:avLst/>
+          </a:prstGeom>
+          <a:noFill/>
+        </p:spPr>
+        <p:txBody>
+          <a:bodyPr wrap="square">
+            <a:spAutoFit/>
+          </a:bodyPr>
+          <a:lstStyle/>
+          <a:p>
+            <a:pPr algn="l"/>
+            <a:r>
+              <a:rPr sz="1050" b="0" i="0">
                 <a:solidFill>
                   <a:srgbClr val="1B365D"/>
                 </a:solidFill>
                 <a:latin typeface="Calibri"/>
               </a:rPr>
-              <a:t>All figures regenerated by: scripts/build_final_report_figures.py, build_presentation_figures.py and build_front_matter_figures.py</a:t>
-            </a:r>
-          </a:p>
-          <a:p>
-            <a:pPr algn="l">
-              <a:lnSpc>
-                <a:spcPct val="115000"/>
-              </a:lnSpc>
-            </a:pPr>
-            <a:r>
-              <a:rPr sz="1200" b="1">
-                <a:solidFill>
-                  <a:srgbClr val="A28D5B"/>
-                </a:solidFill>
-                <a:latin typeface="Calibri"/>
-              </a:rPr>
-              <a:t>•  </a:t>
-            </a:r>
-            <a:r>
-              <a:rPr sz="1200">
-                <a:solidFill>
-                  <a:srgbClr val="1B365D"/>
-                </a:solidFill>
-                <a:latin typeface="Calibri"/>
-              </a:rPr>
-              <a:t>Python ↔ C++ parity: every metric and every closed trade match to float-64 — see results/walkforward/python_cpp_fidelity_comparison.csv</a:t>
-            </a:r>
-          </a:p>
-        </p:txBody>
-      </p:sp>
-      <p:sp>
-        <p:nvSpPr>
-          <p:cNvPr id="6" name="TextBox 5"/>
-          <p:cNvSpPr txBox="1"/>
-          <p:nvPr/>
-        </p:nvSpPr>
-        <p:spPr>
-          <a:xfrm>
-            <a:off x="548640" y="5943600"/>
-            <a:ext cx="8808720" cy="457200"/>
-          </a:xfrm>
-          <a:prstGeom prst="rect">
-            <a:avLst/>
-          </a:prstGeom>
-          <a:noFill/>
-        </p:spPr>
-        <p:txBody>
-          <a:bodyPr wrap="square">
-            <a:spAutoFit/>
-          </a:bodyPr>
-          <a:lstStyle/>
-          <a:p>
-            <a:pPr algn="l"/>
-            <a:r>
-              <a:rPr sz="1000" b="0" i="1">
-                <a:solidFill>
-                  <a:srgbClr val="9AA1A9"/>
-                </a:solidFill>
-                <a:latin typeface="Calibri"/>
-              </a:rPr>
-              <a:t>Channel WithDDControl ported from main.m / ezread.m. Python core JIT-compiled with Numba; C++17 reference engine confirms parity to float-64.</a:t>
-            </a:r>
-          </a:p>
-        </p:txBody>
-      </p:sp>
-      <p:sp>
-        <p:nvSpPr>
-          <p:cNvPr id="7" name="TextBox 6"/>
+              <a:t>Source: Group 1 walk-forward (TF Data 5-min OHLC, $100k initial equity)</a:t>
+            </a:r>
+          </a:p>
+        </p:txBody>
+      </p:sp>
+      <p:sp>
+        <p:nvSpPr>
+          <p:cNvPr id="8" name="TextBox 7"/>
           <p:cNvSpPr txBox="1"/>
           <p:nvPr/>
         </p:nvSpPr>
@@ -14756,7 +14687,7 @@
       </p:sp>
       <p:sp>
         <p:nvSpPr>
-          <p:cNvPr id="8" name="TextBox 7"/>
+          <p:cNvPr id="9" name="TextBox 8"/>
           <p:cNvSpPr txBox="1"/>
           <p:nvPr/>
         </p:nvSpPr>
@@ -14784,7 +14715,527 @@
                 </a:solidFill>
                 <a:latin typeface="Calibri"/>
               </a:rPr>
-              <a:t>35 / 35</a:t>
+              <a:t>37 / 41</a:t>
+            </a:r>
+          </a:p>
+        </p:txBody>
+      </p:sp>
+    </p:spTree>
+  </p:cSld>
+  <p:clrMapOvr>
+    <a:masterClrMapping/>
+  </p:clrMapOvr>
+</p:sld>
+</file>
+
+<file path=ppt/slides/slide38.xml><?xml version="1.0" encoding="utf-8"?>
+<p:sld xmlns:a="http://schemas.openxmlformats.org/drawingml/2006/main" xmlns:p="http://schemas.openxmlformats.org/presentationml/2006/main" xmlns:r="http://schemas.openxmlformats.org/officeDocument/2006/relationships">
+  <p:cSld>
+    <p:bg>
+      <p:bgPr>
+        <a:solidFill>
+          <a:srgbClr val="FFFFFF"/>
+        </a:solidFill>
+        <a:effectLst/>
+      </p:bgPr>
+    </p:bg>
+    <p:spTree>
+      <p:nvGrpSpPr>
+        <p:cNvPr id="1" name=""/>
+        <p:cNvGrpSpPr/>
+        <p:nvPr/>
+      </p:nvGrpSpPr>
+      <p:grpSpPr/>
+      <p:sp>
+        <p:nvSpPr>
+          <p:cNvPr id="2" name="TextBox 1"/>
+          <p:cNvSpPr txBox="1"/>
+          <p:nvPr/>
+        </p:nvSpPr>
+        <p:spPr>
+          <a:xfrm>
+            <a:off x="365760" y="228600"/>
+            <a:ext cx="9174480" cy="502920"/>
+          </a:xfrm>
+          <a:prstGeom prst="rect">
+            <a:avLst/>
+          </a:prstGeom>
+          <a:noFill/>
+        </p:spPr>
+        <p:txBody>
+          <a:bodyPr wrap="square">
+            <a:spAutoFit/>
+          </a:bodyPr>
+          <a:lstStyle/>
+          <a:p>
+            <a:pPr algn="l"/>
+            <a:r>
+              <a:rPr sz="2400" b="1" i="0">
+                <a:solidFill>
+                  <a:srgbClr val="012169"/>
+                </a:solidFill>
+                <a:latin typeface="Calibri"/>
+              </a:rPr>
+              <a:t>BTC — walk-forward parameter stability</a:t>
+            </a:r>
+          </a:p>
+        </p:txBody>
+      </p:sp>
+      <p:cxnSp>
+        <p:nvCxnSpPr>
+          <p:cNvPr id="3" name="Connector 2"/>
+          <p:cNvCxnSpPr/>
+          <p:nvPr/>
+        </p:nvCxnSpPr>
+        <p:spPr>
+          <a:xfrm>
+            <a:off x="365760" y="777240"/>
+            <a:ext cx="9174480" cy="0"/>
+          </a:xfrm>
+          <a:prstGeom prst="line">
+            <a:avLst/>
+          </a:prstGeom>
+          <a:ln w="12700">
+            <a:solidFill>
+              <a:srgbClr val="012169"/>
+            </a:solidFill>
+          </a:ln>
+        </p:spPr>
+        <p:style>
+          <a:lnRef idx="2">
+            <a:schemeClr val="accent1"/>
+          </a:lnRef>
+          <a:fillRef idx="0">
+            <a:schemeClr val="accent1"/>
+          </a:fillRef>
+          <a:effectRef idx="1">
+            <a:schemeClr val="accent1"/>
+          </a:effectRef>
+          <a:fontRef idx="minor">
+            <a:schemeClr val="tx1"/>
+          </a:fontRef>
+        </p:style>
+      </p:cxnSp>
+      <p:sp>
+        <p:nvSpPr>
+          <p:cNvPr id="4" name="TextBox 3"/>
+          <p:cNvSpPr txBox="1"/>
+          <p:nvPr/>
+        </p:nvSpPr>
+        <p:spPr>
+          <a:xfrm>
+            <a:off x="7528560" y="228600"/>
+            <a:ext cx="2011680" cy="365760"/>
+          </a:xfrm>
+          <a:prstGeom prst="rect">
+            <a:avLst/>
+          </a:prstGeom>
+          <a:noFill/>
+        </p:spPr>
+        <p:txBody>
+          <a:bodyPr wrap="square">
+            <a:spAutoFit/>
+          </a:bodyPr>
+          <a:lstStyle/>
+          <a:p>
+            <a:pPr algn="r"/>
+            <a:r>
+              <a:rPr sz="1000" b="1" i="0">
+                <a:solidFill>
+                  <a:srgbClr val="A28D5B"/>
+                </a:solidFill>
+                <a:latin typeface="Calibri"/>
+              </a:rPr>
+              <a:t>SECONDARY MARKET — BTC</a:t>
+            </a:r>
+          </a:p>
+        </p:txBody>
+      </p:sp>
+      <p:pic>
+        <p:nvPicPr>
+          <p:cNvPr id="5" name="Picture 4" descr="slide_07_btc_param_stability.png"/>
+          <p:cNvPicPr>
+            <a:picLocks noChangeAspect="1"/>
+          </p:cNvPicPr>
+          <p:nvPr/>
+        </p:nvPicPr>
+        <p:blipFill>
+          <a:blip r:embed="rId2"/>
+          <a:stretch>
+            <a:fillRect/>
+          </a:stretch>
+        </p:blipFill>
+        <p:spPr>
+          <a:xfrm>
+            <a:off x="365760" y="1013572"/>
+            <a:ext cx="9174480" cy="4830856"/>
+          </a:xfrm>
+          <a:prstGeom prst="rect">
+            <a:avLst/>
+          </a:prstGeom>
+        </p:spPr>
+      </p:pic>
+      <p:sp>
+        <p:nvSpPr>
+          <p:cNvPr id="6" name="TextBox 5"/>
+          <p:cNvSpPr txBox="1"/>
+          <p:nvPr/>
+        </p:nvSpPr>
+        <p:spPr>
+          <a:xfrm>
+            <a:off x="365760" y="5989320"/>
+            <a:ext cx="9174480" cy="411480"/>
+          </a:xfrm>
+          <a:prstGeom prst="rect">
+            <a:avLst/>
+          </a:prstGeom>
+          <a:noFill/>
+        </p:spPr>
+        <p:txBody>
+          <a:bodyPr wrap="square">
+            <a:spAutoFit/>
+          </a:bodyPr>
+          <a:lstStyle/>
+          <a:p>
+            <a:pPr algn="l"/>
+            <a:r>
+              <a:rPr sz="1050" b="0" i="0">
+                <a:solidFill>
+                  <a:srgbClr val="1B365D"/>
+                </a:solidFill>
+                <a:latin typeface="Calibri"/>
+              </a:rPr>
+              <a:t>BTC has only 7 quarterly OOS windows (the sample's IS warmup eats ~4 years from inception). Optimiser cycles between L = 276 (1 day) in choppy regimes and L = 1 104 (4 days) in the late-2025 trend phase. S* fixed at 1%. Instability is structural — BTC's regime is shifting.</a:t>
+            </a:r>
+          </a:p>
+        </p:txBody>
+      </p:sp>
+      <p:sp>
+        <p:nvSpPr>
+          <p:cNvPr id="7" name="TextBox 6"/>
+          <p:cNvSpPr txBox="1"/>
+          <p:nvPr/>
+        </p:nvSpPr>
+        <p:spPr>
+          <a:xfrm>
+            <a:off x="365760" y="6446520"/>
+            <a:ext cx="9174480" cy="274320"/>
+          </a:xfrm>
+          <a:prstGeom prst="rect">
+            <a:avLst/>
+          </a:prstGeom>
+          <a:noFill/>
+        </p:spPr>
+        <p:txBody>
+          <a:bodyPr wrap="square">
+            <a:spAutoFit/>
+          </a:bodyPr>
+          <a:lstStyle/>
+          <a:p>
+            <a:pPr algn="l"/>
+            <a:r>
+              <a:rPr sz="900" b="0" i="0">
+                <a:solidFill>
+                  <a:srgbClr val="9AA1A9"/>
+                </a:solidFill>
+                <a:latin typeface="Calibri"/>
+              </a:rPr>
+              <a:t>MATH GR5360 Final Project · Group 1 · Columbia MAFN — Spring 2026</a:t>
+            </a:r>
+          </a:p>
+        </p:txBody>
+      </p:sp>
+      <p:sp>
+        <p:nvSpPr>
+          <p:cNvPr id="8" name="TextBox 7"/>
+          <p:cNvSpPr txBox="1"/>
+          <p:nvPr/>
+        </p:nvSpPr>
+        <p:spPr>
+          <a:xfrm>
+            <a:off x="8625840" y="6446520"/>
+            <a:ext cx="914400" cy="274320"/>
+          </a:xfrm>
+          <a:prstGeom prst="rect">
+            <a:avLst/>
+          </a:prstGeom>
+          <a:noFill/>
+        </p:spPr>
+        <p:txBody>
+          <a:bodyPr wrap="square">
+            <a:spAutoFit/>
+          </a:bodyPr>
+          <a:lstStyle/>
+          <a:p>
+            <a:pPr algn="r"/>
+            <a:r>
+              <a:rPr sz="900" b="0" i="0">
+                <a:solidFill>
+                  <a:srgbClr val="9AA1A9"/>
+                </a:solidFill>
+                <a:latin typeface="Calibri"/>
+              </a:rPr>
+              <a:t>38 / 41</a:t>
+            </a:r>
+          </a:p>
+        </p:txBody>
+      </p:sp>
+    </p:spTree>
+  </p:cSld>
+  <p:clrMapOvr>
+    <a:masterClrMapping/>
+  </p:clrMapOvr>
+</p:sld>
+</file>
+
+<file path=ppt/slides/slide39.xml><?xml version="1.0" encoding="utf-8"?>
+<p:sld xmlns:a="http://schemas.openxmlformats.org/drawingml/2006/main" xmlns:p="http://schemas.openxmlformats.org/presentationml/2006/main" xmlns:r="http://schemas.openxmlformats.org/officeDocument/2006/relationships">
+  <p:cSld>
+    <p:bg>
+      <p:bgPr>
+        <a:solidFill>
+          <a:srgbClr val="FFFFFF"/>
+        </a:solidFill>
+        <a:effectLst/>
+      </p:bgPr>
+    </p:bg>
+    <p:spTree>
+      <p:nvGrpSpPr>
+        <p:cNvPr id="1" name=""/>
+        <p:cNvGrpSpPr/>
+        <p:nvPr/>
+      </p:nvGrpSpPr>
+      <p:grpSpPr/>
+      <p:sp>
+        <p:nvSpPr>
+          <p:cNvPr id="2" name="TextBox 1"/>
+          <p:cNvSpPr txBox="1"/>
+          <p:nvPr/>
+        </p:nvSpPr>
+        <p:spPr>
+          <a:xfrm>
+            <a:off x="365760" y="228600"/>
+            <a:ext cx="9174480" cy="502920"/>
+          </a:xfrm>
+          <a:prstGeom prst="rect">
+            <a:avLst/>
+          </a:prstGeom>
+          <a:noFill/>
+        </p:spPr>
+        <p:txBody>
+          <a:bodyPr wrap="square">
+            <a:spAutoFit/>
+          </a:bodyPr>
+          <a:lstStyle/>
+          <a:p>
+            <a:pPr algn="l"/>
+            <a:r>
+              <a:rPr sz="2400" b="1" i="0">
+                <a:solidFill>
+                  <a:srgbClr val="012169"/>
+                </a:solidFill>
+                <a:latin typeface="Calibri"/>
+              </a:rPr>
+              <a:t>In-sample vs out-of-sample decay</a:t>
+            </a:r>
+          </a:p>
+        </p:txBody>
+      </p:sp>
+      <p:cxnSp>
+        <p:nvCxnSpPr>
+          <p:cNvPr id="3" name="Connector 2"/>
+          <p:cNvCxnSpPr/>
+          <p:nvPr/>
+        </p:nvCxnSpPr>
+        <p:spPr>
+          <a:xfrm>
+            <a:off x="365760" y="777240"/>
+            <a:ext cx="9174480" cy="0"/>
+          </a:xfrm>
+          <a:prstGeom prst="line">
+            <a:avLst/>
+          </a:prstGeom>
+          <a:ln w="12700">
+            <a:solidFill>
+              <a:srgbClr val="012169"/>
+            </a:solidFill>
+          </a:ln>
+        </p:spPr>
+        <p:style>
+          <a:lnRef idx="2">
+            <a:schemeClr val="accent1"/>
+          </a:lnRef>
+          <a:fillRef idx="0">
+            <a:schemeClr val="accent1"/>
+          </a:fillRef>
+          <a:effectRef idx="1">
+            <a:schemeClr val="accent1"/>
+          </a:effectRef>
+          <a:fontRef idx="minor">
+            <a:schemeClr val="tx1"/>
+          </a:fontRef>
+        </p:style>
+      </p:cxnSp>
+      <p:sp>
+        <p:nvSpPr>
+          <p:cNvPr id="4" name="TextBox 3"/>
+          <p:cNvSpPr txBox="1"/>
+          <p:nvPr/>
+        </p:nvSpPr>
+        <p:spPr>
+          <a:xfrm>
+            <a:off x="7528560" y="228600"/>
+            <a:ext cx="2011680" cy="365760"/>
+          </a:xfrm>
+          <a:prstGeom prst="rect">
+            <a:avLst/>
+          </a:prstGeom>
+          <a:noFill/>
+        </p:spPr>
+        <p:txBody>
+          <a:bodyPr wrap="square">
+            <a:spAutoFit/>
+          </a:bodyPr>
+          <a:lstStyle/>
+          <a:p>
+            <a:pPr algn="r"/>
+            <a:r>
+              <a:rPr sz="1000" b="1" i="0">
+                <a:solidFill>
+                  <a:srgbClr val="A28D5B"/>
+                </a:solidFill>
+                <a:latin typeface="Calibri"/>
+              </a:rPr>
+              <a:t>ROBUSTNESS</a:t>
+            </a:r>
+          </a:p>
+        </p:txBody>
+      </p:sp>
+      <p:pic>
+        <p:nvPicPr>
+          <p:cNvPr id="5" name="Picture 4" descr="fig_is_oos_metrics.png"/>
+          <p:cNvPicPr>
+            <a:picLocks noChangeAspect="1"/>
+          </p:cNvPicPr>
+          <p:nvPr/>
+        </p:nvPicPr>
+        <p:blipFill>
+          <a:blip r:embed="rId2"/>
+          <a:stretch>
+            <a:fillRect/>
+          </a:stretch>
+        </p:blipFill>
+        <p:spPr>
+          <a:xfrm>
+            <a:off x="365760" y="1115154"/>
+            <a:ext cx="9174480" cy="4627691"/>
+          </a:xfrm>
+          <a:prstGeom prst="rect">
+            <a:avLst/>
+          </a:prstGeom>
+        </p:spPr>
+      </p:pic>
+      <p:sp>
+        <p:nvSpPr>
+          <p:cNvPr id="6" name="TextBox 5"/>
+          <p:cNvSpPr txBox="1"/>
+          <p:nvPr/>
+        </p:nvSpPr>
+        <p:spPr>
+          <a:xfrm>
+            <a:off x="365760" y="5989320"/>
+            <a:ext cx="9174480" cy="411480"/>
+          </a:xfrm>
+          <a:prstGeom prst="rect">
+            <a:avLst/>
+          </a:prstGeom>
+          <a:noFill/>
+        </p:spPr>
+        <p:txBody>
+          <a:bodyPr wrap="square">
+            <a:spAutoFit/>
+          </a:bodyPr>
+          <a:lstStyle/>
+          <a:p>
+            <a:pPr algn="l"/>
+            <a:r>
+              <a:rPr sz="1050" b="0" i="0">
+                <a:solidFill>
+                  <a:srgbClr val="1B365D"/>
+                </a:solidFill>
+                <a:latin typeface="Calibri"/>
+              </a:rPr>
+              <a:t>Sharpe decay: TY 0.41 → 0.31 (-24%); BTC 4.52 → 3.01 (-33%). Profit-per-quarter decay: TY 26%, BTC 130% (BTC's IS objective favoured smaller L which truncated the most explosive late-2024 trends — sample-specific, not a forward claim). Quarterly OOS hit rate: TY 54.8% (85/155), BTC 100% (7/7).</a:t>
+            </a:r>
+          </a:p>
+        </p:txBody>
+      </p:sp>
+      <p:sp>
+        <p:nvSpPr>
+          <p:cNvPr id="7" name="TextBox 6"/>
+          <p:cNvSpPr txBox="1"/>
+          <p:nvPr/>
+        </p:nvSpPr>
+        <p:spPr>
+          <a:xfrm>
+            <a:off x="365760" y="6446520"/>
+            <a:ext cx="9174480" cy="274320"/>
+          </a:xfrm>
+          <a:prstGeom prst="rect">
+            <a:avLst/>
+          </a:prstGeom>
+          <a:noFill/>
+        </p:spPr>
+        <p:txBody>
+          <a:bodyPr wrap="square">
+            <a:spAutoFit/>
+          </a:bodyPr>
+          <a:lstStyle/>
+          <a:p>
+            <a:pPr algn="l"/>
+            <a:r>
+              <a:rPr sz="900" b="0" i="0">
+                <a:solidFill>
+                  <a:srgbClr val="9AA1A9"/>
+                </a:solidFill>
+                <a:latin typeface="Calibri"/>
+              </a:rPr>
+              <a:t>MATH GR5360 Final Project · Group 1 · Columbia MAFN — Spring 2026</a:t>
+            </a:r>
+          </a:p>
+        </p:txBody>
+      </p:sp>
+      <p:sp>
+        <p:nvSpPr>
+          <p:cNvPr id="8" name="TextBox 7"/>
+          <p:cNvSpPr txBox="1"/>
+          <p:nvPr/>
+        </p:nvSpPr>
+        <p:spPr>
+          <a:xfrm>
+            <a:off x="8625840" y="6446520"/>
+            <a:ext cx="914400" cy="274320"/>
+          </a:xfrm>
+          <a:prstGeom prst="rect">
+            <a:avLst/>
+          </a:prstGeom>
+          <a:noFill/>
+        </p:spPr>
+        <p:txBody>
+          <a:bodyPr wrap="square">
+            <a:spAutoFit/>
+          </a:bodyPr>
+          <a:lstStyle/>
+          <a:p>
+            <a:pPr algn="r"/>
+            <a:r>
+              <a:rPr sz="900" b="0" i="0">
+                <a:solidFill>
+                  <a:srgbClr val="9AA1A9"/>
+                </a:solidFill>
+                <a:latin typeface="Calibri"/>
+              </a:rPr>
+              <a:t>39 / 41</a:t>
             </a:r>
           </a:p>
         </p:txBody>
@@ -15958,7 +16409,1122 @@
                 </a:solidFill>
                 <a:latin typeface="Calibri"/>
               </a:rPr>
-              <a:t>4 / 35</a:t>
+              <a:t>4 / 41</a:t>
+            </a:r>
+          </a:p>
+        </p:txBody>
+      </p:sp>
+    </p:spTree>
+  </p:cSld>
+  <p:clrMapOvr>
+    <a:masterClrMapping/>
+  </p:clrMapOvr>
+</p:sld>
+</file>
+
+<file path=ppt/slides/slide40.xml><?xml version="1.0" encoding="utf-8"?>
+<p:sld xmlns:a="http://schemas.openxmlformats.org/drawingml/2006/main" xmlns:p="http://schemas.openxmlformats.org/presentationml/2006/main" xmlns:r="http://schemas.openxmlformats.org/officeDocument/2006/relationships">
+  <p:cSld>
+    <p:bg>
+      <p:bgPr>
+        <a:solidFill>
+          <a:srgbClr val="FFFFFF"/>
+        </a:solidFill>
+        <a:effectLst/>
+      </p:bgPr>
+    </p:bg>
+    <p:spTree>
+      <p:nvGrpSpPr>
+        <p:cNvPr id="1" name=""/>
+        <p:cNvGrpSpPr/>
+        <p:nvPr/>
+      </p:nvGrpSpPr>
+      <p:grpSpPr/>
+      <p:sp>
+        <p:nvSpPr>
+          <p:cNvPr id="2" name="TextBox 1"/>
+          <p:cNvSpPr txBox="1"/>
+          <p:nvPr/>
+        </p:nvSpPr>
+        <p:spPr>
+          <a:xfrm>
+            <a:off x="365760" y="228600"/>
+            <a:ext cx="9174480" cy="502920"/>
+          </a:xfrm>
+          <a:prstGeom prst="rect">
+            <a:avLst/>
+          </a:prstGeom>
+          <a:noFill/>
+        </p:spPr>
+        <p:txBody>
+          <a:bodyPr wrap="square">
+            <a:spAutoFit/>
+          </a:bodyPr>
+          <a:lstStyle/>
+          <a:p>
+            <a:pPr algn="l"/>
+            <a:r>
+              <a:rPr sz="2400" b="1" i="0">
+                <a:solidFill>
+                  <a:srgbClr val="012169"/>
+                </a:solidFill>
+                <a:latin typeface="Calibri"/>
+              </a:rPr>
+              <a:t>Conclusion</a:t>
+            </a:r>
+          </a:p>
+        </p:txBody>
+      </p:sp>
+      <p:cxnSp>
+        <p:nvCxnSpPr>
+          <p:cNvPr id="3" name="Connector 2"/>
+          <p:cNvCxnSpPr/>
+          <p:nvPr/>
+        </p:nvCxnSpPr>
+        <p:spPr>
+          <a:xfrm>
+            <a:off x="365760" y="777240"/>
+            <a:ext cx="9174480" cy="0"/>
+          </a:xfrm>
+          <a:prstGeom prst="line">
+            <a:avLst/>
+          </a:prstGeom>
+          <a:ln w="12700">
+            <a:solidFill>
+              <a:srgbClr val="012169"/>
+            </a:solidFill>
+          </a:ln>
+        </p:spPr>
+        <p:style>
+          <a:lnRef idx="2">
+            <a:schemeClr val="accent1"/>
+          </a:lnRef>
+          <a:fillRef idx="0">
+            <a:schemeClr val="accent1"/>
+          </a:fillRef>
+          <a:effectRef idx="1">
+            <a:schemeClr val="accent1"/>
+          </a:effectRef>
+          <a:fontRef idx="minor">
+            <a:schemeClr val="tx1"/>
+          </a:fontRef>
+        </p:style>
+      </p:cxnSp>
+      <p:sp>
+        <p:nvSpPr>
+          <p:cNvPr id="4" name="TextBox 3"/>
+          <p:cNvSpPr txBox="1"/>
+          <p:nvPr/>
+        </p:nvSpPr>
+        <p:spPr>
+          <a:xfrm>
+            <a:off x="7528560" y="228600"/>
+            <a:ext cx="2011680" cy="365760"/>
+          </a:xfrm>
+          <a:prstGeom prst="rect">
+            <a:avLst/>
+          </a:prstGeom>
+          <a:noFill/>
+        </p:spPr>
+        <p:txBody>
+          <a:bodyPr wrap="square">
+            <a:spAutoFit/>
+          </a:bodyPr>
+          <a:lstStyle/>
+          <a:p>
+            <a:pPr algn="r"/>
+            <a:r>
+              <a:rPr sz="1000" b="1" i="0">
+                <a:solidFill>
+                  <a:srgbClr val="A28D5B"/>
+                </a:solidFill>
+                <a:latin typeface="Calibri"/>
+              </a:rPr>
+              <a:t>SUMMARY</a:t>
+            </a:r>
+          </a:p>
+        </p:txBody>
+      </p:sp>
+      <p:sp>
+        <p:nvSpPr>
+          <p:cNvPr id="5" name="TextBox 4"/>
+          <p:cNvSpPr txBox="1"/>
+          <p:nvPr/>
+        </p:nvSpPr>
+        <p:spPr>
+          <a:xfrm>
+            <a:off x="548640" y="1005840"/>
+            <a:ext cx="8808720" cy="640080"/>
+          </a:xfrm>
+          <a:prstGeom prst="rect">
+            <a:avLst/>
+          </a:prstGeom>
+          <a:noFill/>
+        </p:spPr>
+        <p:txBody>
+          <a:bodyPr wrap="square">
+            <a:spAutoFit/>
+          </a:bodyPr>
+          <a:lstStyle/>
+          <a:p>
+            <a:pPr algn="l"/>
+            <a:r>
+              <a:rPr sz="1800" b="1" i="1">
+                <a:solidFill>
+                  <a:srgbClr val="012169"/>
+                </a:solidFill>
+                <a:latin typeface="Calibri"/>
+              </a:rPr>
+              <a:t>"Trend-following is real in both markets — but the usable horizon is market-specific."</a:t>
+            </a:r>
+          </a:p>
+        </p:txBody>
+      </p:sp>
+      <p:sp>
+        <p:nvSpPr>
+          <p:cNvPr id="6" name="TextBox 5"/>
+          <p:cNvSpPr txBox="1"/>
+          <p:nvPr/>
+        </p:nvSpPr>
+        <p:spPr>
+          <a:xfrm>
+            <a:off x="548640" y="1828800"/>
+            <a:ext cx="640080" cy="914400"/>
+          </a:xfrm>
+          <a:prstGeom prst="rect">
+            <a:avLst/>
+          </a:prstGeom>
+          <a:noFill/>
+        </p:spPr>
+        <p:txBody>
+          <a:bodyPr wrap="square">
+            <a:spAutoFit/>
+          </a:bodyPr>
+          <a:lstStyle/>
+          <a:p>
+            <a:pPr algn="l"/>
+            <a:r>
+              <a:rPr sz="2800" b="1" i="0">
+                <a:solidFill>
+                  <a:srgbClr val="A28D5B"/>
+                </a:solidFill>
+                <a:latin typeface="Calibri"/>
+              </a:rPr>
+              <a:t>01</a:t>
+            </a:r>
+          </a:p>
+        </p:txBody>
+      </p:sp>
+      <p:sp>
+        <p:nvSpPr>
+          <p:cNvPr id="7" name="TextBox 6"/>
+          <p:cNvSpPr txBox="1"/>
+          <p:nvPr/>
+        </p:nvSpPr>
+        <p:spPr>
+          <a:xfrm>
+            <a:off x="1280160" y="1828800"/>
+            <a:ext cx="1920240" cy="365760"/>
+          </a:xfrm>
+          <a:prstGeom prst="rect">
+            <a:avLst/>
+          </a:prstGeom>
+          <a:noFill/>
+        </p:spPr>
+        <p:txBody>
+          <a:bodyPr wrap="square">
+            <a:spAutoFit/>
+          </a:bodyPr>
+          <a:lstStyle/>
+          <a:p>
+            <a:pPr algn="l"/>
+            <a:r>
+              <a:rPr sz="1300" b="1" i="0">
+                <a:solidFill>
+                  <a:srgbClr val="012169"/>
+                </a:solidFill>
+                <a:latin typeface="Calibri"/>
+              </a:rPr>
+              <a:t>Diagnostics</a:t>
+            </a:r>
+          </a:p>
+        </p:txBody>
+      </p:sp>
+      <p:sp>
+        <p:nvSpPr>
+          <p:cNvPr id="8" name="TextBox 7"/>
+          <p:cNvSpPr txBox="1"/>
+          <p:nvPr/>
+        </p:nvSpPr>
+        <p:spPr>
+          <a:xfrm>
+            <a:off x="3291840" y="1828800"/>
+            <a:ext cx="6248400" cy="914400"/>
+          </a:xfrm>
+          <a:prstGeom prst="rect">
+            <a:avLst/>
+          </a:prstGeom>
+          <a:noFill/>
+        </p:spPr>
+        <p:txBody>
+          <a:bodyPr wrap="square">
+            <a:spAutoFit/>
+          </a:bodyPr>
+          <a:lstStyle/>
+          <a:p>
+            <a:pPr algn="l"/>
+            <a:r>
+              <a:rPr sz="1050" b="0" i="0">
+                <a:solidFill>
+                  <a:srgbClr val="1B365D"/>
+                </a:solidFill>
+                <a:latin typeface="Calibri"/>
+              </a:rPr>
+              <a:t>Variance-ratio test and push-response confirm trend-following at the multi-week horizon for TY (Spearman ρ ≈ 0.59 at 18 sessions) and at the multi-day horizon for BTC (ρ ≈ 0.67 at 12 days). Same statistical framework — different frequency bands.</a:t>
+            </a:r>
+          </a:p>
+        </p:txBody>
+      </p:sp>
+      <p:sp>
+        <p:nvSpPr>
+          <p:cNvPr id="9" name="TextBox 8"/>
+          <p:cNvSpPr txBox="1"/>
+          <p:nvPr/>
+        </p:nvSpPr>
+        <p:spPr>
+          <a:xfrm>
+            <a:off x="548640" y="2788920"/>
+            <a:ext cx="640080" cy="914400"/>
+          </a:xfrm>
+          <a:prstGeom prst="rect">
+            <a:avLst/>
+          </a:prstGeom>
+          <a:noFill/>
+        </p:spPr>
+        <p:txBody>
+          <a:bodyPr wrap="square">
+            <a:spAutoFit/>
+          </a:bodyPr>
+          <a:lstStyle/>
+          <a:p>
+            <a:pPr algn="l"/>
+            <a:r>
+              <a:rPr sz="2800" b="1" i="0">
+                <a:solidFill>
+                  <a:srgbClr val="A28D5B"/>
+                </a:solidFill>
+                <a:latin typeface="Calibri"/>
+              </a:rPr>
+              <a:t>02</a:t>
+            </a:r>
+          </a:p>
+        </p:txBody>
+      </p:sp>
+      <p:sp>
+        <p:nvSpPr>
+          <p:cNvPr id="10" name="TextBox 9"/>
+          <p:cNvSpPr txBox="1"/>
+          <p:nvPr/>
+        </p:nvSpPr>
+        <p:spPr>
+          <a:xfrm>
+            <a:off x="1280160" y="2788920"/>
+            <a:ext cx="1920240" cy="365760"/>
+          </a:xfrm>
+          <a:prstGeom prst="rect">
+            <a:avLst/>
+          </a:prstGeom>
+          <a:noFill/>
+        </p:spPr>
+        <p:txBody>
+          <a:bodyPr wrap="square">
+            <a:spAutoFit/>
+          </a:bodyPr>
+          <a:lstStyle/>
+          <a:p>
+            <a:pPr algn="l"/>
+            <a:r>
+              <a:rPr sz="1300" b="1" i="0">
+                <a:solidFill>
+                  <a:srgbClr val="012169"/>
+                </a:solidFill>
+                <a:latin typeface="Calibri"/>
+              </a:rPr>
+              <a:t>Strategy</a:t>
+            </a:r>
+          </a:p>
+        </p:txBody>
+      </p:sp>
+      <p:sp>
+        <p:nvSpPr>
+          <p:cNvPr id="11" name="TextBox 10"/>
+          <p:cNvSpPr txBox="1"/>
+          <p:nvPr/>
+        </p:nvSpPr>
+        <p:spPr>
+          <a:xfrm>
+            <a:off x="3291840" y="2788920"/>
+            <a:ext cx="6248400" cy="914400"/>
+          </a:xfrm>
+          <a:prstGeom prst="rect">
+            <a:avLst/>
+          </a:prstGeom>
+          <a:noFill/>
+        </p:spPr>
+        <p:txBody>
+          <a:bodyPr wrap="square">
+            <a:spAutoFit/>
+          </a:bodyPr>
+          <a:lstStyle/>
+          <a:p>
+            <a:pPr algn="l"/>
+            <a:r>
+              <a:rPr sz="1050" b="0" i="0">
+                <a:solidFill>
+                  <a:srgbClr val="1B365D"/>
+                </a:solidFill>
+                <a:latin typeface="Calibri"/>
+              </a:rPr>
+              <a:t>Channel WithDDControl ported from main.m / ezread.m to Python (Numba JIT) and C++17. Walk-forward 4-yr IS / 1-Q OOS over the full ChnLen × StpPct grid, objective = Net Profit / Max Drawdown.</a:t>
+            </a:r>
+          </a:p>
+        </p:txBody>
+      </p:sp>
+      <p:sp>
+        <p:nvSpPr>
+          <p:cNvPr id="12" name="TextBox 11"/>
+          <p:cNvSpPr txBox="1"/>
+          <p:nvPr/>
+        </p:nvSpPr>
+        <p:spPr>
+          <a:xfrm>
+            <a:off x="548640" y="3749040"/>
+            <a:ext cx="640080" cy="914400"/>
+          </a:xfrm>
+          <a:prstGeom prst="rect">
+            <a:avLst/>
+          </a:prstGeom>
+          <a:noFill/>
+        </p:spPr>
+        <p:txBody>
+          <a:bodyPr wrap="square">
+            <a:spAutoFit/>
+          </a:bodyPr>
+          <a:lstStyle/>
+          <a:p>
+            <a:pPr algn="l"/>
+            <a:r>
+              <a:rPr sz="2800" b="1" i="0">
+                <a:solidFill>
+                  <a:srgbClr val="A28D5B"/>
+                </a:solidFill>
+                <a:latin typeface="Calibri"/>
+              </a:rPr>
+              <a:t>03</a:t>
+            </a:r>
+          </a:p>
+        </p:txBody>
+      </p:sp>
+      <p:sp>
+        <p:nvSpPr>
+          <p:cNvPr id="13" name="TextBox 12"/>
+          <p:cNvSpPr txBox="1"/>
+          <p:nvPr/>
+        </p:nvSpPr>
+        <p:spPr>
+          <a:xfrm>
+            <a:off x="1280160" y="3749040"/>
+            <a:ext cx="1920240" cy="365760"/>
+          </a:xfrm>
+          <a:prstGeom prst="rect">
+            <a:avLst/>
+          </a:prstGeom>
+          <a:noFill/>
+        </p:spPr>
+        <p:txBody>
+          <a:bodyPr wrap="square">
+            <a:spAutoFit/>
+          </a:bodyPr>
+          <a:lstStyle/>
+          <a:p>
+            <a:pPr algn="l"/>
+            <a:r>
+              <a:rPr sz="1300" b="1" i="0">
+                <a:solidFill>
+                  <a:srgbClr val="012169"/>
+                </a:solidFill>
+                <a:latin typeface="Calibri"/>
+              </a:rPr>
+              <a:t>OOS Results</a:t>
+            </a:r>
+          </a:p>
+        </p:txBody>
+      </p:sp>
+      <p:sp>
+        <p:nvSpPr>
+          <p:cNvPr id="14" name="TextBox 13"/>
+          <p:cNvSpPr txBox="1"/>
+          <p:nvPr/>
+        </p:nvSpPr>
+        <p:spPr>
+          <a:xfrm>
+            <a:off x="3291840" y="3749040"/>
+            <a:ext cx="6248400" cy="914400"/>
+          </a:xfrm>
+          <a:prstGeom prst="rect">
+            <a:avLst/>
+          </a:prstGeom>
+          <a:noFill/>
+        </p:spPr>
+        <p:txBody>
+          <a:bodyPr wrap="square">
+            <a:spAutoFit/>
+          </a:bodyPr>
+          <a:lstStyle/>
+          <a:p>
+            <a:pPr algn="l"/>
+            <a:r>
+              <a:rPr sz="1050" b="0" i="0">
+                <a:solidFill>
+                  <a:srgbClr val="1B365D"/>
+                </a:solidFill>
+                <a:latin typeface="Calibri"/>
+              </a:rPr>
+              <a:t>TY: $68 336 net / 4.31× RoA / Sharpe 0.31 over 1987–2026 (155 quarters). BTC: $536 397 net / 4.07× RoA / Sharpe 3.01 over 2023–2026 (7 quarters). Both deliver ≈ 4× return-on-account with full slippage charged.</a:t>
+            </a:r>
+          </a:p>
+        </p:txBody>
+      </p:sp>
+      <p:sp>
+        <p:nvSpPr>
+          <p:cNvPr id="15" name="TextBox 14"/>
+          <p:cNvSpPr txBox="1"/>
+          <p:nvPr/>
+        </p:nvSpPr>
+        <p:spPr>
+          <a:xfrm>
+            <a:off x="548640" y="4709160"/>
+            <a:ext cx="640080" cy="914400"/>
+          </a:xfrm>
+          <a:prstGeom prst="rect">
+            <a:avLst/>
+          </a:prstGeom>
+          <a:noFill/>
+        </p:spPr>
+        <p:txBody>
+          <a:bodyPr wrap="square">
+            <a:spAutoFit/>
+          </a:bodyPr>
+          <a:lstStyle/>
+          <a:p>
+            <a:pPr algn="l"/>
+            <a:r>
+              <a:rPr sz="2800" b="1" i="0">
+                <a:solidFill>
+                  <a:srgbClr val="A28D5B"/>
+                </a:solidFill>
+                <a:latin typeface="Calibri"/>
+              </a:rPr>
+              <a:t>04</a:t>
+            </a:r>
+          </a:p>
+        </p:txBody>
+      </p:sp>
+      <p:sp>
+        <p:nvSpPr>
+          <p:cNvPr id="16" name="TextBox 15"/>
+          <p:cNvSpPr txBox="1"/>
+          <p:nvPr/>
+        </p:nvSpPr>
+        <p:spPr>
+          <a:xfrm>
+            <a:off x="1280160" y="4709160"/>
+            <a:ext cx="1920240" cy="365760"/>
+          </a:xfrm>
+          <a:prstGeom prst="rect">
+            <a:avLst/>
+          </a:prstGeom>
+          <a:noFill/>
+        </p:spPr>
+        <p:txBody>
+          <a:bodyPr wrap="square">
+            <a:spAutoFit/>
+          </a:bodyPr>
+          <a:lstStyle/>
+          <a:p>
+            <a:pPr algn="l"/>
+            <a:r>
+              <a:rPr sz="1300" b="1" i="0">
+                <a:solidFill>
+                  <a:srgbClr val="012169"/>
+                </a:solidFill>
+                <a:latin typeface="Calibri"/>
+              </a:rPr>
+              <a:t>Robustness</a:t>
+            </a:r>
+          </a:p>
+        </p:txBody>
+      </p:sp>
+      <p:sp>
+        <p:nvSpPr>
+          <p:cNvPr id="17" name="TextBox 16"/>
+          <p:cNvSpPr txBox="1"/>
+          <p:nvPr/>
+        </p:nvSpPr>
+        <p:spPr>
+          <a:xfrm>
+            <a:off x="3291840" y="4709160"/>
+            <a:ext cx="6248400" cy="914400"/>
+          </a:xfrm>
+          <a:prstGeom prst="rect">
+            <a:avLst/>
+          </a:prstGeom>
+          <a:noFill/>
+        </p:spPr>
+        <p:txBody>
+          <a:bodyPr wrap="square">
+            <a:spAutoFit/>
+          </a:bodyPr>
+          <a:lstStyle/>
+          <a:p>
+            <a:pPr algn="l"/>
+            <a:r>
+              <a:rPr sz="1050" b="0" i="0">
+                <a:solidFill>
+                  <a:srgbClr val="1B365D"/>
+                </a:solidFill>
+                <a:latin typeface="Calibri"/>
+              </a:rPr>
+              <a:t>Python ↔ C++ parity to float-64 on every metric and every closed trade. T × τ sweep confirms (4 yr, 1 Q) is the well-behaved choice. 1-minute resolution earns marginally more (RoA 4.61×) but does not change the picture.</a:t>
+            </a:r>
+          </a:p>
+        </p:txBody>
+      </p:sp>
+      <p:sp>
+        <p:nvSpPr>
+          <p:cNvPr id="18" name="TextBox 17"/>
+          <p:cNvSpPr txBox="1"/>
+          <p:nvPr/>
+        </p:nvSpPr>
+        <p:spPr>
+          <a:xfrm>
+            <a:off x="365760" y="6446520"/>
+            <a:ext cx="9174480" cy="274320"/>
+          </a:xfrm>
+          <a:prstGeom prst="rect">
+            <a:avLst/>
+          </a:prstGeom>
+          <a:noFill/>
+        </p:spPr>
+        <p:txBody>
+          <a:bodyPr wrap="square">
+            <a:spAutoFit/>
+          </a:bodyPr>
+          <a:lstStyle/>
+          <a:p>
+            <a:pPr algn="l"/>
+            <a:r>
+              <a:rPr sz="900" b="0" i="0">
+                <a:solidFill>
+                  <a:srgbClr val="9AA1A9"/>
+                </a:solidFill>
+                <a:latin typeface="Calibri"/>
+              </a:rPr>
+              <a:t>MATH GR5360 Final Project · Group 1 · Columbia MAFN — Spring 2026</a:t>
+            </a:r>
+          </a:p>
+        </p:txBody>
+      </p:sp>
+      <p:sp>
+        <p:nvSpPr>
+          <p:cNvPr id="19" name="TextBox 18"/>
+          <p:cNvSpPr txBox="1"/>
+          <p:nvPr/>
+        </p:nvSpPr>
+        <p:spPr>
+          <a:xfrm>
+            <a:off x="8625840" y="6446520"/>
+            <a:ext cx="914400" cy="274320"/>
+          </a:xfrm>
+          <a:prstGeom prst="rect">
+            <a:avLst/>
+          </a:prstGeom>
+          <a:noFill/>
+        </p:spPr>
+        <p:txBody>
+          <a:bodyPr wrap="square">
+            <a:spAutoFit/>
+          </a:bodyPr>
+          <a:lstStyle/>
+          <a:p>
+            <a:pPr algn="r"/>
+            <a:r>
+              <a:rPr sz="900" b="0" i="0">
+                <a:solidFill>
+                  <a:srgbClr val="9AA1A9"/>
+                </a:solidFill>
+                <a:latin typeface="Calibri"/>
+              </a:rPr>
+              <a:t>40 / 41</a:t>
+            </a:r>
+          </a:p>
+        </p:txBody>
+      </p:sp>
+    </p:spTree>
+  </p:cSld>
+  <p:clrMapOvr>
+    <a:masterClrMapping/>
+  </p:clrMapOvr>
+</p:sld>
+</file>
+
+<file path=ppt/slides/slide41.xml><?xml version="1.0" encoding="utf-8"?>
+<p:sld xmlns:a="http://schemas.openxmlformats.org/drawingml/2006/main" xmlns:p="http://schemas.openxmlformats.org/presentationml/2006/main" xmlns:r="http://schemas.openxmlformats.org/officeDocument/2006/relationships">
+  <p:cSld>
+    <p:bg>
+      <p:bgPr>
+        <a:solidFill>
+          <a:srgbClr val="FFFFFF"/>
+        </a:solidFill>
+        <a:effectLst/>
+      </p:bgPr>
+    </p:bg>
+    <p:spTree>
+      <p:nvGrpSpPr>
+        <p:cNvPr id="1" name=""/>
+        <p:cNvGrpSpPr/>
+        <p:nvPr/>
+      </p:nvGrpSpPr>
+      <p:grpSpPr/>
+      <p:sp>
+        <p:nvSpPr>
+          <p:cNvPr id="2" name="TextBox 1"/>
+          <p:cNvSpPr txBox="1"/>
+          <p:nvPr/>
+        </p:nvSpPr>
+        <p:spPr>
+          <a:xfrm>
+            <a:off x="365760" y="228600"/>
+            <a:ext cx="9174480" cy="502920"/>
+          </a:xfrm>
+          <a:prstGeom prst="rect">
+            <a:avLst/>
+          </a:prstGeom>
+          <a:noFill/>
+        </p:spPr>
+        <p:txBody>
+          <a:bodyPr wrap="square">
+            <a:spAutoFit/>
+          </a:bodyPr>
+          <a:lstStyle/>
+          <a:p>
+            <a:pPr algn="l"/>
+            <a:r>
+              <a:rPr sz="2400" b="1" i="0">
+                <a:solidFill>
+                  <a:srgbClr val="012169"/>
+                </a:solidFill>
+                <a:latin typeface="Calibri"/>
+              </a:rPr>
+              <a:t>Appendix — repository, parity, key figures</a:t>
+            </a:r>
+          </a:p>
+        </p:txBody>
+      </p:sp>
+      <p:cxnSp>
+        <p:nvCxnSpPr>
+          <p:cNvPr id="3" name="Connector 2"/>
+          <p:cNvCxnSpPr/>
+          <p:nvPr/>
+        </p:nvCxnSpPr>
+        <p:spPr>
+          <a:xfrm>
+            <a:off x="365760" y="777240"/>
+            <a:ext cx="9174480" cy="0"/>
+          </a:xfrm>
+          <a:prstGeom prst="line">
+            <a:avLst/>
+          </a:prstGeom>
+          <a:ln w="12700">
+            <a:solidFill>
+              <a:srgbClr val="012169"/>
+            </a:solidFill>
+          </a:ln>
+        </p:spPr>
+        <p:style>
+          <a:lnRef idx="2">
+            <a:schemeClr val="accent1"/>
+          </a:lnRef>
+          <a:fillRef idx="0">
+            <a:schemeClr val="accent1"/>
+          </a:fillRef>
+          <a:effectRef idx="1">
+            <a:schemeClr val="accent1"/>
+          </a:effectRef>
+          <a:fontRef idx="minor">
+            <a:schemeClr val="tx1"/>
+          </a:fontRef>
+        </p:style>
+      </p:cxnSp>
+      <p:sp>
+        <p:nvSpPr>
+          <p:cNvPr id="4" name="TextBox 3"/>
+          <p:cNvSpPr txBox="1"/>
+          <p:nvPr/>
+        </p:nvSpPr>
+        <p:spPr>
+          <a:xfrm>
+            <a:off x="7528560" y="228600"/>
+            <a:ext cx="2011680" cy="365760"/>
+          </a:xfrm>
+          <a:prstGeom prst="rect">
+            <a:avLst/>
+          </a:prstGeom>
+          <a:noFill/>
+        </p:spPr>
+        <p:txBody>
+          <a:bodyPr wrap="square">
+            <a:spAutoFit/>
+          </a:bodyPr>
+          <a:lstStyle/>
+          <a:p>
+            <a:pPr algn="r"/>
+            <a:r>
+              <a:rPr sz="1000" b="1" i="0">
+                <a:solidFill>
+                  <a:srgbClr val="A28D5B"/>
+                </a:solidFill>
+                <a:latin typeface="Calibri"/>
+              </a:rPr>
+              <a:t>APPENDIX</a:t>
+            </a:r>
+          </a:p>
+        </p:txBody>
+      </p:sp>
+      <p:sp>
+        <p:nvSpPr>
+          <p:cNvPr id="5" name="TextBox 4"/>
+          <p:cNvSpPr txBox="1"/>
+          <p:nvPr/>
+        </p:nvSpPr>
+        <p:spPr>
+          <a:xfrm>
+            <a:off x="548640" y="1097280"/>
+            <a:ext cx="8808720" cy="4846320"/>
+          </a:xfrm>
+          <a:prstGeom prst="rect">
+            <a:avLst/>
+          </a:prstGeom>
+          <a:noFill/>
+        </p:spPr>
+        <p:txBody>
+          <a:bodyPr wrap="square">
+            <a:spAutoFit/>
+          </a:bodyPr>
+          <a:lstStyle/>
+          <a:p>
+            <a:pPr algn="l">
+              <a:lnSpc>
+                <a:spcPct val="115000"/>
+              </a:lnSpc>
+            </a:pPr>
+            <a:r>
+              <a:rPr sz="1200" b="1">
+                <a:solidFill>
+                  <a:srgbClr val="A28D5B"/>
+                </a:solidFill>
+                <a:latin typeface="Calibri"/>
+              </a:rPr>
+              <a:t>•  </a:t>
+            </a:r>
+            <a:r>
+              <a:rPr sz="1200">
+                <a:solidFill>
+                  <a:srgbClr val="1B365D"/>
+                </a:solidFill>
+                <a:latin typeface="Calibri"/>
+              </a:rPr>
+              <a:t>Repository: github.com/nl2992/MATH5360_Final_Project</a:t>
+            </a:r>
+          </a:p>
+          <a:p>
+            <a:pPr algn="l">
+              <a:lnSpc>
+                <a:spcPct val="115000"/>
+              </a:lnSpc>
+            </a:pPr>
+            <a:r>
+              <a:rPr sz="1200" b="1">
+                <a:solidFill>
+                  <a:srgbClr val="A28D5B"/>
+                </a:solidFill>
+                <a:latin typeface="Calibri"/>
+              </a:rPr>
+              <a:t>•  </a:t>
+            </a:r>
+            <a:r>
+              <a:rPr sz="1200">
+                <a:solidFill>
+                  <a:srgbClr val="1B365D"/>
+                </a:solidFill>
+                <a:latin typeface="Calibri"/>
+              </a:rPr>
+              <a:t>Walk-forward Python artifacts: results/walkforward/{TY_5m, BTC_5m, TY_1m}/</a:t>
+            </a:r>
+          </a:p>
+          <a:p>
+            <a:pPr algn="l">
+              <a:lnSpc>
+                <a:spcPct val="115000"/>
+              </a:lnSpc>
+            </a:pPr>
+            <a:r>
+              <a:rPr sz="1200" b="1">
+                <a:solidFill>
+                  <a:srgbClr val="A28D5B"/>
+                </a:solidFill>
+                <a:latin typeface="Calibri"/>
+              </a:rPr>
+              <a:t>•  </a:t>
+            </a:r>
+            <a:r>
+              <a:rPr sz="1200">
+                <a:solidFill>
+                  <a:srgbClr val="1B365D"/>
+                </a:solidFill>
+                <a:latin typeface="Calibri"/>
+              </a:rPr>
+              <a:t>C++ parity artifacts: results/cpp_parity/{TY, BTC}/</a:t>
+            </a:r>
+          </a:p>
+          <a:p>
+            <a:pPr algn="l">
+              <a:lnSpc>
+                <a:spcPct val="115000"/>
+              </a:lnSpc>
+            </a:pPr>
+            <a:r>
+              <a:rPr sz="1200" b="1">
+                <a:solidFill>
+                  <a:srgbClr val="A28D5B"/>
+                </a:solidFill>
+                <a:latin typeface="Calibri"/>
+              </a:rPr>
+              <a:t>•  </a:t>
+            </a:r>
+            <a:r>
+              <a:rPr sz="1200">
+                <a:solidFill>
+                  <a:srgbClr val="1B365D"/>
+                </a:solidFill>
+                <a:latin typeface="Calibri"/>
+              </a:rPr>
+              <a:t>Diagnostics (VR + Push-Response cached tables): results/diagnostics/</a:t>
+            </a:r>
+          </a:p>
+          <a:p>
+            <a:pPr algn="l">
+              <a:lnSpc>
+                <a:spcPct val="115000"/>
+              </a:lnSpc>
+            </a:pPr>
+            <a:r>
+              <a:rPr sz="1200" b="1">
+                <a:solidFill>
+                  <a:srgbClr val="A28D5B"/>
+                </a:solidFill>
+                <a:latin typeface="Calibri"/>
+              </a:rPr>
+              <a:t>•  </a:t>
+            </a:r>
+            <a:r>
+              <a:rPr sz="1200">
+                <a:solidFill>
+                  <a:srgbClr val="1B365D"/>
+                </a:solidFill>
+                <a:latin typeface="Calibri"/>
+              </a:rPr>
+              <a:t>Comprehensive write-up: report/FINAL_REPORT.md</a:t>
+            </a:r>
+          </a:p>
+          <a:p>
+            <a:pPr algn="l">
+              <a:lnSpc>
+                <a:spcPct val="115000"/>
+              </a:lnSpc>
+            </a:pPr>
+            <a:r>
+              <a:rPr sz="1200" b="1">
+                <a:solidFill>
+                  <a:srgbClr val="A28D5B"/>
+                </a:solidFill>
+                <a:latin typeface="Calibri"/>
+              </a:rPr>
+              <a:t>•  </a:t>
+            </a:r>
+            <a:r>
+              <a:rPr sz="1200">
+                <a:solidFill>
+                  <a:srgbClr val="1B365D"/>
+                </a:solidFill>
+                <a:latin typeface="Calibri"/>
+              </a:rPr>
+              <a:t>Slide-companion narrative: report/presentation/demo.md</a:t>
+            </a:r>
+          </a:p>
+          <a:p>
+            <a:pPr algn="l">
+              <a:lnSpc>
+                <a:spcPct val="115000"/>
+              </a:lnSpc>
+            </a:pPr>
+            <a:r>
+              <a:rPr sz="1200" b="1">
+                <a:solidFill>
+                  <a:srgbClr val="A28D5B"/>
+                </a:solidFill>
+                <a:latin typeface="Calibri"/>
+              </a:rPr>
+              <a:t>•  </a:t>
+            </a:r>
+            <a:r>
+              <a:rPr sz="1200">
+                <a:solidFill>
+                  <a:srgbClr val="1B365D"/>
+                </a:solidFill>
+                <a:latin typeface="Calibri"/>
+              </a:rPr>
+              <a:t>All figures regenerated by: scripts/build_final_report_figures.py, build_presentation_figures.py and build_front_matter_figures.py</a:t>
+            </a:r>
+          </a:p>
+          <a:p>
+            <a:pPr algn="l">
+              <a:lnSpc>
+                <a:spcPct val="115000"/>
+              </a:lnSpc>
+            </a:pPr>
+            <a:r>
+              <a:rPr sz="1200" b="1">
+                <a:solidFill>
+                  <a:srgbClr val="A28D5B"/>
+                </a:solidFill>
+                <a:latin typeface="Calibri"/>
+              </a:rPr>
+              <a:t>•  </a:t>
+            </a:r>
+            <a:r>
+              <a:rPr sz="1200">
+                <a:solidFill>
+                  <a:srgbClr val="1B365D"/>
+                </a:solidFill>
+                <a:latin typeface="Calibri"/>
+              </a:rPr>
+              <a:t>Python ↔ C++ parity: every metric and every closed trade match to float-64 — see results/walkforward/python_cpp_fidelity_comparison.csv</a:t>
+            </a:r>
+          </a:p>
+        </p:txBody>
+      </p:sp>
+      <p:sp>
+        <p:nvSpPr>
+          <p:cNvPr id="6" name="TextBox 5"/>
+          <p:cNvSpPr txBox="1"/>
+          <p:nvPr/>
+        </p:nvSpPr>
+        <p:spPr>
+          <a:xfrm>
+            <a:off x="548640" y="5943600"/>
+            <a:ext cx="8808720" cy="457200"/>
+          </a:xfrm>
+          <a:prstGeom prst="rect">
+            <a:avLst/>
+          </a:prstGeom>
+          <a:noFill/>
+        </p:spPr>
+        <p:txBody>
+          <a:bodyPr wrap="square">
+            <a:spAutoFit/>
+          </a:bodyPr>
+          <a:lstStyle/>
+          <a:p>
+            <a:pPr algn="l"/>
+            <a:r>
+              <a:rPr sz="1000" b="0" i="1">
+                <a:solidFill>
+                  <a:srgbClr val="9AA1A9"/>
+                </a:solidFill>
+                <a:latin typeface="Calibri"/>
+              </a:rPr>
+              <a:t>Channel WithDDControl ported from main.m / ezread.m. Python core JIT-compiled with Numba; C++17 reference engine confirms parity to float-64.</a:t>
+            </a:r>
+          </a:p>
+        </p:txBody>
+      </p:sp>
+      <p:sp>
+        <p:nvSpPr>
+          <p:cNvPr id="7" name="TextBox 6"/>
+          <p:cNvSpPr txBox="1"/>
+          <p:nvPr/>
+        </p:nvSpPr>
+        <p:spPr>
+          <a:xfrm>
+            <a:off x="365760" y="6446520"/>
+            <a:ext cx="9174480" cy="274320"/>
+          </a:xfrm>
+          <a:prstGeom prst="rect">
+            <a:avLst/>
+          </a:prstGeom>
+          <a:noFill/>
+        </p:spPr>
+        <p:txBody>
+          <a:bodyPr wrap="square">
+            <a:spAutoFit/>
+          </a:bodyPr>
+          <a:lstStyle/>
+          <a:p>
+            <a:pPr algn="l"/>
+            <a:r>
+              <a:rPr sz="900" b="0" i="0">
+                <a:solidFill>
+                  <a:srgbClr val="9AA1A9"/>
+                </a:solidFill>
+                <a:latin typeface="Calibri"/>
+              </a:rPr>
+              <a:t>MATH GR5360 Final Project · Group 1 · Columbia MAFN — Spring 2026</a:t>
+            </a:r>
+          </a:p>
+        </p:txBody>
+      </p:sp>
+      <p:sp>
+        <p:nvSpPr>
+          <p:cNvPr id="8" name="TextBox 7"/>
+          <p:cNvSpPr txBox="1"/>
+          <p:nvPr/>
+        </p:nvSpPr>
+        <p:spPr>
+          <a:xfrm>
+            <a:off x="8625840" y="6446520"/>
+            <a:ext cx="914400" cy="274320"/>
+          </a:xfrm>
+          <a:prstGeom prst="rect">
+            <a:avLst/>
+          </a:prstGeom>
+          <a:noFill/>
+        </p:spPr>
+        <p:txBody>
+          <a:bodyPr wrap="square">
+            <a:spAutoFit/>
+          </a:bodyPr>
+          <a:lstStyle/>
+          <a:p>
+            <a:pPr algn="r"/>
+            <a:r>
+              <a:rPr sz="900" b="0" i="0">
+                <a:solidFill>
+                  <a:srgbClr val="9AA1A9"/>
+                </a:solidFill>
+                <a:latin typeface="Calibri"/>
+              </a:rPr>
+              <a:t>41 / 41</a:t>
             </a:r>
           </a:p>
         </p:txBody>
@@ -17990,7 +19556,7 @@
                 </a:solidFill>
                 <a:latin typeface="Calibri"/>
               </a:rPr>
-              <a:t>5 / 35</a:t>
+              <a:t>5 / 41</a:t>
             </a:r>
           </a:p>
         </p:txBody>
@@ -18433,7 +19999,7 @@
                 </a:solidFill>
                 <a:latin typeface="Calibri"/>
               </a:rPr>
-              <a:t>6 / 35</a:t>
+              <a:t>6 / 41</a:t>
             </a:r>
           </a:p>
         </p:txBody>
@@ -18876,7 +20442,7 @@
                 </a:solidFill>
                 <a:latin typeface="Calibri"/>
               </a:rPr>
-              <a:t>7 / 35</a:t>
+              <a:t>7 / 41</a:t>
             </a:r>
           </a:p>
         </p:txBody>
@@ -19136,7 +20702,7 @@
                 </a:solidFill>
                 <a:latin typeface="Calibri"/>
               </a:rPr>
-              <a:t>8 / 35</a:t>
+              <a:t>8 / 41</a:t>
             </a:r>
           </a:p>
         </p:txBody>
@@ -19396,7 +20962,7 @@
                 </a:solidFill>
                 <a:latin typeface="Calibri"/>
               </a:rPr>
-              <a:t>9 / 35</a:t>
+              <a:t>9 / 41</a:t>
             </a:r>
           </a:p>
         </p:txBody>
